--- a/ppt/暖眸-居家养老AI眼镜智能体-项目说明.pptx
+++ b/ppt/暖眸-居家养老AI眼镜智能体-项目说明.pptx
@@ -25,6 +25,8 @@
     <p:sldId id="273" r:id="rId25"/>
     <p:sldId id="274" r:id="rId26"/>
     <p:sldId id="275" r:id="rId27"/>
+    <p:sldId id="276" r:id="rId28"/>
+    <p:sldId id="277" r:id="rId29"/>
   </p:sldIdLst>
   <p:sldSz cx="12191695" cy="6858000" type="screen4x3"/>
   <p:notesSz cx="6858000" cy="9144000"/>
@@ -1011,7 +1013,7 @@
           <a:lstStyle/>
           <a:p>
             <a:r>
-              <a:t>使用门槛低：不需要硬件、不需要部署云端，本机一条命令启动。</a:t>
+              <a:t>使用门槛低：不需要硬件、不需要部署云端，本机一条命令启动。网页端是初赛演示形态。</a:t>
             </a:r>
           </a:p>
         </p:txBody>
@@ -1081,7 +1083,7 @@
           <a:lstStyle/>
           <a:p>
             <a:r>
-              <a:t>合规是评审必问项：数据从哪来、存哪里、谁能删、出问题谁负责。</a:t>
+              <a:t>老人端是眼镜的伴侣屏：大屏展示、设置、SOS 与记忆查看；交互以语音优先，严格适老化。</a:t>
             </a:r>
           </a:p>
         </p:txBody>
@@ -1151,7 +1153,7 @@
           <a:lstStyle/>
           <a:p>
             <a:r>
-              <a:t>验证材料：可运行代码 + 自动化测试 + 演示视频 + 在线仓库，评审可自行复现。</a:t>
+              <a:t>子女端价值：低打扰守护——正常不打扰，异常才提醒；所有数据按授权最小可见。</a:t>
             </a:r>
           </a:p>
         </p:txBody>
@@ -1221,7 +1223,7 @@
           <a:lstStyle/>
           <a:p>
             <a:r>
-              <a:t>V1 是本次初赛交付，后续版本保持闭环可验证原则。</a:t>
+              <a:t>合规是评审必问项：数据从哪来、存哪里、谁能删、出问题谁负责。</a:t>
             </a:r>
           </a:p>
         </p:txBody>
@@ -1317,6 +1319,146 @@
 </file>
 
 <file path=ppt/notesSlides/notesSlide20.xml><?xml version="1.0" encoding="utf-8"?>
+<p:notes xmlns:a="http://schemas.openxmlformats.org/drawingml/2006/main" xmlns:p="http://schemas.openxmlformats.org/presentationml/2006/main" xmlns:r="http://schemas.openxmlformats.org/officeDocument/2006/relationships">
+  <p:cSld>
+    <p:spTree>
+      <p:nvGrpSpPr>
+        <p:cNvPr id="1" name=""/>
+        <p:cNvGrpSpPr/>
+        <p:nvPr/>
+      </p:nvGrpSpPr>
+      <p:grpSpPr>
+        <a:xfrm>
+          <a:off x="0" y="0"/>
+          <a:ext cx="0" cy="0"/>
+          <a:chOff x="0" y="0"/>
+          <a:chExt cx="0" cy="0"/>
+        </a:xfrm>
+      </p:grpSpPr>
+      <p:sp>
+        <p:nvSpPr>
+          <p:cNvPr id="2" name="Slide Image Placeholder 1"/>
+          <p:cNvSpPr>
+            <a:spLocks noGrp="1"/>
+          </p:cNvSpPr>
+          <p:nvPr>
+            <p:ph type="sldImg" idx="2"/>
+          </p:nvPr>
+        </p:nvSpPr>
+        <p:spPr/>
+      </p:sp>
+      <p:sp>
+        <p:nvSpPr>
+          <p:cNvPr id="3" name="Notes Placeholder 2"/>
+          <p:cNvSpPr>
+            <a:spLocks noGrp="1"/>
+          </p:cNvSpPr>
+          <p:nvPr>
+            <p:ph type="body" idx="3" sz="quarter"/>
+          </p:nvPr>
+        </p:nvSpPr>
+        <p:spPr/>
+        <p:txBody>
+          <a:bodyPr/>
+          <a:lstStyle/>
+          <a:p>
+            <a:r>
+              <a:t>验证材料：可运行代码 + 自动化测试 + 演示视频 + 在线仓库，评审可自行复现。</a:t>
+            </a:r>
+          </a:p>
+        </p:txBody>
+      </p:sp>
+      <p:sp>
+        <p:nvSpPr>
+          <p:cNvPr id="4" name="Slide Number Placeholder 3"/>
+          <p:cNvSpPr>
+            <a:spLocks noGrp="1"/>
+          </p:cNvSpPr>
+          <p:nvPr>
+            <p:ph type="sldNum" idx="5" sz="quarter"/>
+          </p:nvPr>
+        </p:nvSpPr>
+        <p:spPr/>
+      </p:sp>
+    </p:spTree>
+  </p:cSld>
+  <p:clrMapOvr>
+    <a:masterClrMapping/>
+  </p:clrMapOvr>
+</p:notes>
+</file>
+
+<file path=ppt/notesSlides/notesSlide21.xml><?xml version="1.0" encoding="utf-8"?>
+<p:notes xmlns:a="http://schemas.openxmlformats.org/drawingml/2006/main" xmlns:p="http://schemas.openxmlformats.org/presentationml/2006/main" xmlns:r="http://schemas.openxmlformats.org/officeDocument/2006/relationships">
+  <p:cSld>
+    <p:spTree>
+      <p:nvGrpSpPr>
+        <p:cNvPr id="1" name=""/>
+        <p:cNvGrpSpPr/>
+        <p:nvPr/>
+      </p:nvGrpSpPr>
+      <p:grpSpPr>
+        <a:xfrm>
+          <a:off x="0" y="0"/>
+          <a:ext cx="0" cy="0"/>
+          <a:chOff x="0" y="0"/>
+          <a:chExt cx="0" cy="0"/>
+        </a:xfrm>
+      </p:grpSpPr>
+      <p:sp>
+        <p:nvSpPr>
+          <p:cNvPr id="2" name="Slide Image Placeholder 1"/>
+          <p:cNvSpPr>
+            <a:spLocks noGrp="1"/>
+          </p:cNvSpPr>
+          <p:nvPr>
+            <p:ph type="sldImg" idx="2"/>
+          </p:nvPr>
+        </p:nvSpPr>
+        <p:spPr/>
+      </p:sp>
+      <p:sp>
+        <p:nvSpPr>
+          <p:cNvPr id="3" name="Notes Placeholder 2"/>
+          <p:cNvSpPr>
+            <a:spLocks noGrp="1"/>
+          </p:cNvSpPr>
+          <p:nvPr>
+            <p:ph type="body" idx="3" sz="quarter"/>
+          </p:nvPr>
+        </p:nvSpPr>
+        <p:spPr/>
+        <p:txBody>
+          <a:bodyPr/>
+          <a:lstStyle/>
+          <a:p>
+            <a:r>
+              <a:t>V1 是本次初赛交付，后续版本保持闭环可验证原则。</a:t>
+            </a:r>
+          </a:p>
+        </p:txBody>
+      </p:sp>
+      <p:sp>
+        <p:nvSpPr>
+          <p:cNvPr id="4" name="Slide Number Placeholder 3"/>
+          <p:cNvSpPr>
+            <a:spLocks noGrp="1"/>
+          </p:cNvSpPr>
+          <p:nvPr>
+            <p:ph type="sldNum" idx="5" sz="quarter"/>
+          </p:nvPr>
+        </p:nvSpPr>
+        <p:spPr/>
+      </p:sp>
+    </p:spTree>
+  </p:cSld>
+  <p:clrMapOvr>
+    <a:masterClrMapping/>
+  </p:clrMapOvr>
+</p:notes>
+</file>
+
+<file path=ppt/notesSlides/notesSlide22.xml><?xml version="1.0" encoding="utf-8"?>
 <p:notes xmlns:a="http://schemas.openxmlformats.org/drawingml/2006/main" xmlns:p="http://schemas.openxmlformats.org/presentationml/2006/main" xmlns:r="http://schemas.openxmlformats.org/officeDocument/2006/relationships">
   <p:cSld>
     <p:spTree>
@@ -12899,6 +13041,46 @@
         </p:nvSpPr>
         <p:spPr>
           <a:xfrm>
+            <a:off x="548640" y="5806440"/>
+            <a:ext cx="11091672" cy="457200"/>
+          </a:xfrm>
+          <a:prstGeom prst="rect">
+            <a:avLst/>
+          </a:prstGeom>
+          <a:noFill/>
+        </p:spPr>
+        <p:txBody>
+          <a:bodyPr wrap="square" anchor="t" lIns="0" rIns="0" tIns="0" bIns="0">
+            <a:spAutoFit/>
+          </a:bodyPr>
+          <a:lstStyle/>
+          <a:p>
+            <a:pPr algn="l">
+              <a:lnSpc>
+                <a:spcPct val="112000"/>
+              </a:lnSpc>
+            </a:pPr>
+            <a:r>
+              <a:rPr sz="1250" b="0" i="0">
+                <a:solidFill>
+                  <a:srgbClr val="FFB454"/>
+                </a:solidFill>
+                <a:latin typeface="Microsoft YaHei"/>
+                <a:ea typeface="Microsoft YaHei"/>
+              </a:rPr>
+              <a:t>说明：网页端为初赛演示形态（便于评委打开浏览器复现）；正式产品形态为「AI 眼镜 + 老人端 App + 子女端 App」，见下两页。</a:t>
+            </a:r>
+          </a:p>
+        </p:txBody>
+      </p:sp>
+      <p:sp>
+        <p:nvSpPr>
+          <p:cNvPr id="23" name="TextBox 22"/>
+          <p:cNvSpPr txBox="1"/>
+          <p:nvPr/>
+        </p:nvSpPr>
+        <p:spPr>
+          <a:xfrm>
             <a:off x="9418320" y="6510528"/>
             <a:ext cx="2377440" cy="274320"/>
           </a:xfrm>
@@ -13032,7 +13214,7 @@
                 <a:latin typeface="Microsoft YaHei"/>
                 <a:ea typeface="Microsoft YaHei"/>
               </a:rPr>
-              <a:t>8 数据来源与合规边界</a:t>
+              <a:t>7 技术实现 · 产品形态：老人端 App 构想</a:t>
             </a:r>
           </a:p>
         </p:txBody>
@@ -13072,7 +13254,7 @@
                 <a:latin typeface="Microsoft YaHei"/>
                 <a:ea typeface="Microsoft YaHei"/>
               </a:rPr>
-              <a:t>数据授权 · 隐私保护 · 风险提示 · 行业边界</a:t>
+              <a:t>网页端为初赛演示形态；正式产品为「AI 眼镜 + 老人端 App + 子女端 App」</a:t>
             </a:r>
           </a:p>
         </p:txBody>
@@ -13169,16 +13351,296 @@
         </p:nvSpPr>
         <p:spPr>
           <a:xfrm>
-            <a:off x="548640" y="1554480"/>
-            <a:ext cx="2704338" cy="3108960"/>
+            <a:off x="548640" y="1298448"/>
+            <a:ext cx="2567178" cy="960120"/>
           </a:xfrm>
           <a:prstGeom prst="roundRect">
             <a:avLst>
-              <a:gd name="adj" fmla="val 12000"/>
+              <a:gd name="adj" fmla="val 8000"/>
             </a:avLst>
           </a:prstGeom>
           <a:solidFill>
-            <a:srgbClr val="151A30"/>
+            <a:srgbClr val="1A2040"/>
+          </a:solidFill>
+          <a:ln w="12700">
+            <a:solidFill>
+              <a:srgbClr val="6D8DFF"/>
+            </a:solidFill>
+          </a:ln>
+          <a:effectLst/>
+        </p:spPr>
+        <p:style>
+          <a:lnRef idx="1">
+            <a:schemeClr val="accent1"/>
+          </a:lnRef>
+          <a:fillRef idx="3">
+            <a:schemeClr val="accent1"/>
+          </a:fillRef>
+          <a:effectRef idx="2">
+            <a:schemeClr val="accent1"/>
+          </a:effectRef>
+          <a:fontRef idx="minor">
+            <a:schemeClr val="lt1"/>
+          </a:fontRef>
+        </p:style>
+        <p:txBody>
+          <a:bodyPr rtlCol="0" anchor="ctr" wrap="square" lIns="73152" rIns="73152" tIns="27432" bIns="27432"/>
+          <a:lstStyle/>
+          <a:p>
+            <a:pPr algn="ctr">
+              <a:lnSpc>
+                <a:spcPct val="110000"/>
+              </a:lnSpc>
+            </a:pPr>
+            <a:r>
+              <a:rPr sz="1200" b="0" i="0">
+                <a:solidFill>
+                  <a:srgbClr val="E8EAF6"/>
+                </a:solidFill>
+                <a:latin typeface="Microsoft YaHei"/>
+                <a:ea typeface="Microsoft YaHei"/>
+              </a:rPr>
+              <a:t>初赛：Web 演示</a:t>
+            </a:r>
+          </a:p>
+          <a:p>
+            <a:pPr algn="ctr">
+              <a:lnSpc>
+                <a:spcPct val="110000"/>
+              </a:lnSpc>
+            </a:pPr>
+            <a:r>
+              <a:rPr sz="1200" b="0" i="0">
+                <a:solidFill>
+                  <a:srgbClr val="E8EAF6"/>
+                </a:solidFill>
+                <a:latin typeface="Microsoft YaHei"/>
+                <a:ea typeface="Microsoft YaHei"/>
+              </a:rPr>
+              <a:t>app/ + web/</a:t>
+            </a:r>
+          </a:p>
+          <a:p>
+            <a:pPr algn="ctr">
+              <a:lnSpc>
+                <a:spcPct val="110000"/>
+              </a:lnSpc>
+            </a:pPr>
+            <a:r>
+              <a:rPr sz="1200" b="0" i="0">
+                <a:solidFill>
+                  <a:srgbClr val="E8EAF6"/>
+                </a:solidFill>
+                <a:latin typeface="Microsoft YaHei"/>
+                <a:ea typeface="Microsoft YaHei"/>
+              </a:rPr>
+              <a:t>浏览器打开即用</a:t>
+            </a:r>
+          </a:p>
+        </p:txBody>
+      </p:sp>
+      <p:sp>
+        <p:nvSpPr>
+          <p:cNvPr id="8" name="Right Arrow 7"/>
+          <p:cNvSpPr/>
+          <p:nvPr/>
+        </p:nvSpPr>
+        <p:spPr>
+          <a:xfrm>
+            <a:off x="3143250" y="1645920"/>
+            <a:ext cx="219456" cy="256032"/>
+          </a:xfrm>
+          <a:prstGeom prst="rightArrow">
+            <a:avLst/>
+          </a:prstGeom>
+          <a:solidFill>
+            <a:srgbClr val="8B93B8"/>
+          </a:solidFill>
+          <a:ln>
+            <a:noFill/>
+          </a:ln>
+          <a:effectLst/>
+        </p:spPr>
+        <p:style>
+          <a:lnRef idx="1">
+            <a:schemeClr val="accent1"/>
+          </a:lnRef>
+          <a:fillRef idx="3">
+            <a:schemeClr val="accent1"/>
+          </a:fillRef>
+          <a:effectRef idx="2">
+            <a:schemeClr val="accent1"/>
+          </a:effectRef>
+          <a:fontRef idx="minor">
+            <a:schemeClr val="lt1"/>
+          </a:fontRef>
+        </p:style>
+        <p:txBody>
+          <a:bodyPr rtlCol="0" anchor="ctr"/>
+          <a:lstStyle/>
+          <a:p>
+            <a:pPr algn="ctr"/>
+          </a:p>
+        </p:txBody>
+      </p:sp>
+      <p:sp>
+        <p:nvSpPr>
+          <p:cNvPr id="9" name="Rounded Rectangle 8"/>
+          <p:cNvSpPr/>
+          <p:nvPr/>
+        </p:nvSpPr>
+        <p:spPr>
+          <a:xfrm>
+            <a:off x="3390138" y="1298448"/>
+            <a:ext cx="2567178" cy="960120"/>
+          </a:xfrm>
+          <a:prstGeom prst="roundRect">
+            <a:avLst>
+              <a:gd name="adj" fmla="val 8000"/>
+            </a:avLst>
+          </a:prstGeom>
+          <a:solidFill>
+            <a:srgbClr val="1A2040"/>
+          </a:solidFill>
+          <a:ln w="12700">
+            <a:solidFill>
+              <a:srgbClr val="57D9A3"/>
+            </a:solidFill>
+          </a:ln>
+          <a:effectLst/>
+        </p:spPr>
+        <p:style>
+          <a:lnRef idx="1">
+            <a:schemeClr val="accent1"/>
+          </a:lnRef>
+          <a:fillRef idx="3">
+            <a:schemeClr val="accent1"/>
+          </a:fillRef>
+          <a:effectRef idx="2">
+            <a:schemeClr val="accent1"/>
+          </a:effectRef>
+          <a:fontRef idx="minor">
+            <a:schemeClr val="lt1"/>
+          </a:fontRef>
+        </p:style>
+        <p:txBody>
+          <a:bodyPr rtlCol="0" anchor="ctr" wrap="square" lIns="73152" rIns="73152" tIns="27432" bIns="27432"/>
+          <a:lstStyle/>
+          <a:p>
+            <a:pPr algn="ctr">
+              <a:lnSpc>
+                <a:spcPct val="110000"/>
+              </a:lnSpc>
+            </a:pPr>
+            <a:r>
+              <a:rPr sz="1200" b="0" i="0">
+                <a:solidFill>
+                  <a:srgbClr val="E8EAF6"/>
+                </a:solidFill>
+                <a:latin typeface="Microsoft YaHei"/>
+                <a:ea typeface="Microsoft YaHei"/>
+              </a:rPr>
+              <a:t>正式：AI 眼镜</a:t>
+            </a:r>
+          </a:p>
+          <a:p>
+            <a:pPr algn="ctr">
+              <a:lnSpc>
+                <a:spcPct val="110000"/>
+              </a:lnSpc>
+            </a:pPr>
+            <a:r>
+              <a:rPr sz="1200" b="0" i="0">
+                <a:solidFill>
+                  <a:srgbClr val="E8EAF6"/>
+                </a:solidFill>
+                <a:latin typeface="Microsoft YaHei"/>
+                <a:ea typeface="Microsoft YaHei"/>
+              </a:rPr>
+              <a:t>语音 + 第一视角</a:t>
+            </a:r>
+          </a:p>
+          <a:p>
+            <a:pPr algn="ctr">
+              <a:lnSpc>
+                <a:spcPct val="110000"/>
+              </a:lnSpc>
+            </a:pPr>
+            <a:r>
+              <a:rPr sz="1200" b="0" i="0">
+                <a:solidFill>
+                  <a:srgbClr val="E8EAF6"/>
+                </a:solidFill>
+                <a:latin typeface="Microsoft YaHei"/>
+                <a:ea typeface="Microsoft YaHei"/>
+              </a:rPr>
+              <a:t>随身主入口</a:t>
+            </a:r>
+          </a:p>
+        </p:txBody>
+      </p:sp>
+      <p:sp>
+        <p:nvSpPr>
+          <p:cNvPr id="10" name="Right Arrow 9"/>
+          <p:cNvSpPr/>
+          <p:nvPr/>
+        </p:nvSpPr>
+        <p:spPr>
+          <a:xfrm>
+            <a:off x="5984748" y="1645920"/>
+            <a:ext cx="219456" cy="256032"/>
+          </a:xfrm>
+          <a:prstGeom prst="rightArrow">
+            <a:avLst/>
+          </a:prstGeom>
+          <a:solidFill>
+            <a:srgbClr val="8B93B8"/>
+          </a:solidFill>
+          <a:ln>
+            <a:noFill/>
+          </a:ln>
+          <a:effectLst/>
+        </p:spPr>
+        <p:style>
+          <a:lnRef idx="1">
+            <a:schemeClr val="accent1"/>
+          </a:lnRef>
+          <a:fillRef idx="3">
+            <a:schemeClr val="accent1"/>
+          </a:fillRef>
+          <a:effectRef idx="2">
+            <a:schemeClr val="accent1"/>
+          </a:effectRef>
+          <a:fontRef idx="minor">
+            <a:schemeClr val="lt1"/>
+          </a:fontRef>
+        </p:style>
+        <p:txBody>
+          <a:bodyPr rtlCol="0" anchor="ctr"/>
+          <a:lstStyle/>
+          <a:p>
+            <a:pPr algn="ctr"/>
+          </a:p>
+        </p:txBody>
+      </p:sp>
+      <p:sp>
+        <p:nvSpPr>
+          <p:cNvPr id="11" name="Rounded Rectangle 10"/>
+          <p:cNvSpPr/>
+          <p:nvPr/>
+        </p:nvSpPr>
+        <p:spPr>
+          <a:xfrm>
+            <a:off x="6231636" y="1298448"/>
+            <a:ext cx="2567178" cy="960120"/>
+          </a:xfrm>
+          <a:prstGeom prst="roundRect">
+            <a:avLst>
+              <a:gd name="adj" fmla="val 8000"/>
+            </a:avLst>
+          </a:prstGeom>
+          <a:solidFill>
+            <a:srgbClr val="1A2040"/>
           </a:solidFill>
           <a:ln w="12700">
             <a:solidFill>
@@ -13211,14 +13673,14 @@
               </a:lnSpc>
             </a:pPr>
             <a:r>
-              <a:rPr sz="1250" b="0" i="0">
-                <a:solidFill>
-                  <a:srgbClr val="E8EAF6"/>
-                </a:solidFill>
-                <a:latin typeface="Microsoft YaHei"/>
-                <a:ea typeface="Microsoft YaHei"/>
-              </a:rPr>
-              <a:t>数据来源</a:t>
+              <a:rPr sz="1200" b="0" i="0">
+                <a:solidFill>
+                  <a:srgbClr val="E8EAF6"/>
+                </a:solidFill>
+                <a:latin typeface="Microsoft YaHei"/>
+                <a:ea typeface="Microsoft YaHei"/>
+              </a:rPr>
+              <a:t>老人端 App</a:t>
             </a:r>
           </a:p>
           <a:p>
@@ -13228,14 +13690,14 @@
               </a:lnSpc>
             </a:pPr>
             <a:r>
-              <a:rPr sz="1250" b="0" i="0">
-                <a:solidFill>
-                  <a:srgbClr val="E8EAF6"/>
-                </a:solidFill>
-                <a:latin typeface="Microsoft YaHei"/>
-                <a:ea typeface="Microsoft YaHei"/>
-              </a:rPr>
-              <a:t/>
+              <a:rPr sz="1200" b="0" i="0">
+                <a:solidFill>
+                  <a:srgbClr val="E8EAF6"/>
+                </a:solidFill>
+                <a:latin typeface="Microsoft YaHei"/>
+                <a:ea typeface="Microsoft YaHei"/>
+              </a:rPr>
+              <a:t>适老化大字界面</a:t>
             </a:r>
           </a:p>
           <a:p>
@@ -13245,75 +13707,37 @@
               </a:lnSpc>
             </a:pPr>
             <a:r>
-              <a:rPr sz="1250" b="0" i="0">
-                <a:solidFill>
-                  <a:srgbClr val="E8EAF6"/>
-                </a:solidFill>
-                <a:latin typeface="Microsoft YaHei"/>
-                <a:ea typeface="Microsoft YaHei"/>
-              </a:rPr>
-              <a:t>用户与家属授权采集</a:t>
-            </a:r>
-          </a:p>
-          <a:p>
-            <a:pPr algn="ctr">
-              <a:lnSpc>
-                <a:spcPct val="110000"/>
-              </a:lnSpc>
-            </a:pPr>
-            <a:r>
-              <a:rPr sz="1250" b="0" i="0">
-                <a:solidFill>
-                  <a:srgbClr val="E8EAF6"/>
-                </a:solidFill>
-                <a:latin typeface="Microsoft YaHei"/>
-                <a:ea typeface="Microsoft YaHei"/>
-              </a:rPr>
-              <a:t>开源/自采模拟数据</a:t>
-            </a:r>
-          </a:p>
-          <a:p>
-            <a:pPr algn="ctr">
-              <a:lnSpc>
-                <a:spcPct val="110000"/>
-              </a:lnSpc>
-            </a:pPr>
-            <a:r>
-              <a:rPr sz="1250" b="0" i="0">
-                <a:solidFill>
-                  <a:srgbClr val="E8EAF6"/>
-                </a:solidFill>
-                <a:latin typeface="Microsoft YaHei"/>
-                <a:ea typeface="Microsoft YaHei"/>
-              </a:rPr>
-              <a:t>演示用剧本数据</a:t>
-            </a:r>
-          </a:p>
-        </p:txBody>
-      </p:sp>
-      <p:sp>
-        <p:nvSpPr>
-          <p:cNvPr id="8" name="Rounded Rectangle 7"/>
+              <a:rPr sz="1200" b="0" i="0">
+                <a:solidFill>
+                  <a:srgbClr val="E8EAF6"/>
+                </a:solidFill>
+                <a:latin typeface="Microsoft YaHei"/>
+                <a:ea typeface="Microsoft YaHei"/>
+              </a:rPr>
+              <a:t>设置 / SOS / 记忆</a:t>
+            </a:r>
+          </a:p>
+        </p:txBody>
+      </p:sp>
+      <p:sp>
+        <p:nvSpPr>
+          <p:cNvPr id="12" name="Right Arrow 11"/>
           <p:cNvSpPr/>
           <p:nvPr/>
         </p:nvSpPr>
         <p:spPr>
           <a:xfrm>
-            <a:off x="3344418" y="1554480"/>
-            <a:ext cx="2704338" cy="3108960"/>
-          </a:xfrm>
-          <a:prstGeom prst="roundRect">
-            <a:avLst>
-              <a:gd name="adj" fmla="val 12000"/>
-            </a:avLst>
+            <a:off x="8826246" y="1645920"/>
+            <a:ext cx="219456" cy="256032"/>
+          </a:xfrm>
+          <a:prstGeom prst="rightArrow">
+            <a:avLst/>
           </a:prstGeom>
           <a:solidFill>
-            <a:srgbClr val="151A30"/>
+            <a:srgbClr val="8B93B8"/>
           </a:solidFill>
-          <a:ln w="12700">
-            <a:solidFill>
-              <a:srgbClr val="57D9A3"/>
-            </a:solidFill>
+          <a:ln>
+            <a:noFill/>
           </a:ln>
           <a:effectLst/>
         </p:spPr>
@@ -13332,113 +13756,31 @@
           </a:fontRef>
         </p:style>
         <p:txBody>
-          <a:bodyPr rtlCol="0" anchor="ctr" wrap="square" lIns="73152" rIns="73152" tIns="27432" bIns="27432"/>
-          <a:lstStyle/>
-          <a:p>
-            <a:pPr algn="ctr">
-              <a:lnSpc>
-                <a:spcPct val="110000"/>
-              </a:lnSpc>
-            </a:pPr>
-            <a:r>
-              <a:rPr sz="1250" b="0" i="0">
-                <a:solidFill>
-                  <a:srgbClr val="E8EAF6"/>
-                </a:solidFill>
-                <a:latin typeface="Microsoft YaHei"/>
-                <a:ea typeface="Microsoft YaHei"/>
-              </a:rPr>
-              <a:t>隐私保护</a:t>
-            </a:r>
-          </a:p>
-          <a:p>
-            <a:pPr algn="ctr">
-              <a:lnSpc>
-                <a:spcPct val="110000"/>
-              </a:lnSpc>
-            </a:pPr>
-            <a:r>
-              <a:rPr sz="1250" b="0" i="0">
-                <a:solidFill>
-                  <a:srgbClr val="E8EAF6"/>
-                </a:solidFill>
-                <a:latin typeface="Microsoft YaHei"/>
-                <a:ea typeface="Microsoft YaHei"/>
-              </a:rPr>
-              <a:t/>
-            </a:r>
-          </a:p>
-          <a:p>
-            <a:pPr algn="ctr">
-              <a:lnSpc>
-                <a:spcPct val="110000"/>
-              </a:lnSpc>
-            </a:pPr>
-            <a:r>
-              <a:rPr sz="1250" b="0" i="0">
-                <a:solidFill>
-                  <a:srgbClr val="E8EAF6"/>
-                </a:solidFill>
-                <a:latin typeface="Microsoft YaHei"/>
-                <a:ea typeface="Microsoft YaHei"/>
-              </a:rPr>
-              <a:t>本地优先 · 最小必要</a:t>
-            </a:r>
-          </a:p>
-          <a:p>
-            <a:pPr algn="ctr">
-              <a:lnSpc>
-                <a:spcPct val="110000"/>
-              </a:lnSpc>
-            </a:pPr>
-            <a:r>
-              <a:rPr sz="1250" b="0" i="0">
-                <a:solidFill>
-                  <a:srgbClr val="E8EAF6"/>
-                </a:solidFill>
-                <a:latin typeface="Microsoft YaHei"/>
-                <a:ea typeface="Microsoft YaHei"/>
-              </a:rPr>
-              <a:t>人脸模糊 · 加密存储</a:t>
-            </a:r>
-          </a:p>
-          <a:p>
-            <a:pPr algn="ctr">
-              <a:lnSpc>
-                <a:spcPct val="110000"/>
-              </a:lnSpc>
-            </a:pPr>
-            <a:r>
-              <a:rPr sz="1250" b="0" i="0">
-                <a:solidFill>
-                  <a:srgbClr val="E8EAF6"/>
-                </a:solidFill>
-                <a:latin typeface="Microsoft YaHei"/>
-                <a:ea typeface="Microsoft YaHei"/>
-              </a:rPr>
-              <a:t>可查看、可删除、可撤回</a:t>
-            </a:r>
-          </a:p>
-        </p:txBody>
-      </p:sp>
-      <p:sp>
-        <p:nvSpPr>
-          <p:cNvPr id="9" name="Rounded Rectangle 8"/>
+          <a:bodyPr rtlCol="0" anchor="ctr"/>
+          <a:lstStyle/>
+          <a:p>
+            <a:pPr algn="ctr"/>
+          </a:p>
+        </p:txBody>
+      </p:sp>
+      <p:sp>
+        <p:nvSpPr>
+          <p:cNvPr id="13" name="Rounded Rectangle 12"/>
           <p:cNvSpPr/>
           <p:nvPr/>
         </p:nvSpPr>
         <p:spPr>
           <a:xfrm>
-            <a:off x="6140196" y="1554480"/>
-            <a:ext cx="2704338" cy="3108960"/>
+            <a:off x="9073134" y="1298448"/>
+            <a:ext cx="2567178" cy="960120"/>
           </a:xfrm>
           <a:prstGeom prst="roundRect">
             <a:avLst>
-              <a:gd name="adj" fmla="val 12000"/>
+              <a:gd name="adj" fmla="val 8000"/>
             </a:avLst>
           </a:prstGeom>
           <a:solidFill>
-            <a:srgbClr val="151A30"/>
+            <a:srgbClr val="1A2040"/>
           </a:solidFill>
           <a:ln w="12700">
             <a:solidFill>
@@ -13471,14 +13813,14 @@
               </a:lnSpc>
             </a:pPr>
             <a:r>
-              <a:rPr sz="1250" b="0" i="0">
-                <a:solidFill>
-                  <a:srgbClr val="E8EAF6"/>
-                </a:solidFill>
-                <a:latin typeface="Microsoft YaHei"/>
-                <a:ea typeface="Microsoft YaHei"/>
-              </a:rPr>
-              <a:t>合规边界</a:t>
+              <a:rPr sz="1200" b="0" i="0">
+                <a:solidFill>
+                  <a:srgbClr val="E8EAF6"/>
+                </a:solidFill>
+                <a:latin typeface="Microsoft YaHei"/>
+                <a:ea typeface="Microsoft YaHei"/>
+              </a:rPr>
+              <a:t>子女端 App</a:t>
             </a:r>
           </a:p>
           <a:p>
@@ -13488,14 +13830,14 @@
               </a:lnSpc>
             </a:pPr>
             <a:r>
-              <a:rPr sz="1250" b="0" i="0">
-                <a:solidFill>
-                  <a:srgbClr val="E8EAF6"/>
-                </a:solidFill>
-                <a:latin typeface="Microsoft YaHei"/>
-                <a:ea typeface="Microsoft YaHei"/>
-              </a:rPr>
-              <a:t/>
+              <a:rPr sz="1200" b="0" i="0">
+                <a:solidFill>
+                  <a:srgbClr val="E8EAF6"/>
+                </a:solidFill>
+                <a:latin typeface="Microsoft YaHei"/>
+                <a:ea typeface="Microsoft YaHei"/>
+              </a:rPr>
+              <a:t>远程日报 / 通知</a:t>
             </a:r>
           </a:p>
           <a:p>
@@ -13505,66 +13847,72 @@
               </a:lnSpc>
             </a:pPr>
             <a:r>
-              <a:rPr sz="1250" b="0" i="0">
-                <a:solidFill>
-                  <a:srgbClr val="E8EAF6"/>
-                </a:solidFill>
-                <a:latin typeface="Microsoft YaHei"/>
-                <a:ea typeface="Microsoft YaHei"/>
-              </a:rPr>
-              <a:t>个人信息保护法</a:t>
-            </a:r>
-          </a:p>
-          <a:p>
-            <a:pPr algn="ctr">
-              <a:lnSpc>
-                <a:spcPct val="110000"/>
-              </a:lnSpc>
-            </a:pPr>
-            <a:r>
-              <a:rPr sz="1250" b="0" i="0">
-                <a:solidFill>
-                  <a:srgbClr val="E8EAF6"/>
-                </a:solidFill>
-                <a:latin typeface="Microsoft YaHei"/>
-                <a:ea typeface="Microsoft YaHei"/>
-              </a:rPr>
-              <a:t>采集指示灯 + 知情同意</a:t>
-            </a:r>
-          </a:p>
-          <a:p>
-            <a:pPr algn="ctr">
-              <a:lnSpc>
-                <a:spcPct val="110000"/>
-              </a:lnSpc>
-            </a:pPr>
-            <a:r>
-              <a:rPr sz="1250" b="0" i="0">
-                <a:solidFill>
-                  <a:srgbClr val="E8EAF6"/>
-                </a:solidFill>
-                <a:latin typeface="Microsoft YaHei"/>
-                <a:ea typeface="Microsoft YaHei"/>
-              </a:rPr>
-              <a:t>适老化认证</a:t>
-            </a:r>
-          </a:p>
-        </p:txBody>
-      </p:sp>
-      <p:sp>
-        <p:nvSpPr>
-          <p:cNvPr id="10" name="Rounded Rectangle 9"/>
+              <a:rPr sz="1200" b="0" i="0">
+                <a:solidFill>
+                  <a:srgbClr val="E8EAF6"/>
+                </a:solidFill>
+                <a:latin typeface="Microsoft YaHei"/>
+                <a:ea typeface="Microsoft YaHei"/>
+              </a:rPr>
+              <a:t>留言 / 看护</a:t>
+            </a:r>
+          </a:p>
+        </p:txBody>
+      </p:sp>
+      <p:sp>
+        <p:nvSpPr>
+          <p:cNvPr id="14" name="TextBox 13"/>
+          <p:cNvSpPr txBox="1"/>
+          <p:nvPr/>
+        </p:nvSpPr>
+        <p:spPr>
+          <a:xfrm>
+            <a:off x="548640" y="2487168"/>
+            <a:ext cx="11091672" cy="320040"/>
+          </a:xfrm>
+          <a:prstGeom prst="rect">
+            <a:avLst/>
+          </a:prstGeom>
+          <a:noFill/>
+        </p:spPr>
+        <p:txBody>
+          <a:bodyPr wrap="square" anchor="t" lIns="0" rIns="0" tIns="0" bIns="0">
+            <a:spAutoFit/>
+          </a:bodyPr>
+          <a:lstStyle/>
+          <a:p>
+            <a:pPr algn="l">
+              <a:lnSpc>
+                <a:spcPct val="112000"/>
+              </a:lnSpc>
+            </a:pPr>
+            <a:r>
+              <a:rPr sz="1300" b="1" i="0">
+                <a:solidFill>
+                  <a:srgbClr val="FFB454"/>
+                </a:solidFill>
+                <a:latin typeface="Microsoft YaHei"/>
+                <a:ea typeface="Microsoft YaHei"/>
+              </a:rPr>
+              <a:t>老人端设计原则：大字大按钮（≥20pt / ≥56pt）· 语音优先 · 层级≤2 · 防误触二次确认 · 支持方言</a:t>
+            </a:r>
+          </a:p>
+        </p:txBody>
+      </p:sp>
+      <p:sp>
+        <p:nvSpPr>
+          <p:cNvPr id="15" name="Rounded Rectangle 14"/>
           <p:cNvSpPr/>
           <p:nvPr/>
         </p:nvSpPr>
         <p:spPr>
           <a:xfrm>
-            <a:off x="8935974" y="1554480"/>
-            <a:ext cx="2704338" cy="3108960"/>
+            <a:off x="548640" y="2880360"/>
+            <a:ext cx="3605784" cy="868680"/>
           </a:xfrm>
           <a:prstGeom prst="roundRect">
             <a:avLst>
-              <a:gd name="adj" fmla="val 12000"/>
+              <a:gd name="adj" fmla="val 10000"/>
             </a:avLst>
           </a:prstGeom>
           <a:solidFill>
@@ -13572,7 +13920,7 @@
           </a:solidFill>
           <a:ln w="12700">
             <a:solidFill>
-              <a:srgbClr val="FF6B81"/>
+              <a:srgbClr val="2A3157"/>
             </a:solidFill>
           </a:ln>
           <a:effectLst/>
@@ -13601,6 +13949,582 @@
               </a:lnSpc>
             </a:pPr>
             <a:r>
+              <a:rPr sz="1150" b="0" i="0">
+                <a:solidFill>
+                  <a:srgbClr val="E8EAF6"/>
+                </a:solidFill>
+                <a:latin typeface="Microsoft YaHei"/>
+                <a:ea typeface="Microsoft YaHei"/>
+              </a:rPr>
+              <a:t>首页 · 今日状态</a:t>
+            </a:r>
+          </a:p>
+          <a:p>
+            <a:pPr algn="ctr">
+              <a:lnSpc>
+                <a:spcPct val="110000"/>
+              </a:lnSpc>
+            </a:pPr>
+            <a:r>
+              <a:rPr sz="1150" b="0" i="0">
+                <a:solidFill>
+                  <a:srgbClr val="E8EAF6"/>
+                </a:solidFill>
+                <a:latin typeface="Microsoft YaHei"/>
+                <a:ea typeface="Microsoft YaHei"/>
+              </a:rPr>
+              <a:t>大字时间/天气/服药状态</a:t>
+            </a:r>
+          </a:p>
+          <a:p>
+            <a:pPr algn="ctr">
+              <a:lnSpc>
+                <a:spcPct val="110000"/>
+              </a:lnSpc>
+            </a:pPr>
+            <a:r>
+              <a:rPr sz="1150" b="0" i="0">
+                <a:solidFill>
+                  <a:srgbClr val="E8EAF6"/>
+                </a:solidFill>
+                <a:latin typeface="Microsoft YaHei"/>
+                <a:ea typeface="Microsoft YaHei"/>
+              </a:rPr>
+              <a:t>一键“暖眸播报”</a:t>
+            </a:r>
+          </a:p>
+        </p:txBody>
+      </p:sp>
+      <p:sp>
+        <p:nvSpPr>
+          <p:cNvPr id="16" name="Rounded Rectangle 15"/>
+          <p:cNvSpPr/>
+          <p:nvPr/>
+        </p:nvSpPr>
+        <p:spPr>
+          <a:xfrm>
+            <a:off x="4291584" y="2880360"/>
+            <a:ext cx="3605784" cy="868680"/>
+          </a:xfrm>
+          <a:prstGeom prst="roundRect">
+            <a:avLst>
+              <a:gd name="adj" fmla="val 10000"/>
+            </a:avLst>
+          </a:prstGeom>
+          <a:solidFill>
+            <a:srgbClr val="151A30"/>
+          </a:solidFill>
+          <a:ln w="12700">
+            <a:solidFill>
+              <a:srgbClr val="2A3157"/>
+            </a:solidFill>
+          </a:ln>
+          <a:effectLst/>
+        </p:spPr>
+        <p:style>
+          <a:lnRef idx="1">
+            <a:schemeClr val="accent1"/>
+          </a:lnRef>
+          <a:fillRef idx="3">
+            <a:schemeClr val="accent1"/>
+          </a:fillRef>
+          <a:effectRef idx="2">
+            <a:schemeClr val="accent1"/>
+          </a:effectRef>
+          <a:fontRef idx="minor">
+            <a:schemeClr val="lt1"/>
+          </a:fontRef>
+        </p:style>
+        <p:txBody>
+          <a:bodyPr rtlCol="0" anchor="ctr" wrap="square" lIns="73152" rIns="73152" tIns="27432" bIns="27432"/>
+          <a:lstStyle/>
+          <a:p>
+            <a:pPr algn="ctr">
+              <a:lnSpc>
+                <a:spcPct val="110000"/>
+              </a:lnSpc>
+            </a:pPr>
+            <a:r>
+              <a:rPr sz="1150" b="0" i="0">
+                <a:solidFill>
+                  <a:srgbClr val="E8EAF6"/>
+                </a:solidFill>
+                <a:latin typeface="Microsoft YaHei"/>
+                <a:ea typeface="Microsoft YaHei"/>
+              </a:rPr>
+              <a:t>语音助手</a:t>
+            </a:r>
+          </a:p>
+          <a:p>
+            <a:pPr algn="ctr">
+              <a:lnSpc>
+                <a:spcPct val="110000"/>
+              </a:lnSpc>
+            </a:pPr>
+            <a:r>
+              <a:rPr sz="1150" b="0" i="0">
+                <a:solidFill>
+                  <a:srgbClr val="E8EAF6"/>
+                </a:solidFill>
+                <a:latin typeface="Microsoft YaHei"/>
+                <a:ea typeface="Microsoft YaHei"/>
+              </a:rPr>
+              <a:t>全双工对话</a:t>
+            </a:r>
+          </a:p>
+          <a:p>
+            <a:pPr algn="ctr">
+              <a:lnSpc>
+                <a:spcPct val="110000"/>
+              </a:lnSpc>
+            </a:pPr>
+            <a:r>
+              <a:rPr sz="1150" b="0" i="0">
+                <a:solidFill>
+                  <a:srgbClr val="E8EAF6"/>
+                </a:solidFill>
+                <a:latin typeface="Microsoft YaHei"/>
+                <a:ea typeface="Microsoft YaHei"/>
+              </a:rPr>
+              <a:t>常用问题快捷卡</a:t>
+            </a:r>
+          </a:p>
+        </p:txBody>
+      </p:sp>
+      <p:sp>
+        <p:nvSpPr>
+          <p:cNvPr id="17" name="Rounded Rectangle 16"/>
+          <p:cNvSpPr/>
+          <p:nvPr/>
+        </p:nvSpPr>
+        <p:spPr>
+          <a:xfrm>
+            <a:off x="8034528" y="2880360"/>
+            <a:ext cx="3605784" cy="868680"/>
+          </a:xfrm>
+          <a:prstGeom prst="roundRect">
+            <a:avLst>
+              <a:gd name="adj" fmla="val 10000"/>
+            </a:avLst>
+          </a:prstGeom>
+          <a:solidFill>
+            <a:srgbClr val="151A30"/>
+          </a:solidFill>
+          <a:ln w="12700">
+            <a:solidFill>
+              <a:srgbClr val="2A3157"/>
+            </a:solidFill>
+          </a:ln>
+          <a:effectLst/>
+        </p:spPr>
+        <p:style>
+          <a:lnRef idx="1">
+            <a:schemeClr val="accent1"/>
+          </a:lnRef>
+          <a:fillRef idx="3">
+            <a:schemeClr val="accent1"/>
+          </a:fillRef>
+          <a:effectRef idx="2">
+            <a:schemeClr val="accent1"/>
+          </a:effectRef>
+          <a:fontRef idx="minor">
+            <a:schemeClr val="lt1"/>
+          </a:fontRef>
+        </p:style>
+        <p:txBody>
+          <a:bodyPr rtlCol="0" anchor="ctr" wrap="square" lIns="73152" rIns="73152" tIns="27432" bIns="27432"/>
+          <a:lstStyle/>
+          <a:p>
+            <a:pPr algn="ctr">
+              <a:lnSpc>
+                <a:spcPct val="110000"/>
+              </a:lnSpc>
+            </a:pPr>
+            <a:r>
+              <a:rPr sz="1150" b="0" i="0">
+                <a:solidFill>
+                  <a:srgbClr val="E8EAF6"/>
+                </a:solidFill>
+                <a:latin typeface="Microsoft YaHei"/>
+                <a:ea typeface="Microsoft YaHei"/>
+              </a:rPr>
+              <a:t>找物记录</a:t>
+            </a:r>
+          </a:p>
+          <a:p>
+            <a:pPr algn="ctr">
+              <a:lnSpc>
+                <a:spcPct val="110000"/>
+              </a:lnSpc>
+            </a:pPr>
+            <a:r>
+              <a:rPr sz="1150" b="0" i="0">
+                <a:solidFill>
+                  <a:srgbClr val="E8EAF6"/>
+                </a:solidFill>
+                <a:latin typeface="Microsoft YaHei"/>
+                <a:ea typeface="Microsoft YaHei"/>
+              </a:rPr>
+              <a:t>物品位置清单</a:t>
+            </a:r>
+          </a:p>
+          <a:p>
+            <a:pPr algn="ctr">
+              <a:lnSpc>
+                <a:spcPct val="110000"/>
+              </a:lnSpc>
+            </a:pPr>
+            <a:r>
+              <a:rPr sz="1150" b="0" i="0">
+                <a:solidFill>
+                  <a:srgbClr val="E8EAF6"/>
+                </a:solidFill>
+                <a:latin typeface="Microsoft YaHei"/>
+                <a:ea typeface="Microsoft YaHei"/>
+              </a:rPr>
+              <a:t>“我的东西都在哪”</a:t>
+            </a:r>
+          </a:p>
+        </p:txBody>
+      </p:sp>
+      <p:sp>
+        <p:nvSpPr>
+          <p:cNvPr id="18" name="Rounded Rectangle 17"/>
+          <p:cNvSpPr/>
+          <p:nvPr/>
+        </p:nvSpPr>
+        <p:spPr>
+          <a:xfrm>
+            <a:off x="548640" y="3886200"/>
+            <a:ext cx="3605784" cy="868680"/>
+          </a:xfrm>
+          <a:prstGeom prst="roundRect">
+            <a:avLst>
+              <a:gd name="adj" fmla="val 10000"/>
+            </a:avLst>
+          </a:prstGeom>
+          <a:solidFill>
+            <a:srgbClr val="151A30"/>
+          </a:solidFill>
+          <a:ln w="12700">
+            <a:solidFill>
+              <a:srgbClr val="2A3157"/>
+            </a:solidFill>
+          </a:ln>
+          <a:effectLst/>
+        </p:spPr>
+        <p:style>
+          <a:lnRef idx="1">
+            <a:schemeClr val="accent1"/>
+          </a:lnRef>
+          <a:fillRef idx="3">
+            <a:schemeClr val="accent1"/>
+          </a:fillRef>
+          <a:effectRef idx="2">
+            <a:schemeClr val="accent1"/>
+          </a:effectRef>
+          <a:fontRef idx="minor">
+            <a:schemeClr val="lt1"/>
+          </a:fontRef>
+        </p:style>
+        <p:txBody>
+          <a:bodyPr rtlCol="0" anchor="ctr" wrap="square" lIns="73152" rIns="73152" tIns="27432" bIns="27432"/>
+          <a:lstStyle/>
+          <a:p>
+            <a:pPr algn="ctr">
+              <a:lnSpc>
+                <a:spcPct val="110000"/>
+              </a:lnSpc>
+            </a:pPr>
+            <a:r>
+              <a:rPr sz="1150" b="0" i="0">
+                <a:solidFill>
+                  <a:srgbClr val="E8EAF6"/>
+                </a:solidFill>
+                <a:latin typeface="Microsoft YaHei"/>
+                <a:ea typeface="Microsoft YaHei"/>
+              </a:rPr>
+              <a:t>用药管理</a:t>
+            </a:r>
+          </a:p>
+          <a:p>
+            <a:pPr algn="ctr">
+              <a:lnSpc>
+                <a:spcPct val="110000"/>
+              </a:lnSpc>
+            </a:pPr>
+            <a:r>
+              <a:rPr sz="1150" b="0" i="0">
+                <a:solidFill>
+                  <a:srgbClr val="E8EAF6"/>
+                </a:solidFill>
+                <a:latin typeface="Microsoft YaHei"/>
+                <a:ea typeface="Microsoft YaHei"/>
+              </a:rPr>
+              <a:t>计划卡片 + 已服/待服</a:t>
+            </a:r>
+          </a:p>
+          <a:p>
+            <a:pPr algn="ctr">
+              <a:lnSpc>
+                <a:spcPct val="110000"/>
+              </a:lnSpc>
+            </a:pPr>
+            <a:r>
+              <a:rPr sz="1150" b="0" i="0">
+                <a:solidFill>
+                  <a:srgbClr val="E8EAF6"/>
+                </a:solidFill>
+                <a:latin typeface="Microsoft YaHei"/>
+                <a:ea typeface="Microsoft YaHei"/>
+              </a:rPr>
+              <a:t>漏服提醒与记录</a:t>
+            </a:r>
+          </a:p>
+        </p:txBody>
+      </p:sp>
+      <p:sp>
+        <p:nvSpPr>
+          <p:cNvPr id="19" name="Rounded Rectangle 18"/>
+          <p:cNvSpPr/>
+          <p:nvPr/>
+        </p:nvSpPr>
+        <p:spPr>
+          <a:xfrm>
+            <a:off x="4291584" y="3886200"/>
+            <a:ext cx="3605784" cy="868680"/>
+          </a:xfrm>
+          <a:prstGeom prst="roundRect">
+            <a:avLst>
+              <a:gd name="adj" fmla="val 10000"/>
+            </a:avLst>
+          </a:prstGeom>
+          <a:solidFill>
+            <a:srgbClr val="151A30"/>
+          </a:solidFill>
+          <a:ln w="12700">
+            <a:solidFill>
+              <a:srgbClr val="2A3157"/>
+            </a:solidFill>
+          </a:ln>
+          <a:effectLst/>
+        </p:spPr>
+        <p:style>
+          <a:lnRef idx="1">
+            <a:schemeClr val="accent1"/>
+          </a:lnRef>
+          <a:fillRef idx="3">
+            <a:schemeClr val="accent1"/>
+          </a:fillRef>
+          <a:effectRef idx="2">
+            <a:schemeClr val="accent1"/>
+          </a:effectRef>
+          <a:fontRef idx="minor">
+            <a:schemeClr val="lt1"/>
+          </a:fontRef>
+        </p:style>
+        <p:txBody>
+          <a:bodyPr rtlCol="0" anchor="ctr" wrap="square" lIns="73152" rIns="73152" tIns="27432" bIns="27432"/>
+          <a:lstStyle/>
+          <a:p>
+            <a:pPr algn="ctr">
+              <a:lnSpc>
+                <a:spcPct val="110000"/>
+              </a:lnSpc>
+            </a:pPr>
+            <a:r>
+              <a:rPr sz="1150" b="0" i="0">
+                <a:solidFill>
+                  <a:srgbClr val="E8EAF6"/>
+                </a:solidFill>
+                <a:latin typeface="Microsoft YaHei"/>
+                <a:ea typeface="Microsoft YaHei"/>
+              </a:rPr>
+              <a:t>安全守护</a:t>
+            </a:r>
+          </a:p>
+          <a:p>
+            <a:pPr algn="ctr">
+              <a:lnSpc>
+                <a:spcPct val="110000"/>
+              </a:lnSpc>
+            </a:pPr>
+            <a:r>
+              <a:rPr sz="1150" b="0" i="0">
+                <a:solidFill>
+                  <a:srgbClr val="E8EAF6"/>
+                </a:solidFill>
+                <a:latin typeface="Microsoft YaHei"/>
+                <a:ea typeface="Microsoft YaHei"/>
+              </a:rPr>
+              <a:t>跌倒记录 / 当前位置</a:t>
+            </a:r>
+          </a:p>
+          <a:p>
+            <a:pPr algn="ctr">
+              <a:lnSpc>
+                <a:spcPct val="110000"/>
+              </a:lnSpc>
+            </a:pPr>
+            <a:r>
+              <a:rPr sz="1150" b="0" i="0">
+                <a:solidFill>
+                  <a:srgbClr val="E8EAF6"/>
+                </a:solidFill>
+                <a:latin typeface="Microsoft YaHei"/>
+                <a:ea typeface="Microsoft YaHei"/>
+              </a:rPr>
+              <a:t>SOS 说明与联系人</a:t>
+            </a:r>
+          </a:p>
+        </p:txBody>
+      </p:sp>
+      <p:sp>
+        <p:nvSpPr>
+          <p:cNvPr id="20" name="Rounded Rectangle 19"/>
+          <p:cNvSpPr/>
+          <p:nvPr/>
+        </p:nvSpPr>
+        <p:spPr>
+          <a:xfrm>
+            <a:off x="8034528" y="3886200"/>
+            <a:ext cx="3605784" cy="868680"/>
+          </a:xfrm>
+          <a:prstGeom prst="roundRect">
+            <a:avLst>
+              <a:gd name="adj" fmla="val 10000"/>
+            </a:avLst>
+          </a:prstGeom>
+          <a:solidFill>
+            <a:srgbClr val="151A30"/>
+          </a:solidFill>
+          <a:ln w="12700">
+            <a:solidFill>
+              <a:srgbClr val="2A3157"/>
+            </a:solidFill>
+          </a:ln>
+          <a:effectLst/>
+        </p:spPr>
+        <p:style>
+          <a:lnRef idx="1">
+            <a:schemeClr val="accent1"/>
+          </a:lnRef>
+          <a:fillRef idx="3">
+            <a:schemeClr val="accent1"/>
+          </a:fillRef>
+          <a:effectRef idx="2">
+            <a:schemeClr val="accent1"/>
+          </a:effectRef>
+          <a:fontRef idx="minor">
+            <a:schemeClr val="lt1"/>
+          </a:fontRef>
+        </p:style>
+        <p:txBody>
+          <a:bodyPr rtlCol="0" anchor="ctr" wrap="square" lIns="73152" rIns="73152" tIns="27432" bIns="27432"/>
+          <a:lstStyle/>
+          <a:p>
+            <a:pPr algn="ctr">
+              <a:lnSpc>
+                <a:spcPct val="110000"/>
+              </a:lnSpc>
+            </a:pPr>
+            <a:r>
+              <a:rPr sz="1150" b="0" i="0">
+                <a:solidFill>
+                  <a:srgbClr val="E8EAF6"/>
+                </a:solidFill>
+                <a:latin typeface="Microsoft YaHei"/>
+                <a:ea typeface="Microsoft YaHei"/>
+              </a:rPr>
+              <a:t>亲情留言</a:t>
+            </a:r>
+          </a:p>
+          <a:p>
+            <a:pPr algn="ctr">
+              <a:lnSpc>
+                <a:spcPct val="110000"/>
+              </a:lnSpc>
+            </a:pPr>
+            <a:r>
+              <a:rPr sz="1150" b="0" i="0">
+                <a:solidFill>
+                  <a:srgbClr val="E8EAF6"/>
+                </a:solidFill>
+                <a:latin typeface="Microsoft YaHei"/>
+                <a:ea typeface="Microsoft YaHei"/>
+              </a:rPr>
+              <a:t>子女语音留言播放</a:t>
+            </a:r>
+          </a:p>
+          <a:p>
+            <a:pPr algn="ctr">
+              <a:lnSpc>
+                <a:spcPct val="110000"/>
+              </a:lnSpc>
+            </a:pPr>
+            <a:r>
+              <a:rPr sz="1150" b="0" i="0">
+                <a:solidFill>
+                  <a:srgbClr val="E8EAF6"/>
+                </a:solidFill>
+                <a:latin typeface="Microsoft YaHei"/>
+                <a:ea typeface="Microsoft YaHei"/>
+              </a:rPr>
+              <a:t>家庭相册回忆</a:t>
+            </a:r>
+          </a:p>
+        </p:txBody>
+      </p:sp>
+      <p:sp>
+        <p:nvSpPr>
+          <p:cNvPr id="21" name="Rounded Rectangle 20"/>
+          <p:cNvSpPr/>
+          <p:nvPr/>
+        </p:nvSpPr>
+        <p:spPr>
+          <a:xfrm>
+            <a:off x="548640" y="5029200"/>
+            <a:ext cx="11091672" cy="1234440"/>
+          </a:xfrm>
+          <a:prstGeom prst="roundRect">
+            <a:avLst>
+              <a:gd name="adj" fmla="val 6000"/>
+            </a:avLst>
+          </a:prstGeom>
+          <a:solidFill>
+            <a:srgbClr val="1A2040"/>
+          </a:solidFill>
+          <a:ln w="12700">
+            <a:solidFill>
+              <a:srgbClr val="6D8DFF"/>
+            </a:solidFill>
+          </a:ln>
+          <a:effectLst/>
+        </p:spPr>
+        <p:style>
+          <a:lnRef idx="1">
+            <a:schemeClr val="accent1"/>
+          </a:lnRef>
+          <a:fillRef idx="3">
+            <a:schemeClr val="accent1"/>
+          </a:fillRef>
+          <a:effectRef idx="2">
+            <a:schemeClr val="accent1"/>
+          </a:effectRef>
+          <a:fontRef idx="minor">
+            <a:schemeClr val="lt1"/>
+          </a:fontRef>
+        </p:style>
+        <p:txBody>
+          <a:bodyPr rtlCol="0" anchor="ctr" wrap="square" lIns="73152" rIns="73152" tIns="27432" bIns="27432"/>
+          <a:lstStyle/>
+          <a:p>
+            <a:pPr algn="ctr">
+              <a:lnSpc>
+                <a:spcPct val="110000"/>
+              </a:lnSpc>
+            </a:pPr>
+            <a:r>
               <a:rPr sz="1250" b="0" i="0">
                 <a:solidFill>
                   <a:srgbClr val="E8EAF6"/>
@@ -13608,162 +14532,14 @@
                 <a:latin typeface="Microsoft YaHei"/>
                 <a:ea typeface="Microsoft YaHei"/>
               </a:rPr>
-              <a:t>风险声明</a:t>
-            </a:r>
-          </a:p>
-          <a:p>
-            <a:pPr algn="ctr">
-              <a:lnSpc>
-                <a:spcPct val="110000"/>
-              </a:lnSpc>
-            </a:pPr>
-            <a:r>
-              <a:rPr sz="1250" b="0" i="0">
-                <a:solidFill>
-                  <a:srgbClr val="E8EAF6"/>
-                </a:solidFill>
-                <a:latin typeface="Microsoft YaHei"/>
-                <a:ea typeface="Microsoft YaHei"/>
-              </a:rPr>
-              <a:t/>
-            </a:r>
-          </a:p>
-          <a:p>
-            <a:pPr algn="ctr">
-              <a:lnSpc>
-                <a:spcPct val="110000"/>
-              </a:lnSpc>
-            </a:pPr>
-            <a:r>
-              <a:rPr sz="1250" b="0" i="0">
-                <a:solidFill>
-                  <a:srgbClr val="E8EAF6"/>
-                </a:solidFill>
-                <a:latin typeface="Microsoft YaHei"/>
-                <a:ea typeface="Microsoft YaHei"/>
-              </a:rPr>
-              <a:t>不做医疗诊断（提醒工具）</a:t>
-            </a:r>
-          </a:p>
-          <a:p>
-            <a:pPr algn="ctr">
-              <a:lnSpc>
-                <a:spcPct val="110000"/>
-              </a:lnSpc>
-            </a:pPr>
-            <a:r>
-              <a:rPr sz="1250" b="0" i="0">
-                <a:solidFill>
-                  <a:srgbClr val="E8EAF6"/>
-                </a:solidFill>
-                <a:latin typeface="Microsoft YaHei"/>
-                <a:ea typeface="Microsoft YaHei"/>
-              </a:rPr>
-              <a:t>跌倒求助为通知辅助</a:t>
-            </a:r>
-          </a:p>
-          <a:p>
-            <a:pPr algn="ctr">
-              <a:lnSpc>
-                <a:spcPct val="110000"/>
-              </a:lnSpc>
-            </a:pPr>
-            <a:r>
-              <a:rPr sz="1250" b="0" i="0">
-                <a:solidFill>
-                  <a:srgbClr val="E8EAF6"/>
-                </a:solidFill>
-                <a:latin typeface="Microsoft YaHei"/>
-                <a:ea typeface="Microsoft YaHei"/>
-              </a:rPr>
-              <a:t>误报/依赖/误触发有预案</a:t>
-            </a:r>
-          </a:p>
-        </p:txBody>
-      </p:sp>
-      <p:sp>
-        <p:nvSpPr>
-          <p:cNvPr id="11" name="TextBox 10"/>
-          <p:cNvSpPr txBox="1"/>
-          <p:nvPr/>
-        </p:nvSpPr>
-        <p:spPr>
-          <a:xfrm>
-            <a:off x="548640" y="4937760"/>
-            <a:ext cx="11064240" cy="365760"/>
-          </a:xfrm>
-          <a:prstGeom prst="rect">
-            <a:avLst/>
-          </a:prstGeom>
-          <a:noFill/>
-        </p:spPr>
-        <p:txBody>
-          <a:bodyPr wrap="square" anchor="t" lIns="0" rIns="0" tIns="0" bIns="0">
-            <a:spAutoFit/>
-          </a:bodyPr>
-          <a:lstStyle/>
-          <a:p>
-            <a:pPr algn="l">
-              <a:lnSpc>
-                <a:spcPct val="112000"/>
-              </a:lnSpc>
-            </a:pPr>
-            <a:r>
-              <a:rPr sz="1500" b="1" i="0">
-                <a:solidFill>
-                  <a:srgbClr val="FFB454"/>
-                </a:solidFill>
-                <a:latin typeface="Microsoft YaHei"/>
-                <a:ea typeface="Microsoft YaHei"/>
-              </a:rPr>
-              <a:t>核心原则：服务的是“提醒与陪伴”，把医疗诊断、急救责任明确挡在边界之外。</a:t>
-            </a:r>
-          </a:p>
-        </p:txBody>
-      </p:sp>
-      <p:sp>
-        <p:nvSpPr>
-          <p:cNvPr id="12" name="TextBox 11"/>
-          <p:cNvSpPr txBox="1"/>
-          <p:nvPr/>
-        </p:nvSpPr>
-        <p:spPr>
-          <a:xfrm>
-            <a:off x="548640" y="5440680"/>
-            <a:ext cx="11064240" cy="365760"/>
-          </a:xfrm>
-          <a:prstGeom prst="rect">
-            <a:avLst/>
-          </a:prstGeom>
-          <a:noFill/>
-        </p:spPr>
-        <p:txBody>
-          <a:bodyPr wrap="square" anchor="t" lIns="0" rIns="0" tIns="0" bIns="0">
-            <a:spAutoFit/>
-          </a:bodyPr>
-          <a:lstStyle/>
-          <a:p>
-            <a:pPr algn="l">
-              <a:lnSpc>
-                <a:spcPct val="112000"/>
-              </a:lnSpc>
-            </a:pPr>
-            <a:r>
-              <a:rPr sz="1300" b="0" i="0">
-                <a:solidFill>
-                  <a:srgbClr val="8B93B8"/>
-                </a:solidFill>
-                <a:latin typeface="Microsoft YaHei"/>
-                <a:ea typeface="Microsoft YaHei"/>
-              </a:rPr>
-              <a:t>真实版实现：API Key 仅保存在本机 app/config.json（已 gitignore，不会进入代码仓库）</a:t>
-            </a:r>
-          </a:p>
-        </p:txBody>
-      </p:sp>
-      <p:sp>
-        <p:nvSpPr>
-          <p:cNvPr id="13" name="TextBox 12"/>
+              <a:t>首页界面构想（线框）：顶部 大字时间 + 天气 ┃ 中部 用药大卡片（今日已服 ✓ / 待服）┃ 底部 三大金刚按钮：语音助手 · 找东西 · SOS（红色大字）</a:t>
+            </a:r>
+          </a:p>
+        </p:txBody>
+      </p:sp>
+      <p:sp>
+        <p:nvSpPr>
+          <p:cNvPr id="22" name="TextBox 21"/>
           <p:cNvSpPr txBox="1"/>
           <p:nvPr/>
         </p:nvSpPr>
@@ -13902,7 +14678,7 @@
                 <a:latin typeface="Microsoft YaHei"/>
                 <a:ea typeface="Microsoft YaHei"/>
               </a:rPr>
-              <a:t>9 Demo 与验证</a:t>
+              <a:t>7 技术实现 · 产品形态：子女端 App 与双端联动</a:t>
             </a:r>
           </a:p>
         </p:txBody>
@@ -13942,7 +14718,7 @@
                 <a:latin typeface="Microsoft YaHei"/>
                 <a:ea typeface="Microsoft YaHei"/>
               </a:rPr>
-              <a:t>真实运行演示 + 自动化测试 + 无 Key 兜底</a:t>
+              <a:t>子女端：远程守护与低打扰沟通</a:t>
             </a:r>
           </a:p>
         </p:txBody>
@@ -14039,16 +14815,632 @@
         </p:nvSpPr>
         <p:spPr>
           <a:xfrm>
-            <a:off x="548640" y="1463040"/>
-            <a:ext cx="5394960" cy="3108960"/>
+            <a:off x="548640" y="1371600"/>
+            <a:ext cx="3605784" cy="868680"/>
           </a:xfrm>
           <a:prstGeom prst="roundRect">
             <a:avLst>
-              <a:gd name="adj" fmla="val 6000"/>
+              <a:gd name="adj" fmla="val 10000"/>
             </a:avLst>
           </a:prstGeom>
           <a:solidFill>
             <a:srgbClr val="151A30"/>
+          </a:solidFill>
+          <a:ln w="12700">
+            <a:solidFill>
+              <a:srgbClr val="2A3157"/>
+            </a:solidFill>
+          </a:ln>
+          <a:effectLst/>
+        </p:spPr>
+        <p:style>
+          <a:lnRef idx="1">
+            <a:schemeClr val="accent1"/>
+          </a:lnRef>
+          <a:fillRef idx="3">
+            <a:schemeClr val="accent1"/>
+          </a:fillRef>
+          <a:effectRef idx="2">
+            <a:schemeClr val="accent1"/>
+          </a:effectRef>
+          <a:fontRef idx="minor">
+            <a:schemeClr val="lt1"/>
+          </a:fontRef>
+        </p:style>
+        <p:txBody>
+          <a:bodyPr rtlCol="0" anchor="ctr" wrap="square" lIns="73152" rIns="73152" tIns="27432" bIns="27432"/>
+          <a:lstStyle/>
+          <a:p>
+            <a:pPr algn="ctr">
+              <a:lnSpc>
+                <a:spcPct val="110000"/>
+              </a:lnSpc>
+            </a:pPr>
+            <a:r>
+              <a:rPr sz="1150" b="0" i="0">
+                <a:solidFill>
+                  <a:srgbClr val="E8EAF6"/>
+                </a:solidFill>
+                <a:latin typeface="Microsoft YaHei"/>
+                <a:ea typeface="Microsoft YaHei"/>
+              </a:rPr>
+              <a:t>今日概况日报</a:t>
+            </a:r>
+          </a:p>
+          <a:p>
+            <a:pPr algn="ctr">
+              <a:lnSpc>
+                <a:spcPct val="110000"/>
+              </a:lnSpc>
+            </a:pPr>
+            <a:r>
+              <a:rPr sz="1150" b="0" i="0">
+                <a:solidFill>
+                  <a:srgbClr val="E8EAF6"/>
+                </a:solidFill>
+                <a:latin typeface="Microsoft YaHei"/>
+                <a:ea typeface="Microsoft YaHei"/>
+              </a:rPr>
+              <a:t>“今天都挺好”</a:t>
+            </a:r>
+          </a:p>
+          <a:p>
+            <a:pPr algn="ctr">
+              <a:lnSpc>
+                <a:spcPct val="110000"/>
+              </a:lnSpc>
+            </a:pPr>
+            <a:r>
+              <a:rPr sz="1150" b="0" i="0">
+                <a:solidFill>
+                  <a:srgbClr val="E8EAF6"/>
+                </a:solidFill>
+                <a:latin typeface="Microsoft YaHei"/>
+                <a:ea typeface="Microsoft YaHei"/>
+              </a:rPr>
+              <a:t>异常才展开详情</a:t>
+            </a:r>
+          </a:p>
+        </p:txBody>
+      </p:sp>
+      <p:sp>
+        <p:nvSpPr>
+          <p:cNvPr id="8" name="Rounded Rectangle 7"/>
+          <p:cNvSpPr/>
+          <p:nvPr/>
+        </p:nvSpPr>
+        <p:spPr>
+          <a:xfrm>
+            <a:off x="4291584" y="1371600"/>
+            <a:ext cx="3605784" cy="868680"/>
+          </a:xfrm>
+          <a:prstGeom prst="roundRect">
+            <a:avLst>
+              <a:gd name="adj" fmla="val 10000"/>
+            </a:avLst>
+          </a:prstGeom>
+          <a:solidFill>
+            <a:srgbClr val="151A30"/>
+          </a:solidFill>
+          <a:ln w="12700">
+            <a:solidFill>
+              <a:srgbClr val="2A3157"/>
+            </a:solidFill>
+          </a:ln>
+          <a:effectLst/>
+        </p:spPr>
+        <p:style>
+          <a:lnRef idx="1">
+            <a:schemeClr val="accent1"/>
+          </a:lnRef>
+          <a:fillRef idx="3">
+            <a:schemeClr val="accent1"/>
+          </a:fillRef>
+          <a:effectRef idx="2">
+            <a:schemeClr val="accent1"/>
+          </a:effectRef>
+          <a:fontRef idx="minor">
+            <a:schemeClr val="lt1"/>
+          </a:fontRef>
+        </p:style>
+        <p:txBody>
+          <a:bodyPr rtlCol="0" anchor="ctr" wrap="square" lIns="73152" rIns="73152" tIns="27432" bIns="27432"/>
+          <a:lstStyle/>
+          <a:p>
+            <a:pPr algn="ctr">
+              <a:lnSpc>
+                <a:spcPct val="110000"/>
+              </a:lnSpc>
+            </a:pPr>
+            <a:r>
+              <a:rPr sz="1150" b="0" i="0">
+                <a:solidFill>
+                  <a:srgbClr val="E8EAF6"/>
+                </a:solidFill>
+                <a:latin typeface="Microsoft YaHei"/>
+                <a:ea typeface="Microsoft YaHei"/>
+              </a:rPr>
+              <a:t>实时状态</a:t>
+            </a:r>
+          </a:p>
+          <a:p>
+            <a:pPr algn="ctr">
+              <a:lnSpc>
+                <a:spcPct val="110000"/>
+              </a:lnSpc>
+            </a:pPr>
+            <a:r>
+              <a:rPr sz="1150" b="0" i="0">
+                <a:solidFill>
+                  <a:srgbClr val="E8EAF6"/>
+                </a:solidFill>
+                <a:latin typeface="Microsoft YaHei"/>
+                <a:ea typeface="Microsoft YaHei"/>
+              </a:rPr>
+              <a:t>位置 / 眼镜电量</a:t>
+            </a:r>
+          </a:p>
+          <a:p>
+            <a:pPr algn="ctr">
+              <a:lnSpc>
+                <a:spcPct val="110000"/>
+              </a:lnSpc>
+            </a:pPr>
+            <a:r>
+              <a:rPr sz="1150" b="0" i="0">
+                <a:solidFill>
+                  <a:srgbClr val="E8EAF6"/>
+                </a:solidFill>
+                <a:latin typeface="Microsoft YaHei"/>
+                <a:ea typeface="Microsoft YaHei"/>
+              </a:rPr>
+              <a:t>是否佩戴 / 活动</a:t>
+            </a:r>
+          </a:p>
+        </p:txBody>
+      </p:sp>
+      <p:sp>
+        <p:nvSpPr>
+          <p:cNvPr id="9" name="Rounded Rectangle 8"/>
+          <p:cNvSpPr/>
+          <p:nvPr/>
+        </p:nvSpPr>
+        <p:spPr>
+          <a:xfrm>
+            <a:off x="8034528" y="1371600"/>
+            <a:ext cx="3605784" cy="868680"/>
+          </a:xfrm>
+          <a:prstGeom prst="roundRect">
+            <a:avLst>
+              <a:gd name="adj" fmla="val 10000"/>
+            </a:avLst>
+          </a:prstGeom>
+          <a:solidFill>
+            <a:srgbClr val="151A30"/>
+          </a:solidFill>
+          <a:ln w="12700">
+            <a:solidFill>
+              <a:srgbClr val="2A3157"/>
+            </a:solidFill>
+          </a:ln>
+          <a:effectLst/>
+        </p:spPr>
+        <p:style>
+          <a:lnRef idx="1">
+            <a:schemeClr val="accent1"/>
+          </a:lnRef>
+          <a:fillRef idx="3">
+            <a:schemeClr val="accent1"/>
+          </a:fillRef>
+          <a:effectRef idx="2">
+            <a:schemeClr val="accent1"/>
+          </a:effectRef>
+          <a:fontRef idx="minor">
+            <a:schemeClr val="lt1"/>
+          </a:fontRef>
+        </p:style>
+        <p:txBody>
+          <a:bodyPr rtlCol="0" anchor="ctr" wrap="square" lIns="73152" rIns="73152" tIns="27432" bIns="27432"/>
+          <a:lstStyle/>
+          <a:p>
+            <a:pPr algn="ctr">
+              <a:lnSpc>
+                <a:spcPct val="110000"/>
+              </a:lnSpc>
+            </a:pPr>
+            <a:r>
+              <a:rPr sz="1150" b="0" i="0">
+                <a:solidFill>
+                  <a:srgbClr val="E8EAF6"/>
+                </a:solidFill>
+                <a:latin typeface="Microsoft YaHei"/>
+                <a:ea typeface="Microsoft YaHei"/>
+              </a:rPr>
+              <a:t>用药看板</a:t>
+            </a:r>
+          </a:p>
+          <a:p>
+            <a:pPr algn="ctr">
+              <a:lnSpc>
+                <a:spcPct val="110000"/>
+              </a:lnSpc>
+            </a:pPr>
+            <a:r>
+              <a:rPr sz="1150" b="0" i="0">
+                <a:solidFill>
+                  <a:srgbClr val="E8EAF6"/>
+                </a:solidFill>
+                <a:latin typeface="Microsoft YaHei"/>
+                <a:ea typeface="Microsoft YaHei"/>
+              </a:rPr>
+              <a:t>今日与本周记录</a:t>
+            </a:r>
+          </a:p>
+          <a:p>
+            <a:pPr algn="ctr">
+              <a:lnSpc>
+                <a:spcPct val="110000"/>
+              </a:lnSpc>
+            </a:pPr>
+            <a:r>
+              <a:rPr sz="1150" b="0" i="0">
+                <a:solidFill>
+                  <a:srgbClr val="E8EAF6"/>
+                </a:solidFill>
+                <a:latin typeface="Microsoft YaHei"/>
+                <a:ea typeface="Microsoft YaHei"/>
+              </a:rPr>
+              <a:t>漏服红色提醒</a:t>
+            </a:r>
+          </a:p>
+        </p:txBody>
+      </p:sp>
+      <p:sp>
+        <p:nvSpPr>
+          <p:cNvPr id="10" name="Rounded Rectangle 9"/>
+          <p:cNvSpPr/>
+          <p:nvPr/>
+        </p:nvSpPr>
+        <p:spPr>
+          <a:xfrm>
+            <a:off x="548640" y="2377440"/>
+            <a:ext cx="3605784" cy="868680"/>
+          </a:xfrm>
+          <a:prstGeom prst="roundRect">
+            <a:avLst>
+              <a:gd name="adj" fmla="val 10000"/>
+            </a:avLst>
+          </a:prstGeom>
+          <a:solidFill>
+            <a:srgbClr val="151A30"/>
+          </a:solidFill>
+          <a:ln w="12700">
+            <a:solidFill>
+              <a:srgbClr val="2A3157"/>
+            </a:solidFill>
+          </a:ln>
+          <a:effectLst/>
+        </p:spPr>
+        <p:style>
+          <a:lnRef idx="1">
+            <a:schemeClr val="accent1"/>
+          </a:lnRef>
+          <a:fillRef idx="3">
+            <a:schemeClr val="accent1"/>
+          </a:fillRef>
+          <a:effectRef idx="2">
+            <a:schemeClr val="accent1"/>
+          </a:effectRef>
+          <a:fontRef idx="minor">
+            <a:schemeClr val="lt1"/>
+          </a:fontRef>
+        </p:style>
+        <p:txBody>
+          <a:bodyPr rtlCol="0" anchor="ctr" wrap="square" lIns="73152" rIns="73152" tIns="27432" bIns="27432"/>
+          <a:lstStyle/>
+          <a:p>
+            <a:pPr algn="ctr">
+              <a:lnSpc>
+                <a:spcPct val="110000"/>
+              </a:lnSpc>
+            </a:pPr>
+            <a:r>
+              <a:rPr sz="1150" b="0" i="0">
+                <a:solidFill>
+                  <a:srgbClr val="E8EAF6"/>
+                </a:solidFill>
+                <a:latin typeface="Microsoft YaHei"/>
+                <a:ea typeface="Microsoft YaHei"/>
+              </a:rPr>
+              <a:t>异常通知</a:t>
+            </a:r>
+          </a:p>
+          <a:p>
+            <a:pPr algn="ctr">
+              <a:lnSpc>
+                <a:spcPct val="110000"/>
+              </a:lnSpc>
+            </a:pPr>
+            <a:r>
+              <a:rPr sz="1150" b="0" i="0">
+                <a:solidFill>
+                  <a:srgbClr val="E8EAF6"/>
+                </a:solidFill>
+                <a:latin typeface="Microsoft YaHei"/>
+                <a:ea typeface="Microsoft YaHei"/>
+              </a:rPr>
+              <a:t>跌倒 / 久未活动</a:t>
+            </a:r>
+          </a:p>
+          <a:p>
+            <a:pPr algn="ctr">
+              <a:lnSpc>
+                <a:spcPct val="110000"/>
+              </a:lnSpc>
+            </a:pPr>
+            <a:r>
+              <a:rPr sz="1150" b="0" i="0">
+                <a:solidFill>
+                  <a:srgbClr val="E8EAF6"/>
+                </a:solidFill>
+                <a:latin typeface="Microsoft YaHei"/>
+                <a:ea typeface="Microsoft YaHei"/>
+              </a:rPr>
+              <a:t>深夜未归 + 快照</a:t>
+            </a:r>
+          </a:p>
+        </p:txBody>
+      </p:sp>
+      <p:sp>
+        <p:nvSpPr>
+          <p:cNvPr id="11" name="Rounded Rectangle 10"/>
+          <p:cNvSpPr/>
+          <p:nvPr/>
+        </p:nvSpPr>
+        <p:spPr>
+          <a:xfrm>
+            <a:off x="4291584" y="2377440"/>
+            <a:ext cx="3605784" cy="868680"/>
+          </a:xfrm>
+          <a:prstGeom prst="roundRect">
+            <a:avLst>
+              <a:gd name="adj" fmla="val 10000"/>
+            </a:avLst>
+          </a:prstGeom>
+          <a:solidFill>
+            <a:srgbClr val="151A30"/>
+          </a:solidFill>
+          <a:ln w="12700">
+            <a:solidFill>
+              <a:srgbClr val="2A3157"/>
+            </a:solidFill>
+          </a:ln>
+          <a:effectLst/>
+        </p:spPr>
+        <p:style>
+          <a:lnRef idx="1">
+            <a:schemeClr val="accent1"/>
+          </a:lnRef>
+          <a:fillRef idx="3">
+            <a:schemeClr val="accent1"/>
+          </a:fillRef>
+          <a:effectRef idx="2">
+            <a:schemeClr val="accent1"/>
+          </a:effectRef>
+          <a:fontRef idx="minor">
+            <a:schemeClr val="lt1"/>
+          </a:fontRef>
+        </p:style>
+        <p:txBody>
+          <a:bodyPr rtlCol="0" anchor="ctr" wrap="square" lIns="73152" rIns="73152" tIns="27432" bIns="27432"/>
+          <a:lstStyle/>
+          <a:p>
+            <a:pPr algn="ctr">
+              <a:lnSpc>
+                <a:spcPct val="110000"/>
+              </a:lnSpc>
+            </a:pPr>
+            <a:r>
+              <a:rPr sz="1150" b="0" i="0">
+                <a:solidFill>
+                  <a:srgbClr val="E8EAF6"/>
+                </a:solidFill>
+                <a:latin typeface="Microsoft YaHei"/>
+                <a:ea typeface="Microsoft YaHei"/>
+              </a:rPr>
+              <a:t>沟通</a:t>
+            </a:r>
+          </a:p>
+          <a:p>
+            <a:pPr algn="ctr">
+              <a:lnSpc>
+                <a:spcPct val="110000"/>
+              </a:lnSpc>
+            </a:pPr>
+            <a:r>
+              <a:rPr sz="1150" b="0" i="0">
+                <a:solidFill>
+                  <a:srgbClr val="E8EAF6"/>
+                </a:solidFill>
+                <a:latin typeface="Microsoft YaHei"/>
+                <a:ea typeface="Microsoft YaHei"/>
+              </a:rPr>
+              <a:t>语音留言给老人</a:t>
+            </a:r>
+          </a:p>
+          <a:p>
+            <a:pPr algn="ctr">
+              <a:lnSpc>
+                <a:spcPct val="110000"/>
+              </a:lnSpc>
+            </a:pPr>
+            <a:r>
+              <a:rPr sz="1150" b="0" i="0">
+                <a:solidFill>
+                  <a:srgbClr val="E8EAF6"/>
+                </a:solidFill>
+                <a:latin typeface="Microsoft YaHei"/>
+                <a:ea typeface="Microsoft YaHei"/>
+              </a:rPr>
+              <a:t>视频通话入口</a:t>
+            </a:r>
+          </a:p>
+        </p:txBody>
+      </p:sp>
+      <p:sp>
+        <p:nvSpPr>
+          <p:cNvPr id="12" name="Rounded Rectangle 11"/>
+          <p:cNvSpPr/>
+          <p:nvPr/>
+        </p:nvSpPr>
+        <p:spPr>
+          <a:xfrm>
+            <a:off x="8034528" y="2377440"/>
+            <a:ext cx="3605784" cy="868680"/>
+          </a:xfrm>
+          <a:prstGeom prst="roundRect">
+            <a:avLst>
+              <a:gd name="adj" fmla="val 10000"/>
+            </a:avLst>
+          </a:prstGeom>
+          <a:solidFill>
+            <a:srgbClr val="151A30"/>
+          </a:solidFill>
+          <a:ln w="12700">
+            <a:solidFill>
+              <a:srgbClr val="2A3157"/>
+            </a:solidFill>
+          </a:ln>
+          <a:effectLst/>
+        </p:spPr>
+        <p:style>
+          <a:lnRef idx="1">
+            <a:schemeClr val="accent1"/>
+          </a:lnRef>
+          <a:fillRef idx="3">
+            <a:schemeClr val="accent1"/>
+          </a:fillRef>
+          <a:effectRef idx="2">
+            <a:schemeClr val="accent1"/>
+          </a:effectRef>
+          <a:fontRef idx="minor">
+            <a:schemeClr val="lt1"/>
+          </a:fontRef>
+        </p:style>
+        <p:txBody>
+          <a:bodyPr rtlCol="0" anchor="ctr" wrap="square" lIns="73152" rIns="73152" tIns="27432" bIns="27432"/>
+          <a:lstStyle/>
+          <a:p>
+            <a:pPr algn="ctr">
+              <a:lnSpc>
+                <a:spcPct val="110000"/>
+              </a:lnSpc>
+            </a:pPr>
+            <a:r>
+              <a:rPr sz="1150" b="0" i="0">
+                <a:solidFill>
+                  <a:srgbClr val="E8EAF6"/>
+                </a:solidFill>
+                <a:latin typeface="Microsoft YaHei"/>
+                <a:ea typeface="Microsoft YaHei"/>
+              </a:rPr>
+              <a:t>隐私与偏好</a:t>
+            </a:r>
+          </a:p>
+          <a:p>
+            <a:pPr algn="ctr">
+              <a:lnSpc>
+                <a:spcPct val="110000"/>
+              </a:lnSpc>
+            </a:pPr>
+            <a:r>
+              <a:rPr sz="1150" b="0" i="0">
+                <a:solidFill>
+                  <a:srgbClr val="E8EAF6"/>
+                </a:solidFill>
+                <a:latin typeface="Microsoft YaHei"/>
+                <a:ea typeface="Microsoft YaHei"/>
+              </a:rPr>
+              <a:t>可见范围 / 通知级别</a:t>
+            </a:r>
+          </a:p>
+          <a:p>
+            <a:pPr algn="ctr">
+              <a:lnSpc>
+                <a:spcPct val="110000"/>
+              </a:lnSpc>
+            </a:pPr>
+            <a:r>
+              <a:rPr sz="1150" b="0" i="0">
+                <a:solidFill>
+                  <a:srgbClr val="E8EAF6"/>
+                </a:solidFill>
+                <a:latin typeface="Microsoft YaHei"/>
+                <a:ea typeface="Microsoft YaHei"/>
+              </a:rPr>
+              <a:t>低打扰设置</a:t>
+            </a:r>
+          </a:p>
+        </p:txBody>
+      </p:sp>
+      <p:sp>
+        <p:nvSpPr>
+          <p:cNvPr id="13" name="TextBox 12"/>
+          <p:cNvSpPr txBox="1"/>
+          <p:nvPr/>
+        </p:nvSpPr>
+        <p:spPr>
+          <a:xfrm>
+            <a:off x="548640" y="3611880"/>
+            <a:ext cx="11091672" cy="320040"/>
+          </a:xfrm>
+          <a:prstGeom prst="rect">
+            <a:avLst/>
+          </a:prstGeom>
+          <a:noFill/>
+        </p:spPr>
+        <p:txBody>
+          <a:bodyPr wrap="square" anchor="t" lIns="0" rIns="0" tIns="0" bIns="0">
+            <a:spAutoFit/>
+          </a:bodyPr>
+          <a:lstStyle/>
+          <a:p>
+            <a:pPr algn="l">
+              <a:lnSpc>
+                <a:spcPct val="112000"/>
+              </a:lnSpc>
+            </a:pPr>
+            <a:r>
+              <a:rPr sz="1400" b="1" i="0">
+                <a:solidFill>
+                  <a:srgbClr val="E8EAF6"/>
+                </a:solidFill>
+                <a:latin typeface="Microsoft YaHei"/>
+                <a:ea typeface="Microsoft YaHei"/>
+              </a:rPr>
+              <a:t>双端与眼镜联动（数据流）</a:t>
+            </a:r>
+          </a:p>
+        </p:txBody>
+      </p:sp>
+      <p:sp>
+        <p:nvSpPr>
+          <p:cNvPr id="14" name="Rounded Rectangle 13"/>
+          <p:cNvSpPr/>
+          <p:nvPr/>
+        </p:nvSpPr>
+        <p:spPr>
+          <a:xfrm>
+            <a:off x="548640" y="4023360"/>
+            <a:ext cx="2635758" cy="731520"/>
+          </a:xfrm>
+          <a:prstGeom prst="roundRect">
+            <a:avLst>
+              <a:gd name="adj" fmla="val 8000"/>
+            </a:avLst>
+          </a:prstGeom>
+          <a:solidFill>
+            <a:srgbClr val="1A2040"/>
           </a:solidFill>
           <a:ln w="12700">
             <a:solidFill>
@@ -14081,14 +15473,14 @@
               </a:lnSpc>
             </a:pPr>
             <a:r>
-              <a:rPr sz="1300" b="0" i="0">
-                <a:solidFill>
-                  <a:srgbClr val="E8EAF6"/>
-                </a:solidFill>
-                <a:latin typeface="Microsoft YaHei"/>
-                <a:ea typeface="Microsoft YaHei"/>
-              </a:rPr>
-              <a:t>真实运行演示（app/）</a:t>
+              <a:rPr sz="1150" b="0" i="0">
+                <a:solidFill>
+                  <a:srgbClr val="E8EAF6"/>
+                </a:solidFill>
+                <a:latin typeface="Microsoft YaHei"/>
+                <a:ea typeface="Microsoft YaHei"/>
+              </a:rPr>
+              <a:t>AI 眼镜</a:t>
             </a:r>
           </a:p>
           <a:p>
@@ -14098,143 +15490,37 @@
               </a:lnSpc>
             </a:pPr>
             <a:r>
-              <a:rPr sz="1300" b="0" i="0">
-                <a:solidFill>
-                  <a:srgbClr val="E8EAF6"/>
-                </a:solidFill>
-                <a:latin typeface="Microsoft YaHei"/>
-                <a:ea typeface="Microsoft YaHei"/>
-              </a:rPr>
-              <a:t/>
-            </a:r>
-          </a:p>
-          <a:p>
-            <a:pPr algn="ctr">
-              <a:lnSpc>
-                <a:spcPct val="110000"/>
-              </a:lnSpc>
-            </a:pPr>
-            <a:r>
-              <a:rPr sz="1300" b="0" i="0">
-                <a:solidFill>
-                  <a:srgbClr val="E8EAF6"/>
-                </a:solidFill>
-                <a:latin typeface="Microsoft YaHei"/>
-                <a:ea typeface="Microsoft YaHei"/>
-              </a:rPr>
-              <a:t>① 摄像头/照片 → 视觉识别</a:t>
-            </a:r>
-          </a:p>
-          <a:p>
-            <a:pPr algn="ctr">
-              <a:lnSpc>
-                <a:spcPct val="110000"/>
-              </a:lnSpc>
-            </a:pPr>
-            <a:r>
-              <a:rPr sz="1300" b="0" i="0">
-                <a:solidFill>
-                  <a:srgbClr val="E8EAF6"/>
-                </a:solidFill>
-                <a:latin typeface="Microsoft YaHei"/>
-                <a:ea typeface="Microsoft YaHei"/>
-              </a:rPr>
-              <a:t>② 三个闭环逐步运行</a:t>
-            </a:r>
-          </a:p>
-          <a:p>
-            <a:pPr algn="ctr">
-              <a:lnSpc>
-                <a:spcPct val="110000"/>
-              </a:lnSpc>
-            </a:pPr>
-            <a:r>
-              <a:rPr sz="1300" b="0" i="0">
-                <a:solidFill>
-                  <a:srgbClr val="E8EAF6"/>
-                </a:solidFill>
-                <a:latin typeface="Microsoft YaHei"/>
-                <a:ea typeface="Microsoft YaHei"/>
-              </a:rPr>
-              <a:t>③ 决策轨迹实时展示</a:t>
-            </a:r>
-          </a:p>
-          <a:p>
-            <a:pPr algn="ctr">
-              <a:lnSpc>
-                <a:spcPct val="110000"/>
-              </a:lnSpc>
-            </a:pPr>
-            <a:r>
-              <a:rPr sz="1300" b="0" i="0">
-                <a:solidFill>
-                  <a:srgbClr val="E8EAF6"/>
-                </a:solidFill>
-                <a:latin typeface="Microsoft YaHei"/>
-                <a:ea typeface="Microsoft YaHei"/>
-              </a:rPr>
-              <a:t>④ 记忆面板实时变化</a:t>
-            </a:r>
-          </a:p>
-          <a:p>
-            <a:pPr algn="ctr">
-              <a:lnSpc>
-                <a:spcPct val="110000"/>
-              </a:lnSpc>
-            </a:pPr>
-            <a:r>
-              <a:rPr sz="1300" b="0" i="0">
-                <a:solidFill>
-                  <a:srgbClr val="E8EAF6"/>
-                </a:solidFill>
-                <a:latin typeface="Microsoft YaHei"/>
-                <a:ea typeface="Microsoft YaHei"/>
-              </a:rPr>
-              <a:t/>
-            </a:r>
-          </a:p>
-          <a:p>
-            <a:pPr algn="ctr">
-              <a:lnSpc>
-                <a:spcPct val="110000"/>
-              </a:lnSpc>
-            </a:pPr>
-            <a:r>
-              <a:rPr sz="1300" b="0" i="0">
-                <a:solidFill>
-                  <a:srgbClr val="E8EAF6"/>
-                </a:solidFill>
-                <a:latin typeface="Microsoft YaHei"/>
-                <a:ea typeface="Microsoft YaHei"/>
-              </a:rPr>
-              <a:t>浏览器即可复现</a:t>
-            </a:r>
-          </a:p>
-        </p:txBody>
-      </p:sp>
-      <p:sp>
-        <p:nvSpPr>
-          <p:cNvPr id="8" name="Rounded Rectangle 7"/>
+              <a:rPr sz="1150" b="0" i="0">
+                <a:solidFill>
+                  <a:srgbClr val="E8EAF6"/>
+                </a:solidFill>
+                <a:latin typeface="Microsoft YaHei"/>
+                <a:ea typeface="Microsoft YaHei"/>
+              </a:rPr>
+              <a:t>感知 / 语音 / 反馈</a:t>
+            </a:r>
+          </a:p>
+        </p:txBody>
+      </p:sp>
+      <p:sp>
+        <p:nvSpPr>
+          <p:cNvPr id="15" name="Right Arrow 14"/>
           <p:cNvSpPr/>
           <p:nvPr/>
         </p:nvSpPr>
         <p:spPr>
           <a:xfrm>
-            <a:off x="6172200" y="1463040"/>
-            <a:ext cx="5468112" cy="3108960"/>
-          </a:xfrm>
-          <a:prstGeom prst="roundRect">
-            <a:avLst>
-              <a:gd name="adj" fmla="val 6000"/>
-            </a:avLst>
+            <a:off x="3184398" y="4261104"/>
+            <a:ext cx="182880" cy="237744"/>
+          </a:xfrm>
+          <a:prstGeom prst="rightArrow">
+            <a:avLst/>
           </a:prstGeom>
           <a:solidFill>
-            <a:srgbClr val="0B0E1C"/>
+            <a:srgbClr val="8B93B8"/>
           </a:solidFill>
-          <a:ln w="12700">
-            <a:solidFill>
-              <a:srgbClr val="2A3157"/>
-            </a:solidFill>
+          <a:ln>
+            <a:noFill/>
           </a:ln>
           <a:effectLst/>
         </p:spPr>
@@ -14253,143 +15539,27 @@
           </a:fontRef>
         </p:style>
         <p:txBody>
-          <a:bodyPr rtlCol="0" anchor="ctr" wrap="square" lIns="73152" rIns="73152" tIns="27432" bIns="27432"/>
-          <a:lstStyle/>
-          <a:p>
-            <a:pPr algn="l">
-              <a:lnSpc>
-                <a:spcPct val="110000"/>
-              </a:lnSpc>
-            </a:pPr>
-            <a:r>
-              <a:rPr sz="1200" b="0" i="0">
-                <a:solidFill>
-                  <a:srgbClr val="E8EAF6"/>
-                </a:solidFill>
-                <a:latin typeface="Microsoft YaHei"/>
-                <a:ea typeface="Microsoft YaHei"/>
-              </a:rPr>
-              <a:t>[感知] 08:00 场景=卧室 · 语音=无</a:t>
-            </a:r>
-          </a:p>
-          <a:p>
-            <a:pPr algn="l">
-              <a:lnSpc>
-                <a:spcPct val="110000"/>
-              </a:lnSpc>
-            </a:pPr>
-            <a:r>
-              <a:rPr sz="1200" b="0" i="0">
-                <a:solidFill>
-                  <a:srgbClr val="E8EAF6"/>
-                </a:solidFill>
-                <a:latin typeface="Microsoft YaHei"/>
-                <a:ea typeface="Microsoft YaHei"/>
-              </a:rPr>
-              <a:t>[触发] ⏰ 时间触发 · 用药计划（HIGH）</a:t>
-            </a:r>
-          </a:p>
-          <a:p>
-            <a:pPr algn="l">
-              <a:lnSpc>
-                <a:spcPct val="110000"/>
-              </a:lnSpc>
-            </a:pPr>
-            <a:r>
-              <a:rPr sz="1200" b="0" i="0">
-                <a:solidFill>
-                  <a:srgbClr val="E8EAF6"/>
-                </a:solidFill>
-                <a:latin typeface="Microsoft YaHei"/>
-                <a:ea typeface="Microsoft YaHei"/>
-              </a:rPr>
-              <a:t>[决策] 动作=remind_medication</a:t>
-            </a:r>
-          </a:p>
-          <a:p>
-            <a:pPr algn="l">
-              <a:lnSpc>
-                <a:spcPct val="110000"/>
-              </a:lnSpc>
-            </a:pPr>
-            <a:r>
-              <a:rPr sz="1200" b="0" i="0">
-                <a:solidFill>
-                  <a:srgbClr val="E8EAF6"/>
-                </a:solidFill>
-                <a:latin typeface="Microsoft YaHei"/>
-                <a:ea typeface="Microsoft YaHei"/>
-              </a:rPr>
-              <a:t>[工具] 用药计划 → 降压药（1粒/日）</a:t>
-            </a:r>
-          </a:p>
-          <a:p>
-            <a:pPr algn="l">
-              <a:lnSpc>
-                <a:spcPct val="110000"/>
-              </a:lnSpc>
-            </a:pPr>
-            <a:r>
-              <a:rPr sz="1200" b="0" i="0">
-                <a:solidFill>
-                  <a:srgbClr val="E8EAF6"/>
-                </a:solidFill>
-                <a:latin typeface="Microsoft YaHei"/>
-                <a:ea typeface="Microsoft YaHei"/>
-              </a:rPr>
-              <a:t>[反馈] 🔊 王奶奶，该吃降压药了。</a:t>
-            </a:r>
-          </a:p>
-          <a:p>
-            <a:pPr algn="l">
-              <a:lnSpc>
-                <a:spcPct val="110000"/>
-              </a:lnSpc>
-            </a:pPr>
-            <a:r>
-              <a:rPr sz="1200" b="0" i="0">
-                <a:solidFill>
-                  <a:srgbClr val="E8EAF6"/>
-                </a:solidFill>
-                <a:latin typeface="Microsoft YaHei"/>
-                <a:ea typeface="Microsoft YaHei"/>
-              </a:rPr>
-              <a:t/>
-            </a:r>
-          </a:p>
-          <a:p>
-            <a:pPr algn="l">
-              <a:lnSpc>
-                <a:spcPct val="110000"/>
-              </a:lnSpc>
-            </a:pPr>
-            <a:r>
-              <a:rPr sz="1200" b="0" i="0">
-                <a:solidFill>
-                  <a:srgbClr val="E8EAF6"/>
-                </a:solidFill>
-                <a:latin typeface="Microsoft YaHei"/>
-                <a:ea typeface="Microsoft YaHei"/>
-              </a:rPr>
-              <a:t>= Agent 决策轨迹（真实执行）</a:t>
-            </a:r>
-          </a:p>
-        </p:txBody>
-      </p:sp>
-      <p:sp>
-        <p:nvSpPr>
-          <p:cNvPr id="9" name="Rounded Rectangle 8"/>
+          <a:bodyPr rtlCol="0" anchor="ctr"/>
+          <a:lstStyle/>
+          <a:p>
+            <a:pPr algn="ctr"/>
+          </a:p>
+        </p:txBody>
+      </p:sp>
+      <p:sp>
+        <p:nvSpPr>
+          <p:cNvPr id="16" name="Rounded Rectangle 15"/>
           <p:cNvSpPr/>
           <p:nvPr/>
         </p:nvSpPr>
         <p:spPr>
           <a:xfrm>
-            <a:off x="548640" y="4846320"/>
-            <a:ext cx="5449824" cy="548640"/>
+            <a:off x="3367278" y="4023360"/>
+            <a:ext cx="2635758" cy="731520"/>
           </a:xfrm>
           <a:prstGeom prst="roundRect">
             <a:avLst>
-              <a:gd name="adj" fmla="val 10000"/>
+              <a:gd name="adj" fmla="val 8000"/>
             </a:avLst>
           </a:prstGeom>
           <a:solidFill>
@@ -14397,7 +15567,7 @@
           </a:solidFill>
           <a:ln w="12700">
             <a:solidFill>
-              <a:srgbClr val="2A3157"/>
+              <a:srgbClr val="5AB0FF"/>
             </a:solidFill>
           </a:ln>
           <a:effectLst/>
@@ -14417,6 +15587,81 @@
           </a:fontRef>
         </p:style>
         <p:txBody>
+          <a:bodyPr rtlCol="0" anchor="ctr" wrap="square" lIns="73152" rIns="73152" tIns="27432" bIns="27432"/>
+          <a:lstStyle/>
+          <a:p>
+            <a:pPr algn="ctr">
+              <a:lnSpc>
+                <a:spcPct val="110000"/>
+              </a:lnSpc>
+            </a:pPr>
+            <a:r>
+              <a:rPr sz="1150" b="0" i="0">
+                <a:solidFill>
+                  <a:srgbClr val="E8EAF6"/>
+                </a:solidFill>
+                <a:latin typeface="Microsoft YaHei"/>
+                <a:ea typeface="Microsoft YaHei"/>
+              </a:rPr>
+              <a:t>老人端 App</a:t>
+            </a:r>
+          </a:p>
+          <a:p>
+            <a:pPr algn="ctr">
+              <a:lnSpc>
+                <a:spcPct val="110000"/>
+              </a:lnSpc>
+            </a:pPr>
+            <a:r>
+              <a:rPr sz="1150" b="0" i="0">
+                <a:solidFill>
+                  <a:srgbClr val="E8EAF6"/>
+                </a:solidFill>
+                <a:latin typeface="Microsoft YaHei"/>
+                <a:ea typeface="Microsoft YaHei"/>
+              </a:rPr>
+              <a:t>大字显示 / SOS / 设置</a:t>
+            </a:r>
+          </a:p>
+        </p:txBody>
+      </p:sp>
+      <p:sp>
+        <p:nvSpPr>
+          <p:cNvPr id="17" name="Right Arrow 16"/>
+          <p:cNvSpPr/>
+          <p:nvPr/>
+        </p:nvSpPr>
+        <p:spPr>
+          <a:xfrm>
+            <a:off x="6003036" y="4261104"/>
+            <a:ext cx="182880" cy="237744"/>
+          </a:xfrm>
+          <a:prstGeom prst="rightArrow">
+            <a:avLst/>
+          </a:prstGeom>
+          <a:solidFill>
+            <a:srgbClr val="8B93B8"/>
+          </a:solidFill>
+          <a:ln>
+            <a:noFill/>
+          </a:ln>
+          <a:effectLst/>
+        </p:spPr>
+        <p:style>
+          <a:lnRef idx="1">
+            <a:schemeClr val="accent1"/>
+          </a:lnRef>
+          <a:fillRef idx="3">
+            <a:schemeClr val="accent1"/>
+          </a:fillRef>
+          <a:effectRef idx="2">
+            <a:schemeClr val="accent1"/>
+          </a:effectRef>
+          <a:fontRef idx="minor">
+            <a:schemeClr val="lt1"/>
+          </a:fontRef>
+        </p:style>
+        <p:txBody>
           <a:bodyPr rtlCol="0" anchor="ctr"/>
           <a:lstStyle/>
           <a:p>
@@ -14426,58 +15671,18 @@
       </p:sp>
       <p:sp>
         <p:nvSpPr>
-          <p:cNvPr id="10" name="TextBox 9"/>
-          <p:cNvSpPr txBox="1"/>
-          <p:nvPr/>
-        </p:nvSpPr>
-        <p:spPr>
-          <a:xfrm>
-            <a:off x="777240" y="4956048"/>
-            <a:ext cx="5029200" cy="411480"/>
-          </a:xfrm>
-          <a:prstGeom prst="rect">
-            <a:avLst/>
-          </a:prstGeom>
-          <a:noFill/>
-        </p:spPr>
-        <p:txBody>
-          <a:bodyPr wrap="square" anchor="t" lIns="0" rIns="0" tIns="0" bIns="0">
-            <a:spAutoFit/>
-          </a:bodyPr>
-          <a:lstStyle/>
-          <a:p>
-            <a:pPr algn="l">
-              <a:lnSpc>
-                <a:spcPct val="112000"/>
-              </a:lnSpc>
-            </a:pPr>
-            <a:r>
-              <a:rPr sz="1150" b="0" i="0">
-                <a:solidFill>
-                  <a:srgbClr val="E8EAF6"/>
-                </a:solidFill>
-                <a:latin typeface="Microsoft YaHei"/>
-                <a:ea typeface="Microsoft YaHei"/>
-              </a:rPr>
-              <a:t>端到端测试：Mock LLM 模拟服务商：12 项断言全部通过（视觉→决策→工具→记忆）</a:t>
-            </a:r>
-          </a:p>
-        </p:txBody>
-      </p:sp>
-      <p:sp>
-        <p:nvSpPr>
-          <p:cNvPr id="11" name="Rounded Rectangle 10"/>
+          <p:cNvPr id="18" name="Rounded Rectangle 17"/>
           <p:cNvSpPr/>
           <p:nvPr/>
         </p:nvSpPr>
         <p:spPr>
           <a:xfrm>
-            <a:off x="6181344" y="4846320"/>
-            <a:ext cx="5449824" cy="548640"/>
+            <a:off x="6185916" y="4023360"/>
+            <a:ext cx="2635758" cy="731520"/>
           </a:xfrm>
           <a:prstGeom prst="roundRect">
             <a:avLst>
-              <a:gd name="adj" fmla="val 10000"/>
+              <a:gd name="adj" fmla="val 8000"/>
             </a:avLst>
           </a:prstGeom>
           <a:solidFill>
@@ -14485,7 +15690,7 @@
           </a:solidFill>
           <a:ln w="12700">
             <a:solidFill>
-              <a:srgbClr val="2A3157"/>
+              <a:srgbClr val="8B93B8"/>
             </a:solidFill>
           </a:ln>
           <a:effectLst/>
@@ -14505,6 +15710,81 @@
           </a:fontRef>
         </p:style>
         <p:txBody>
+          <a:bodyPr rtlCol="0" anchor="ctr" wrap="square" lIns="73152" rIns="73152" tIns="27432" bIns="27432"/>
+          <a:lstStyle/>
+          <a:p>
+            <a:pPr algn="ctr">
+              <a:lnSpc>
+                <a:spcPct val="110000"/>
+              </a:lnSpc>
+            </a:pPr>
+            <a:r>
+              <a:rPr sz="1150" b="0" i="0">
+                <a:solidFill>
+                  <a:srgbClr val="E8EAF6"/>
+                </a:solidFill>
+                <a:latin typeface="Microsoft YaHei"/>
+                <a:ea typeface="Microsoft YaHei"/>
+              </a:rPr>
+              <a:t>云端</a:t>
+            </a:r>
+          </a:p>
+          <a:p>
+            <a:pPr algn="ctr">
+              <a:lnSpc>
+                <a:spcPct val="110000"/>
+              </a:lnSpc>
+            </a:pPr>
+            <a:r>
+              <a:rPr sz="1150" b="0" i="0">
+                <a:solidFill>
+                  <a:srgbClr val="E8EAF6"/>
+                </a:solidFill>
+                <a:latin typeface="Microsoft YaHei"/>
+                <a:ea typeface="Microsoft YaHei"/>
+              </a:rPr>
+              <a:t>记忆 + 健康日志摘要</a:t>
+            </a:r>
+          </a:p>
+        </p:txBody>
+      </p:sp>
+      <p:sp>
+        <p:nvSpPr>
+          <p:cNvPr id="19" name="Right Arrow 18"/>
+          <p:cNvSpPr/>
+          <p:nvPr/>
+        </p:nvSpPr>
+        <p:spPr>
+          <a:xfrm>
+            <a:off x="8821674" y="4261104"/>
+            <a:ext cx="182880" cy="237744"/>
+          </a:xfrm>
+          <a:prstGeom prst="rightArrow">
+            <a:avLst/>
+          </a:prstGeom>
+          <a:solidFill>
+            <a:srgbClr val="8B93B8"/>
+          </a:solidFill>
+          <a:ln>
+            <a:noFill/>
+          </a:ln>
+          <a:effectLst/>
+        </p:spPr>
+        <p:style>
+          <a:lnRef idx="1">
+            <a:schemeClr val="accent1"/>
+          </a:lnRef>
+          <a:fillRef idx="3">
+            <a:schemeClr val="accent1"/>
+          </a:fillRef>
+          <a:effectRef idx="2">
+            <a:schemeClr val="accent1"/>
+          </a:effectRef>
+          <a:fontRef idx="minor">
+            <a:schemeClr val="lt1"/>
+          </a:fontRef>
+        </p:style>
+        <p:txBody>
           <a:bodyPr rtlCol="0" anchor="ctr"/>
           <a:lstStyle/>
           <a:p>
@@ -14514,58 +15794,18 @@
       </p:sp>
       <p:sp>
         <p:nvSpPr>
-          <p:cNvPr id="12" name="TextBox 11"/>
-          <p:cNvSpPr txBox="1"/>
-          <p:nvPr/>
-        </p:nvSpPr>
-        <p:spPr>
-          <a:xfrm>
-            <a:off x="6409944" y="4956048"/>
-            <a:ext cx="5029200" cy="411480"/>
-          </a:xfrm>
-          <a:prstGeom prst="rect">
-            <a:avLst/>
-          </a:prstGeom>
-          <a:noFill/>
-        </p:spPr>
-        <p:txBody>
-          <a:bodyPr wrap="square" anchor="t" lIns="0" rIns="0" tIns="0" bIns="0">
-            <a:spAutoFit/>
-          </a:bodyPr>
-          <a:lstStyle/>
-          <a:p>
-            <a:pPr algn="l">
-              <a:lnSpc>
-                <a:spcPct val="112000"/>
-              </a:lnSpc>
-            </a:pPr>
-            <a:r>
-              <a:rPr sz="1150" b="0" i="0">
-                <a:solidFill>
-                  <a:srgbClr val="E8EAF6"/>
-                </a:solidFill>
-                <a:latin typeface="Microsoft YaHei"/>
-                <a:ea typeface="Microsoft YaHei"/>
-              </a:rPr>
-              <a:t>HTTP 冒烟测试：前端页面、JS 类型、健康检查、无 Key 兜底提示均正常</a:t>
-            </a:r>
-          </a:p>
-        </p:txBody>
-      </p:sp>
-      <p:sp>
-        <p:nvSpPr>
-          <p:cNvPr id="13" name="Rounded Rectangle 12"/>
+          <p:cNvPr id="20" name="Rounded Rectangle 19"/>
           <p:cNvSpPr/>
           <p:nvPr/>
         </p:nvSpPr>
         <p:spPr>
           <a:xfrm>
-            <a:off x="548640" y="5504688"/>
-            <a:ext cx="5449824" cy="548640"/>
+            <a:off x="9004554" y="4023360"/>
+            <a:ext cx="2635758" cy="731520"/>
           </a:xfrm>
           <a:prstGeom prst="roundRect">
             <a:avLst>
-              <a:gd name="adj" fmla="val 10000"/>
+              <a:gd name="adj" fmla="val 8000"/>
             </a:avLst>
           </a:prstGeom>
           <a:solidFill>
@@ -14573,7 +15813,7 @@
           </a:solidFill>
           <a:ln w="12700">
             <a:solidFill>
-              <a:srgbClr val="2A3157"/>
+              <a:srgbClr val="FFB454"/>
             </a:solidFill>
           </a:ln>
           <a:effectLst/>
@@ -14593,23 +15833,54 @@
           </a:fontRef>
         </p:style>
         <p:txBody>
-          <a:bodyPr rtlCol="0" anchor="ctr"/>
-          <a:lstStyle/>
-          <a:p>
-            <a:pPr algn="ctr"/>
-          </a:p>
-        </p:txBody>
-      </p:sp>
-      <p:sp>
-        <p:nvSpPr>
-          <p:cNvPr id="14" name="TextBox 13"/>
+          <a:bodyPr rtlCol="0" anchor="ctr" wrap="square" lIns="73152" rIns="73152" tIns="27432" bIns="27432"/>
+          <a:lstStyle/>
+          <a:p>
+            <a:pPr algn="ctr">
+              <a:lnSpc>
+                <a:spcPct val="110000"/>
+              </a:lnSpc>
+            </a:pPr>
+            <a:r>
+              <a:rPr sz="1150" b="0" i="0">
+                <a:solidFill>
+                  <a:srgbClr val="E8EAF6"/>
+                </a:solidFill>
+                <a:latin typeface="Microsoft YaHei"/>
+                <a:ea typeface="Microsoft YaHei"/>
+              </a:rPr>
+              <a:t>子女端 App</a:t>
+            </a:r>
+          </a:p>
+          <a:p>
+            <a:pPr algn="ctr">
+              <a:lnSpc>
+                <a:spcPct val="110000"/>
+              </a:lnSpc>
+            </a:pPr>
+            <a:r>
+              <a:rPr sz="1150" b="0" i="0">
+                <a:solidFill>
+                  <a:srgbClr val="E8EAF6"/>
+                </a:solidFill>
+                <a:latin typeface="Microsoft YaHei"/>
+                <a:ea typeface="Microsoft YaHei"/>
+              </a:rPr>
+              <a:t>日报 / 通知 / 留言</a:t>
+            </a:r>
+          </a:p>
+        </p:txBody>
+      </p:sp>
+      <p:sp>
+        <p:nvSpPr>
+          <p:cNvPr id="21" name="TextBox 20"/>
           <p:cNvSpPr txBox="1"/>
           <p:nvPr/>
         </p:nvSpPr>
         <p:spPr>
           <a:xfrm>
-            <a:off x="777240" y="5614416"/>
-            <a:ext cx="5029200" cy="411480"/>
+            <a:off x="548640" y="5029200"/>
+            <a:ext cx="5852160" cy="548640"/>
           </a:xfrm>
           <a:prstGeom prst="rect">
             <a:avLst/>
@@ -14628,76 +15899,45 @@
               </a:lnSpc>
             </a:pPr>
             <a:r>
-              <a:rPr sz="1150" b="0" i="0">
-                <a:solidFill>
-                  <a:srgbClr val="E8EAF6"/>
-                </a:solidFill>
-                <a:latin typeface="Microsoft YaHei"/>
-                <a:ea typeface="Microsoft YaHei"/>
-              </a:rPr>
-              <a:t>无 Key 兜底：未配置 Key 时给出明确引导，不崩溃</a:t>
-            </a:r>
-          </a:p>
-        </p:txBody>
-      </p:sp>
-      <p:sp>
-        <p:nvSpPr>
-          <p:cNvPr id="15" name="Rounded Rectangle 14"/>
-          <p:cNvSpPr/>
-          <p:nvPr/>
-        </p:nvSpPr>
-        <p:spPr>
-          <a:xfrm>
-            <a:off x="6181344" y="5504688"/>
-            <a:ext cx="5449824" cy="548640"/>
-          </a:xfrm>
-          <a:prstGeom prst="roundRect">
-            <a:avLst>
-              <a:gd name="adj" fmla="val 10000"/>
-            </a:avLst>
-          </a:prstGeom>
-          <a:solidFill>
-            <a:srgbClr val="1A2040"/>
-          </a:solidFill>
-          <a:ln w="12700">
-            <a:solidFill>
-              <a:srgbClr val="2A3157"/>
-            </a:solidFill>
-          </a:ln>
-          <a:effectLst/>
-        </p:spPr>
-        <p:style>
-          <a:lnRef idx="1">
-            <a:schemeClr val="accent1"/>
-          </a:lnRef>
-          <a:fillRef idx="3">
-            <a:schemeClr val="accent1"/>
-          </a:fillRef>
-          <a:effectRef idx="2">
-            <a:schemeClr val="accent1"/>
-          </a:effectRef>
-          <a:fontRef idx="minor">
-            <a:schemeClr val="lt1"/>
-          </a:fontRef>
-        </p:style>
-        <p:txBody>
-          <a:bodyPr rtlCol="0" anchor="ctr"/>
-          <a:lstStyle/>
-          <a:p>
-            <a:pPr algn="ctr"/>
-          </a:p>
-        </p:txBody>
-      </p:sp>
-      <p:sp>
-        <p:nvSpPr>
-          <p:cNvPr id="16" name="TextBox 15"/>
+              <a:rPr sz="1250" b="0" i="0">
+                <a:solidFill>
+                  <a:srgbClr val="E8EAF6"/>
+                </a:solidFill>
+                <a:latin typeface="Microsoft YaHei"/>
+                <a:ea typeface="Microsoft YaHei"/>
+              </a:rPr>
+              <a:t>首页界面构想：老人状态卡（头像 + 今日摘要）</a:t>
+            </a:r>
+          </a:p>
+          <a:p>
+            <a:pPr algn="l">
+              <a:lnSpc>
+                <a:spcPct val="112000"/>
+              </a:lnSpc>
+            </a:pPr>
+            <a:r>
+              <a:rPr sz="1250" b="0" i="0">
+                <a:solidFill>
+                  <a:srgbClr val="E8EAF6"/>
+                </a:solidFill>
+                <a:latin typeface="Microsoft YaHei"/>
+                <a:ea typeface="Microsoft YaHei"/>
+              </a:rPr>
+              <a:t>底部 Tab：首页 / 用药 / 安全 / 我的</a:t>
+            </a:r>
+          </a:p>
+        </p:txBody>
+      </p:sp>
+      <p:sp>
+        <p:nvSpPr>
+          <p:cNvPr id="22" name="TextBox 21"/>
           <p:cNvSpPr txBox="1"/>
           <p:nvPr/>
         </p:nvSpPr>
         <p:spPr>
           <a:xfrm>
-            <a:off x="6409944" y="5614416"/>
-            <a:ext cx="5029200" cy="411480"/>
+            <a:off x="6492240" y="5029200"/>
+            <a:ext cx="5212080" cy="548640"/>
           </a:xfrm>
           <a:prstGeom prst="rect">
             <a:avLst/>
@@ -14716,21 +15956,78 @@
               </a:lnSpc>
             </a:pPr>
             <a:r>
-              <a:rPr sz="1150" b="0" i="0">
-                <a:solidFill>
-                  <a:srgbClr val="E8EAF6"/>
-                </a:solidFill>
-                <a:latin typeface="Microsoft YaHei"/>
-                <a:ea typeface="Microsoft YaHei"/>
-              </a:rPr>
-              <a:t>概念演示版：web/（浏览器版）与 demo/（Python 版）无需 Key，可作视频兜底材料</a:t>
-            </a:r>
-          </a:p>
-        </p:txBody>
-      </p:sp>
-      <p:sp>
-        <p:nvSpPr>
-          <p:cNvPr id="17" name="TextBox 16"/>
+              <a:rPr sz="1250" b="0" i="0">
+                <a:solidFill>
+                  <a:srgbClr val="E8EAF6"/>
+                </a:solidFill>
+                <a:latin typeface="Microsoft YaHei"/>
+                <a:ea typeface="Microsoft YaHei"/>
+              </a:rPr>
+              <a:t>通知分级：正常一句“今天都挺好”</a:t>
+            </a:r>
+          </a:p>
+          <a:p>
+            <a:pPr algn="l">
+              <a:lnSpc>
+                <a:spcPct val="112000"/>
+              </a:lnSpc>
+            </a:pPr>
+            <a:r>
+              <a:rPr sz="1250" b="0" i="0">
+                <a:solidFill>
+                  <a:srgbClr val="E8EAF6"/>
+                </a:solidFill>
+                <a:latin typeface="Microsoft YaHei"/>
+                <a:ea typeface="Microsoft YaHei"/>
+              </a:rPr>
+              <a:t>提醒（漏服 / 久未活动）· 紧急（跌倒红色）</a:t>
+            </a:r>
+          </a:p>
+        </p:txBody>
+      </p:sp>
+      <p:sp>
+        <p:nvSpPr>
+          <p:cNvPr id="23" name="TextBox 22"/>
+          <p:cNvSpPr txBox="1"/>
+          <p:nvPr/>
+        </p:nvSpPr>
+        <p:spPr>
+          <a:xfrm>
+            <a:off x="548640" y="5852160"/>
+            <a:ext cx="11091672" cy="365760"/>
+          </a:xfrm>
+          <a:prstGeom prst="rect">
+            <a:avLst/>
+          </a:prstGeom>
+          <a:noFill/>
+        </p:spPr>
+        <p:txBody>
+          <a:bodyPr wrap="square" anchor="t" lIns="0" rIns="0" tIns="0" bIns="0">
+            <a:spAutoFit/>
+          </a:bodyPr>
+          <a:lstStyle/>
+          <a:p>
+            <a:pPr algn="l">
+              <a:lnSpc>
+                <a:spcPct val="112000"/>
+              </a:lnSpc>
+            </a:pPr>
+            <a:r>
+              <a:rPr sz="1250" b="0" i="0">
+                <a:solidFill>
+                  <a:srgbClr val="8B93B8"/>
+                </a:solidFill>
+                <a:latin typeface="Microsoft YaHei"/>
+                <a:ea typeface="Microsoft YaHei"/>
+              </a:rPr>
+              <a:t>隐私边界：子女仅可见授权摘要（服药 / 出门 / 异常）；完整记忆留在本机，可删除</a:t>
+            </a:r>
+          </a:p>
+        </p:txBody>
+      </p:sp>
+      <p:sp>
+        <p:nvSpPr>
+          <p:cNvPr id="24" name="TextBox 23"/>
           <p:cNvSpPr txBox="1"/>
           <p:nvPr/>
         </p:nvSpPr>
@@ -14869,7 +16166,7 @@
                 <a:latin typeface="Microsoft YaHei"/>
                 <a:ea typeface="Microsoft YaHei"/>
               </a:rPr>
-              <a:t>10 迭代计划</a:t>
+              <a:t>8 数据来源与合规边界</a:t>
             </a:r>
           </a:p>
         </p:txBody>
@@ -14909,7 +16206,7 @@
                 <a:latin typeface="Microsoft YaHei"/>
                 <a:ea typeface="Microsoft YaHei"/>
               </a:rPr>
-              <a:t>从初赛可运行版本到长期陪伴生态</a:t>
+              <a:t>数据授权 · 隐私保护 · 风险提示 · 行业边界</a:t>
             </a:r>
           </a:p>
         </p:txBody>
@@ -15007,7 +16304,7 @@
         <p:spPr>
           <a:xfrm>
             <a:off x="548640" y="1554480"/>
-            <a:ext cx="2567178" cy="2468880"/>
+            <a:ext cx="2704338" cy="3108960"/>
           </a:xfrm>
           <a:prstGeom prst="roundRect">
             <a:avLst>
@@ -15015,11 +16312,11 @@
             </a:avLst>
           </a:prstGeom>
           <a:solidFill>
-            <a:srgbClr val="1A2040"/>
+            <a:srgbClr val="151A30"/>
           </a:solidFill>
           <a:ln w="12700">
             <a:solidFill>
-              <a:srgbClr val="6D8DFF"/>
+              <a:srgbClr val="5AB0FF"/>
             </a:solidFill>
           </a:ln>
           <a:effectLst/>
@@ -15048,14 +16345,14 @@
               </a:lnSpc>
             </a:pPr>
             <a:r>
-              <a:rPr sz="1350" b="0" i="0">
-                <a:solidFill>
-                  <a:srgbClr val="E8EAF6"/>
-                </a:solidFill>
-                <a:latin typeface="Microsoft YaHei"/>
-                <a:ea typeface="Microsoft YaHei"/>
-              </a:rPr>
-              <a:t>V1 · 初赛交付</a:t>
+              <a:rPr sz="1250" b="0" i="0">
+                <a:solidFill>
+                  <a:srgbClr val="E8EAF6"/>
+                </a:solidFill>
+                <a:latin typeface="Microsoft YaHei"/>
+                <a:ea typeface="Microsoft YaHei"/>
+              </a:rPr>
+              <a:t>数据来源</a:t>
             </a:r>
           </a:p>
           <a:p>
@@ -15065,7 +16362,7 @@
               </a:lnSpc>
             </a:pPr>
             <a:r>
-              <a:rPr sz="1350" b="0" i="0">
+              <a:rPr sz="1250" b="0" i="0">
                 <a:solidFill>
                   <a:srgbClr val="E8EAF6"/>
                 </a:solidFill>
@@ -15082,14 +16379,14 @@
               </a:lnSpc>
             </a:pPr>
             <a:r>
-              <a:rPr sz="1350" b="0" i="0">
-                <a:solidFill>
-                  <a:srgbClr val="E8EAF6"/>
-                </a:solidFill>
-                <a:latin typeface="Microsoft YaHei"/>
-                <a:ea typeface="Microsoft YaHei"/>
-              </a:rPr>
-              <a:t>真实 Agent 版（app/）</a:t>
+              <a:rPr sz="1250" b="0" i="0">
+                <a:solidFill>
+                  <a:srgbClr val="E8EAF6"/>
+                </a:solidFill>
+                <a:latin typeface="Microsoft YaHei"/>
+                <a:ea typeface="Microsoft YaHei"/>
+              </a:rPr>
+              <a:t>用户与家属授权采集</a:t>
             </a:r>
           </a:p>
           <a:p>
@@ -15099,14 +16396,14 @@
               </a:lnSpc>
             </a:pPr>
             <a:r>
-              <a:rPr sz="1350" b="0" i="0">
-                <a:solidFill>
-                  <a:srgbClr val="E8EAF6"/>
-                </a:solidFill>
-                <a:latin typeface="Microsoft YaHei"/>
-                <a:ea typeface="Microsoft YaHei"/>
-              </a:rPr>
-              <a:t>找物/用药/出门三闭环</a:t>
+              <a:rPr sz="1250" b="0" i="0">
+                <a:solidFill>
+                  <a:srgbClr val="E8EAF6"/>
+                </a:solidFill>
+                <a:latin typeface="Microsoft YaHei"/>
+                <a:ea typeface="Microsoft YaHei"/>
+              </a:rPr>
+              <a:t>开源/自采模拟数据</a:t>
             </a:r>
           </a:p>
           <a:p>
@@ -15116,72 +16413,28 @@
               </a:lnSpc>
             </a:pPr>
             <a:r>
-              <a:rPr sz="1350" b="0" i="0">
-                <a:solidFill>
-                  <a:srgbClr val="E8EAF6"/>
-                </a:solidFill>
-                <a:latin typeface="Microsoft YaHei"/>
-                <a:ea typeface="Microsoft YaHei"/>
-              </a:rPr>
-              <a:t>Web 概念演示 + 材料</a:t>
-            </a:r>
-          </a:p>
-        </p:txBody>
-      </p:sp>
-      <p:sp>
-        <p:nvSpPr>
-          <p:cNvPr id="8" name="Right Arrow 7"/>
+              <a:rPr sz="1250" b="0" i="0">
+                <a:solidFill>
+                  <a:srgbClr val="E8EAF6"/>
+                </a:solidFill>
+                <a:latin typeface="Microsoft YaHei"/>
+                <a:ea typeface="Microsoft YaHei"/>
+              </a:rPr>
+              <a:t>演示用剧本数据</a:t>
+            </a:r>
+          </a:p>
+        </p:txBody>
+      </p:sp>
+      <p:sp>
+        <p:nvSpPr>
+          <p:cNvPr id="8" name="Rounded Rectangle 7"/>
           <p:cNvSpPr/>
           <p:nvPr/>
         </p:nvSpPr>
         <p:spPr>
           <a:xfrm>
-            <a:off x="3152394" y="2606040"/>
-            <a:ext cx="219456" cy="274320"/>
-          </a:xfrm>
-          <a:prstGeom prst="rightArrow">
-            <a:avLst/>
-          </a:prstGeom>
-          <a:solidFill>
-            <a:srgbClr val="8B93B8"/>
-          </a:solidFill>
-          <a:ln>
-            <a:noFill/>
-          </a:ln>
-          <a:effectLst/>
-        </p:spPr>
-        <p:style>
-          <a:lnRef idx="1">
-            <a:schemeClr val="accent1"/>
-          </a:lnRef>
-          <a:fillRef idx="3">
-            <a:schemeClr val="accent1"/>
-          </a:fillRef>
-          <a:effectRef idx="2">
-            <a:schemeClr val="accent1"/>
-          </a:effectRef>
-          <a:fontRef idx="minor">
-            <a:schemeClr val="lt1"/>
-          </a:fontRef>
-        </p:style>
-        <p:txBody>
-          <a:bodyPr rtlCol="0" anchor="ctr"/>
-          <a:lstStyle/>
-          <a:p>
-            <a:pPr algn="ctr"/>
-          </a:p>
-        </p:txBody>
-      </p:sp>
-      <p:sp>
-        <p:nvSpPr>
-          <p:cNvPr id="9" name="Rounded Rectangle 8"/>
-          <p:cNvSpPr/>
-          <p:nvPr/>
-        </p:nvSpPr>
-        <p:spPr>
-          <a:xfrm>
-            <a:off x="3390138" y="1554480"/>
-            <a:ext cx="2567178" cy="2468880"/>
+            <a:off x="3344418" y="1554480"/>
+            <a:ext cx="2704338" cy="3108960"/>
           </a:xfrm>
           <a:prstGeom prst="roundRect">
             <a:avLst>
@@ -15189,7 +16442,7 @@
             </a:avLst>
           </a:prstGeom>
           <a:solidFill>
-            <a:srgbClr val="1A2040"/>
+            <a:srgbClr val="151A30"/>
           </a:solidFill>
           <a:ln w="12700">
             <a:solidFill>
@@ -15222,14 +16475,14 @@
               </a:lnSpc>
             </a:pPr>
             <a:r>
-              <a:rPr sz="1350" b="0" i="0">
-                <a:solidFill>
-                  <a:srgbClr val="E8EAF6"/>
-                </a:solidFill>
-                <a:latin typeface="Microsoft YaHei"/>
-                <a:ea typeface="Microsoft YaHei"/>
-              </a:rPr>
-              <a:t>V2 · 安全守护</a:t>
+              <a:rPr sz="1250" b="0" i="0">
+                <a:solidFill>
+                  <a:srgbClr val="E8EAF6"/>
+                </a:solidFill>
+                <a:latin typeface="Microsoft YaHei"/>
+                <a:ea typeface="Microsoft YaHei"/>
+              </a:rPr>
+              <a:t>隐私保护</a:t>
             </a:r>
           </a:p>
           <a:p>
@@ -15239,7 +16492,7 @@
               </a:lnSpc>
             </a:pPr>
             <a:r>
-              <a:rPr sz="1350" b="0" i="0">
+              <a:rPr sz="1250" b="0" i="0">
                 <a:solidFill>
                   <a:srgbClr val="E8EAF6"/>
                 </a:solidFill>
@@ -15256,14 +16509,14 @@
               </a:lnSpc>
             </a:pPr>
             <a:r>
-              <a:rPr sz="1350" b="0" i="0">
-                <a:solidFill>
-                  <a:srgbClr val="E8EAF6"/>
-                </a:solidFill>
-                <a:latin typeface="Microsoft YaHei"/>
-                <a:ea typeface="Microsoft YaHei"/>
-              </a:rPr>
-              <a:t>跌倒检测求助</a:t>
+              <a:rPr sz="1250" b="0" i="0">
+                <a:solidFill>
+                  <a:srgbClr val="E8EAF6"/>
+                </a:solidFill>
+                <a:latin typeface="Microsoft YaHei"/>
+                <a:ea typeface="Microsoft YaHei"/>
+              </a:rPr>
+              <a:t>本地优先 · 最小必要</a:t>
             </a:r>
           </a:p>
           <a:p>
@@ -15273,14 +16526,14 @@
               </a:lnSpc>
             </a:pPr>
             <a:r>
-              <a:rPr sz="1350" b="0" i="0">
-                <a:solidFill>
-                  <a:srgbClr val="E8EAF6"/>
-                </a:solidFill>
-                <a:latin typeface="Microsoft YaHei"/>
-                <a:ea typeface="Microsoft YaHei"/>
-              </a:rPr>
-              <a:t>家人健康日报</a:t>
+              <a:rPr sz="1250" b="0" i="0">
+                <a:solidFill>
+                  <a:srgbClr val="E8EAF6"/>
+                </a:solidFill>
+                <a:latin typeface="Microsoft YaHei"/>
+                <a:ea typeface="Microsoft YaHei"/>
+              </a:rPr>
+              <a:t>人脸模糊 · 加密存储</a:t>
             </a:r>
           </a:p>
           <a:p>
@@ -15290,72 +16543,28 @@
               </a:lnSpc>
             </a:pPr>
             <a:r>
-              <a:rPr sz="1350" b="0" i="0">
-                <a:solidFill>
-                  <a:srgbClr val="E8EAF6"/>
-                </a:solidFill>
-                <a:latin typeface="Microsoft YaHei"/>
-                <a:ea typeface="Microsoft YaHei"/>
-              </a:rPr>
-              <a:t>心率/血氧体征</a:t>
-            </a:r>
-          </a:p>
-        </p:txBody>
-      </p:sp>
-      <p:sp>
-        <p:nvSpPr>
-          <p:cNvPr id="10" name="Right Arrow 9"/>
+              <a:rPr sz="1250" b="0" i="0">
+                <a:solidFill>
+                  <a:srgbClr val="E8EAF6"/>
+                </a:solidFill>
+                <a:latin typeface="Microsoft YaHei"/>
+                <a:ea typeface="Microsoft YaHei"/>
+              </a:rPr>
+              <a:t>可查看、可删除、可撤回</a:t>
+            </a:r>
+          </a:p>
+        </p:txBody>
+      </p:sp>
+      <p:sp>
+        <p:nvSpPr>
+          <p:cNvPr id="9" name="Rounded Rectangle 8"/>
           <p:cNvSpPr/>
           <p:nvPr/>
         </p:nvSpPr>
         <p:spPr>
           <a:xfrm>
-            <a:off x="5993892" y="2606040"/>
-            <a:ext cx="219456" cy="274320"/>
-          </a:xfrm>
-          <a:prstGeom prst="rightArrow">
-            <a:avLst/>
-          </a:prstGeom>
-          <a:solidFill>
-            <a:srgbClr val="8B93B8"/>
-          </a:solidFill>
-          <a:ln>
-            <a:noFill/>
-          </a:ln>
-          <a:effectLst/>
-        </p:spPr>
-        <p:style>
-          <a:lnRef idx="1">
-            <a:schemeClr val="accent1"/>
-          </a:lnRef>
-          <a:fillRef idx="3">
-            <a:schemeClr val="accent1"/>
-          </a:fillRef>
-          <a:effectRef idx="2">
-            <a:schemeClr val="accent1"/>
-          </a:effectRef>
-          <a:fontRef idx="minor">
-            <a:schemeClr val="lt1"/>
-          </a:fontRef>
-        </p:style>
-        <p:txBody>
-          <a:bodyPr rtlCol="0" anchor="ctr"/>
-          <a:lstStyle/>
-          <a:p>
-            <a:pPr algn="ctr"/>
-          </a:p>
-        </p:txBody>
-      </p:sp>
-      <p:sp>
-        <p:nvSpPr>
-          <p:cNvPr id="11" name="Rounded Rectangle 10"/>
-          <p:cNvSpPr/>
-          <p:nvPr/>
-        </p:nvSpPr>
-        <p:spPr>
-          <a:xfrm>
-            <a:off x="6231636" y="1554480"/>
-            <a:ext cx="2567178" cy="2468880"/>
+            <a:off x="6140196" y="1554480"/>
+            <a:ext cx="2704338" cy="3108960"/>
           </a:xfrm>
           <a:prstGeom prst="roundRect">
             <a:avLst>
@@ -15363,7 +16572,7 @@
             </a:avLst>
           </a:prstGeom>
           <a:solidFill>
-            <a:srgbClr val="1A2040"/>
+            <a:srgbClr val="151A30"/>
           </a:solidFill>
           <a:ln w="12700">
             <a:solidFill>
@@ -15396,14 +16605,14 @@
               </a:lnSpc>
             </a:pPr>
             <a:r>
-              <a:rPr sz="1350" b="0" i="0">
-                <a:solidFill>
-                  <a:srgbClr val="E8EAF6"/>
-                </a:solidFill>
-                <a:latin typeface="Microsoft YaHei"/>
-                <a:ea typeface="Microsoft YaHei"/>
-              </a:rPr>
-              <a:t>V3 · 规模服务</a:t>
+              <a:rPr sz="1250" b="0" i="0">
+                <a:solidFill>
+                  <a:srgbClr val="E8EAF6"/>
+                </a:solidFill>
+                <a:latin typeface="Microsoft YaHei"/>
+                <a:ea typeface="Microsoft YaHei"/>
+              </a:rPr>
+              <a:t>合规边界</a:t>
             </a:r>
           </a:p>
           <a:p>
@@ -15413,7 +16622,7 @@
               </a:lnSpc>
             </a:pPr>
             <a:r>
-              <a:rPr sz="1350" b="0" i="0">
+              <a:rPr sz="1250" b="0" i="0">
                 <a:solidFill>
                   <a:srgbClr val="E8EAF6"/>
                 </a:solidFill>
@@ -15430,14 +16639,14 @@
               </a:lnSpc>
             </a:pPr>
             <a:r>
-              <a:rPr sz="1350" b="0" i="0">
-                <a:solidFill>
-                  <a:srgbClr val="E8EAF6"/>
-                </a:solidFill>
-                <a:latin typeface="Microsoft YaHei"/>
-                <a:ea typeface="Microsoft YaHei"/>
-              </a:rPr>
-              <a:t>方言扩展</a:t>
+              <a:rPr sz="1250" b="0" i="0">
+                <a:solidFill>
+                  <a:srgbClr val="E8EAF6"/>
+                </a:solidFill>
+                <a:latin typeface="Microsoft YaHei"/>
+                <a:ea typeface="Microsoft YaHei"/>
+              </a:rPr>
+              <a:t>个人信息保护法</a:t>
             </a:r>
           </a:p>
           <a:p>
@@ -15447,14 +16656,14 @@
               </a:lnSpc>
             </a:pPr>
             <a:r>
-              <a:rPr sz="1350" b="0" i="0">
-                <a:solidFill>
-                  <a:srgbClr val="E8EAF6"/>
-                </a:solidFill>
-                <a:latin typeface="Microsoft YaHei"/>
-                <a:ea typeface="Microsoft YaHei"/>
-              </a:rPr>
-              <a:t>社区护工多对多</a:t>
+              <a:rPr sz="1250" b="0" i="0">
+                <a:solidFill>
+                  <a:srgbClr val="E8EAF6"/>
+                </a:solidFill>
+                <a:latin typeface="Microsoft YaHei"/>
+                <a:ea typeface="Microsoft YaHei"/>
+              </a:rPr>
+              <a:t>采集指示灯 + 知情同意</a:t>
             </a:r>
           </a:p>
           <a:p>
@@ -15464,72 +16673,28 @@
               </a:lnSpc>
             </a:pPr>
             <a:r>
-              <a:rPr sz="1350" b="0" i="0">
-                <a:solidFill>
-                  <a:srgbClr val="E8EAF6"/>
-                </a:solidFill>
-                <a:latin typeface="Microsoft YaHei"/>
-                <a:ea typeface="Microsoft YaHei"/>
-              </a:rPr>
-              <a:t>端侧模型离线化</a:t>
-            </a:r>
-          </a:p>
-        </p:txBody>
-      </p:sp>
-      <p:sp>
-        <p:nvSpPr>
-          <p:cNvPr id="12" name="Right Arrow 11"/>
+              <a:rPr sz="1250" b="0" i="0">
+                <a:solidFill>
+                  <a:srgbClr val="E8EAF6"/>
+                </a:solidFill>
+                <a:latin typeface="Microsoft YaHei"/>
+                <a:ea typeface="Microsoft YaHei"/>
+              </a:rPr>
+              <a:t>适老化认证</a:t>
+            </a:r>
+          </a:p>
+        </p:txBody>
+      </p:sp>
+      <p:sp>
+        <p:nvSpPr>
+          <p:cNvPr id="10" name="Rounded Rectangle 9"/>
           <p:cNvSpPr/>
           <p:nvPr/>
         </p:nvSpPr>
         <p:spPr>
           <a:xfrm>
-            <a:off x="8835390" y="2606040"/>
-            <a:ext cx="219456" cy="274320"/>
-          </a:xfrm>
-          <a:prstGeom prst="rightArrow">
-            <a:avLst/>
-          </a:prstGeom>
-          <a:solidFill>
-            <a:srgbClr val="8B93B8"/>
-          </a:solidFill>
-          <a:ln>
-            <a:noFill/>
-          </a:ln>
-          <a:effectLst/>
-        </p:spPr>
-        <p:style>
-          <a:lnRef idx="1">
-            <a:schemeClr val="accent1"/>
-          </a:lnRef>
-          <a:fillRef idx="3">
-            <a:schemeClr val="accent1"/>
-          </a:fillRef>
-          <a:effectRef idx="2">
-            <a:schemeClr val="accent1"/>
-          </a:effectRef>
-          <a:fontRef idx="minor">
-            <a:schemeClr val="lt1"/>
-          </a:fontRef>
-        </p:style>
-        <p:txBody>
-          <a:bodyPr rtlCol="0" anchor="ctr"/>
-          <a:lstStyle/>
-          <a:p>
-            <a:pPr algn="ctr"/>
-          </a:p>
-        </p:txBody>
-      </p:sp>
-      <p:sp>
-        <p:nvSpPr>
-          <p:cNvPr id="13" name="Rounded Rectangle 12"/>
-          <p:cNvSpPr/>
-          <p:nvPr/>
-        </p:nvSpPr>
-        <p:spPr>
-          <a:xfrm>
-            <a:off x="9073134" y="1554480"/>
-            <a:ext cx="2567178" cy="2468880"/>
+            <a:off x="8935974" y="1554480"/>
+            <a:ext cx="2704338" cy="3108960"/>
           </a:xfrm>
           <a:prstGeom prst="roundRect">
             <a:avLst>
@@ -15537,7 +16702,7 @@
             </a:avLst>
           </a:prstGeom>
           <a:solidFill>
-            <a:srgbClr val="1A2040"/>
+            <a:srgbClr val="151A30"/>
           </a:solidFill>
           <a:ln w="12700">
             <a:solidFill>
@@ -15570,14 +16735,14 @@
               </a:lnSpc>
             </a:pPr>
             <a:r>
-              <a:rPr sz="1350" b="0" i="0">
-                <a:solidFill>
-                  <a:srgbClr val="E8EAF6"/>
-                </a:solidFill>
-                <a:latin typeface="Microsoft YaHei"/>
-                <a:ea typeface="Microsoft YaHei"/>
-              </a:rPr>
-              <a:t>长期 · 生态</a:t>
+              <a:rPr sz="1250" b="0" i="0">
+                <a:solidFill>
+                  <a:srgbClr val="E8EAF6"/>
+                </a:solidFill>
+                <a:latin typeface="Microsoft YaHei"/>
+                <a:ea typeface="Microsoft YaHei"/>
+              </a:rPr>
+              <a:t>风险声明</a:t>
             </a:r>
           </a:p>
           <a:p>
@@ -15587,7 +16752,7 @@
               </a:lnSpc>
             </a:pPr>
             <a:r>
-              <a:rPr sz="1350" b="0" i="0">
+              <a:rPr sz="1250" b="0" i="0">
                 <a:solidFill>
                   <a:srgbClr val="E8EAF6"/>
                 </a:solidFill>
@@ -15604,14 +16769,14 @@
               </a:lnSpc>
             </a:pPr>
             <a:r>
-              <a:rPr sz="1350" b="0" i="0">
-                <a:solidFill>
-                  <a:srgbClr val="E8EAF6"/>
-                </a:solidFill>
-                <a:latin typeface="Microsoft YaHei"/>
-                <a:ea typeface="Microsoft YaHei"/>
-              </a:rPr>
-              <a:t>可复用模板</a:t>
+              <a:rPr sz="1250" b="0" i="0">
+                <a:solidFill>
+                  <a:srgbClr val="E8EAF6"/>
+                </a:solidFill>
+                <a:latin typeface="Microsoft YaHei"/>
+                <a:ea typeface="Microsoft YaHei"/>
+              </a:rPr>
+              <a:t>不做医疗诊断（提醒工具）</a:t>
             </a:r>
           </a:p>
           <a:p>
@@ -15621,14 +16786,14 @@
               </a:lnSpc>
             </a:pPr>
             <a:r>
-              <a:rPr sz="1350" b="0" i="0">
-                <a:solidFill>
-                  <a:srgbClr val="E8EAF6"/>
-                </a:solidFill>
-                <a:latin typeface="Microsoft YaHei"/>
-                <a:ea typeface="Microsoft YaHei"/>
-              </a:rPr>
-              <a:t>智能体商店</a:t>
+              <a:rPr sz="1250" b="0" i="0">
+                <a:solidFill>
+                  <a:srgbClr val="E8EAF6"/>
+                </a:solidFill>
+                <a:latin typeface="Microsoft YaHei"/>
+                <a:ea typeface="Microsoft YaHei"/>
+              </a:rPr>
+              <a:t>跌倒求助为通知辅助</a:t>
             </a:r>
           </a:p>
           <a:p>
@@ -15638,28 +16803,28 @@
               </a:lnSpc>
             </a:pPr>
             <a:r>
-              <a:rPr sz="1350" b="0" i="0">
-                <a:solidFill>
-                  <a:srgbClr val="E8EAF6"/>
-                </a:solidFill>
-                <a:latin typeface="Microsoft YaHei"/>
-                <a:ea typeface="Microsoft YaHei"/>
-              </a:rPr>
-              <a:t>开放工具组件</a:t>
-            </a:r>
-          </a:p>
-        </p:txBody>
-      </p:sp>
-      <p:sp>
-        <p:nvSpPr>
-          <p:cNvPr id="14" name="TextBox 13"/>
+              <a:rPr sz="1250" b="0" i="0">
+                <a:solidFill>
+                  <a:srgbClr val="E8EAF6"/>
+                </a:solidFill>
+                <a:latin typeface="Microsoft YaHei"/>
+                <a:ea typeface="Microsoft YaHei"/>
+              </a:rPr>
+              <a:t>误报/依赖/误触发有预案</a:t>
+            </a:r>
+          </a:p>
+        </p:txBody>
+      </p:sp>
+      <p:sp>
+        <p:nvSpPr>
+          <p:cNvPr id="11" name="TextBox 10"/>
           <p:cNvSpPr txBox="1"/>
           <p:nvPr/>
         </p:nvSpPr>
         <p:spPr>
           <a:xfrm>
-            <a:off x="548640" y="4526280"/>
-            <a:ext cx="11064240" cy="457200"/>
+            <a:off x="548640" y="4937760"/>
+            <a:ext cx="11064240" cy="365760"/>
           </a:xfrm>
           <a:prstGeom prst="rect">
             <a:avLst/>
@@ -15685,14 +16850,54 @@
                 <a:latin typeface="Microsoft YaHei"/>
                 <a:ea typeface="Microsoft YaHei"/>
               </a:rPr>
-              <a:t>设计原则：先做深一个场景，再做宽多个场景；每一步都保留可演示、可验证的任务闭环。</a:t>
-            </a:r>
-          </a:p>
-        </p:txBody>
-      </p:sp>
-      <p:sp>
-        <p:nvSpPr>
-          <p:cNvPr id="15" name="TextBox 14"/>
+              <a:t>核心原则：服务的是“提醒与陪伴”，把医疗诊断、急救责任明确挡在边界之外。</a:t>
+            </a:r>
+          </a:p>
+        </p:txBody>
+      </p:sp>
+      <p:sp>
+        <p:nvSpPr>
+          <p:cNvPr id="12" name="TextBox 11"/>
+          <p:cNvSpPr txBox="1"/>
+          <p:nvPr/>
+        </p:nvSpPr>
+        <p:spPr>
+          <a:xfrm>
+            <a:off x="548640" y="5440680"/>
+            <a:ext cx="11064240" cy="365760"/>
+          </a:xfrm>
+          <a:prstGeom prst="rect">
+            <a:avLst/>
+          </a:prstGeom>
+          <a:noFill/>
+        </p:spPr>
+        <p:txBody>
+          <a:bodyPr wrap="square" anchor="t" lIns="0" rIns="0" tIns="0" bIns="0">
+            <a:spAutoFit/>
+          </a:bodyPr>
+          <a:lstStyle/>
+          <a:p>
+            <a:pPr algn="l">
+              <a:lnSpc>
+                <a:spcPct val="112000"/>
+              </a:lnSpc>
+            </a:pPr>
+            <a:r>
+              <a:rPr sz="1300" b="0" i="0">
+                <a:solidFill>
+                  <a:srgbClr val="8B93B8"/>
+                </a:solidFill>
+                <a:latin typeface="Microsoft YaHei"/>
+                <a:ea typeface="Microsoft YaHei"/>
+              </a:rPr>
+              <a:t>真实版实现：API Key 仅保存在本机 app/config.json（已 gitignore，不会进入代码仓库）</a:t>
+            </a:r>
+          </a:p>
+        </p:txBody>
+      </p:sp>
+      <p:sp>
+        <p:nvSpPr>
+          <p:cNvPr id="13" name="TextBox 12"/>
           <p:cNvSpPr txBox="1"/>
           <p:nvPr/>
         </p:nvSpPr>
@@ -17091,7 +18296,7 @@
                 <a:latin typeface="Microsoft YaHei"/>
                 <a:ea typeface="Microsoft YaHei"/>
               </a:rPr>
-              <a:t>技术实现与使用</a:t>
+              <a:t>技术实现与产品形态</a:t>
             </a:r>
           </a:p>
         </p:txBody>
@@ -17131,7 +18336,7 @@
                 <a:latin typeface="Microsoft YaHei"/>
                 <a:ea typeface="Microsoft YaHei"/>
               </a:rPr>
-              <a:t>真实可用版 app/、配置、操作</a:t>
+              <a:t>真实版 app/、系统使用、双端 App 构想</a:t>
             </a:r>
           </a:p>
         </p:txBody>
@@ -17781,7 +18986,7 @@
                 <a:latin typeface="Microsoft YaHei"/>
                 <a:ea typeface="Microsoft YaHei"/>
               </a:rPr>
-              <a:t>10 迭代计划 · 交付物清单</a:t>
+              <a:t>9 Demo 与验证</a:t>
             </a:r>
           </a:p>
         </p:txBody>
@@ -17821,7 +19026,7 @@
                 <a:latin typeface="Microsoft YaHei"/>
                 <a:ea typeface="Microsoft YaHei"/>
               </a:rPr>
-              <a:t>参赛提交材料</a:t>
+              <a:t>真实运行演示 + 自动化测试 + 无 Key 兜底</a:t>
             </a:r>
           </a:p>
         </p:txBody>
@@ -17906,6 +19111,1935 @@
                 <a:ea typeface="Microsoft YaHei"/>
               </a:rPr>
               <a:t>暖眸 · 居家养老 AI 眼镜智能体  20</a:t>
+            </a:r>
+          </a:p>
+        </p:txBody>
+      </p:sp>
+      <p:sp>
+        <p:nvSpPr>
+          <p:cNvPr id="7" name="Rounded Rectangle 6"/>
+          <p:cNvSpPr/>
+          <p:nvPr/>
+        </p:nvSpPr>
+        <p:spPr>
+          <a:xfrm>
+            <a:off x="548640" y="1463040"/>
+            <a:ext cx="5394960" cy="3108960"/>
+          </a:xfrm>
+          <a:prstGeom prst="roundRect">
+            <a:avLst>
+              <a:gd name="adj" fmla="val 6000"/>
+            </a:avLst>
+          </a:prstGeom>
+          <a:solidFill>
+            <a:srgbClr val="151A30"/>
+          </a:solidFill>
+          <a:ln w="12700">
+            <a:solidFill>
+              <a:srgbClr val="6D8DFF"/>
+            </a:solidFill>
+          </a:ln>
+          <a:effectLst/>
+        </p:spPr>
+        <p:style>
+          <a:lnRef idx="1">
+            <a:schemeClr val="accent1"/>
+          </a:lnRef>
+          <a:fillRef idx="3">
+            <a:schemeClr val="accent1"/>
+          </a:fillRef>
+          <a:effectRef idx="2">
+            <a:schemeClr val="accent1"/>
+          </a:effectRef>
+          <a:fontRef idx="minor">
+            <a:schemeClr val="lt1"/>
+          </a:fontRef>
+        </p:style>
+        <p:txBody>
+          <a:bodyPr rtlCol="0" anchor="ctr" wrap="square" lIns="73152" rIns="73152" tIns="27432" bIns="27432"/>
+          <a:lstStyle/>
+          <a:p>
+            <a:pPr algn="ctr">
+              <a:lnSpc>
+                <a:spcPct val="110000"/>
+              </a:lnSpc>
+            </a:pPr>
+            <a:r>
+              <a:rPr sz="1300" b="0" i="0">
+                <a:solidFill>
+                  <a:srgbClr val="E8EAF6"/>
+                </a:solidFill>
+                <a:latin typeface="Microsoft YaHei"/>
+                <a:ea typeface="Microsoft YaHei"/>
+              </a:rPr>
+              <a:t>真实运行演示（app/）</a:t>
+            </a:r>
+          </a:p>
+          <a:p>
+            <a:pPr algn="ctr">
+              <a:lnSpc>
+                <a:spcPct val="110000"/>
+              </a:lnSpc>
+            </a:pPr>
+            <a:r>
+              <a:rPr sz="1300" b="0" i="0">
+                <a:solidFill>
+                  <a:srgbClr val="E8EAF6"/>
+                </a:solidFill>
+                <a:latin typeface="Microsoft YaHei"/>
+                <a:ea typeface="Microsoft YaHei"/>
+              </a:rPr>
+              <a:t/>
+            </a:r>
+          </a:p>
+          <a:p>
+            <a:pPr algn="ctr">
+              <a:lnSpc>
+                <a:spcPct val="110000"/>
+              </a:lnSpc>
+            </a:pPr>
+            <a:r>
+              <a:rPr sz="1300" b="0" i="0">
+                <a:solidFill>
+                  <a:srgbClr val="E8EAF6"/>
+                </a:solidFill>
+                <a:latin typeface="Microsoft YaHei"/>
+                <a:ea typeface="Microsoft YaHei"/>
+              </a:rPr>
+              <a:t>① 摄像头/照片 → 视觉识别</a:t>
+            </a:r>
+          </a:p>
+          <a:p>
+            <a:pPr algn="ctr">
+              <a:lnSpc>
+                <a:spcPct val="110000"/>
+              </a:lnSpc>
+            </a:pPr>
+            <a:r>
+              <a:rPr sz="1300" b="0" i="0">
+                <a:solidFill>
+                  <a:srgbClr val="E8EAF6"/>
+                </a:solidFill>
+                <a:latin typeface="Microsoft YaHei"/>
+                <a:ea typeface="Microsoft YaHei"/>
+              </a:rPr>
+              <a:t>② 三个闭环逐步运行</a:t>
+            </a:r>
+          </a:p>
+          <a:p>
+            <a:pPr algn="ctr">
+              <a:lnSpc>
+                <a:spcPct val="110000"/>
+              </a:lnSpc>
+            </a:pPr>
+            <a:r>
+              <a:rPr sz="1300" b="0" i="0">
+                <a:solidFill>
+                  <a:srgbClr val="E8EAF6"/>
+                </a:solidFill>
+                <a:latin typeface="Microsoft YaHei"/>
+                <a:ea typeface="Microsoft YaHei"/>
+              </a:rPr>
+              <a:t>③ 决策轨迹实时展示</a:t>
+            </a:r>
+          </a:p>
+          <a:p>
+            <a:pPr algn="ctr">
+              <a:lnSpc>
+                <a:spcPct val="110000"/>
+              </a:lnSpc>
+            </a:pPr>
+            <a:r>
+              <a:rPr sz="1300" b="0" i="0">
+                <a:solidFill>
+                  <a:srgbClr val="E8EAF6"/>
+                </a:solidFill>
+                <a:latin typeface="Microsoft YaHei"/>
+                <a:ea typeface="Microsoft YaHei"/>
+              </a:rPr>
+              <a:t>④ 记忆面板实时变化</a:t>
+            </a:r>
+          </a:p>
+          <a:p>
+            <a:pPr algn="ctr">
+              <a:lnSpc>
+                <a:spcPct val="110000"/>
+              </a:lnSpc>
+            </a:pPr>
+            <a:r>
+              <a:rPr sz="1300" b="0" i="0">
+                <a:solidFill>
+                  <a:srgbClr val="E8EAF6"/>
+                </a:solidFill>
+                <a:latin typeface="Microsoft YaHei"/>
+                <a:ea typeface="Microsoft YaHei"/>
+              </a:rPr>
+              <a:t/>
+            </a:r>
+          </a:p>
+          <a:p>
+            <a:pPr algn="ctr">
+              <a:lnSpc>
+                <a:spcPct val="110000"/>
+              </a:lnSpc>
+            </a:pPr>
+            <a:r>
+              <a:rPr sz="1300" b="0" i="0">
+                <a:solidFill>
+                  <a:srgbClr val="E8EAF6"/>
+                </a:solidFill>
+                <a:latin typeface="Microsoft YaHei"/>
+                <a:ea typeface="Microsoft YaHei"/>
+              </a:rPr>
+              <a:t>浏览器即可复现</a:t>
+            </a:r>
+          </a:p>
+        </p:txBody>
+      </p:sp>
+      <p:sp>
+        <p:nvSpPr>
+          <p:cNvPr id="8" name="Rounded Rectangle 7"/>
+          <p:cNvSpPr/>
+          <p:nvPr/>
+        </p:nvSpPr>
+        <p:spPr>
+          <a:xfrm>
+            <a:off x="6172200" y="1463040"/>
+            <a:ext cx="5468112" cy="3108960"/>
+          </a:xfrm>
+          <a:prstGeom prst="roundRect">
+            <a:avLst>
+              <a:gd name="adj" fmla="val 6000"/>
+            </a:avLst>
+          </a:prstGeom>
+          <a:solidFill>
+            <a:srgbClr val="0B0E1C"/>
+          </a:solidFill>
+          <a:ln w="12700">
+            <a:solidFill>
+              <a:srgbClr val="2A3157"/>
+            </a:solidFill>
+          </a:ln>
+          <a:effectLst/>
+        </p:spPr>
+        <p:style>
+          <a:lnRef idx="1">
+            <a:schemeClr val="accent1"/>
+          </a:lnRef>
+          <a:fillRef idx="3">
+            <a:schemeClr val="accent1"/>
+          </a:fillRef>
+          <a:effectRef idx="2">
+            <a:schemeClr val="accent1"/>
+          </a:effectRef>
+          <a:fontRef idx="minor">
+            <a:schemeClr val="lt1"/>
+          </a:fontRef>
+        </p:style>
+        <p:txBody>
+          <a:bodyPr rtlCol="0" anchor="ctr" wrap="square" lIns="73152" rIns="73152" tIns="27432" bIns="27432"/>
+          <a:lstStyle/>
+          <a:p>
+            <a:pPr algn="l">
+              <a:lnSpc>
+                <a:spcPct val="110000"/>
+              </a:lnSpc>
+            </a:pPr>
+            <a:r>
+              <a:rPr sz="1200" b="0" i="0">
+                <a:solidFill>
+                  <a:srgbClr val="E8EAF6"/>
+                </a:solidFill>
+                <a:latin typeface="Microsoft YaHei"/>
+                <a:ea typeface="Microsoft YaHei"/>
+              </a:rPr>
+              <a:t>[感知] 08:00 场景=卧室 · 语音=无</a:t>
+            </a:r>
+          </a:p>
+          <a:p>
+            <a:pPr algn="l">
+              <a:lnSpc>
+                <a:spcPct val="110000"/>
+              </a:lnSpc>
+            </a:pPr>
+            <a:r>
+              <a:rPr sz="1200" b="0" i="0">
+                <a:solidFill>
+                  <a:srgbClr val="E8EAF6"/>
+                </a:solidFill>
+                <a:latin typeface="Microsoft YaHei"/>
+                <a:ea typeface="Microsoft YaHei"/>
+              </a:rPr>
+              <a:t>[触发] ⏰ 时间触发 · 用药计划（HIGH）</a:t>
+            </a:r>
+          </a:p>
+          <a:p>
+            <a:pPr algn="l">
+              <a:lnSpc>
+                <a:spcPct val="110000"/>
+              </a:lnSpc>
+            </a:pPr>
+            <a:r>
+              <a:rPr sz="1200" b="0" i="0">
+                <a:solidFill>
+                  <a:srgbClr val="E8EAF6"/>
+                </a:solidFill>
+                <a:latin typeface="Microsoft YaHei"/>
+                <a:ea typeface="Microsoft YaHei"/>
+              </a:rPr>
+              <a:t>[决策] 动作=remind_medication</a:t>
+            </a:r>
+          </a:p>
+          <a:p>
+            <a:pPr algn="l">
+              <a:lnSpc>
+                <a:spcPct val="110000"/>
+              </a:lnSpc>
+            </a:pPr>
+            <a:r>
+              <a:rPr sz="1200" b="0" i="0">
+                <a:solidFill>
+                  <a:srgbClr val="E8EAF6"/>
+                </a:solidFill>
+                <a:latin typeface="Microsoft YaHei"/>
+                <a:ea typeface="Microsoft YaHei"/>
+              </a:rPr>
+              <a:t>[工具] 用药计划 → 降压药（1粒/日）</a:t>
+            </a:r>
+          </a:p>
+          <a:p>
+            <a:pPr algn="l">
+              <a:lnSpc>
+                <a:spcPct val="110000"/>
+              </a:lnSpc>
+            </a:pPr>
+            <a:r>
+              <a:rPr sz="1200" b="0" i="0">
+                <a:solidFill>
+                  <a:srgbClr val="E8EAF6"/>
+                </a:solidFill>
+                <a:latin typeface="Microsoft YaHei"/>
+                <a:ea typeface="Microsoft YaHei"/>
+              </a:rPr>
+              <a:t>[反馈] 🔊 王奶奶，该吃降压药了。</a:t>
+            </a:r>
+          </a:p>
+          <a:p>
+            <a:pPr algn="l">
+              <a:lnSpc>
+                <a:spcPct val="110000"/>
+              </a:lnSpc>
+            </a:pPr>
+            <a:r>
+              <a:rPr sz="1200" b="0" i="0">
+                <a:solidFill>
+                  <a:srgbClr val="E8EAF6"/>
+                </a:solidFill>
+                <a:latin typeface="Microsoft YaHei"/>
+                <a:ea typeface="Microsoft YaHei"/>
+              </a:rPr>
+              <a:t/>
+            </a:r>
+          </a:p>
+          <a:p>
+            <a:pPr algn="l">
+              <a:lnSpc>
+                <a:spcPct val="110000"/>
+              </a:lnSpc>
+            </a:pPr>
+            <a:r>
+              <a:rPr sz="1200" b="0" i="0">
+                <a:solidFill>
+                  <a:srgbClr val="E8EAF6"/>
+                </a:solidFill>
+                <a:latin typeface="Microsoft YaHei"/>
+                <a:ea typeface="Microsoft YaHei"/>
+              </a:rPr>
+              <a:t>= Agent 决策轨迹（真实执行）</a:t>
+            </a:r>
+          </a:p>
+        </p:txBody>
+      </p:sp>
+      <p:sp>
+        <p:nvSpPr>
+          <p:cNvPr id="9" name="Rounded Rectangle 8"/>
+          <p:cNvSpPr/>
+          <p:nvPr/>
+        </p:nvSpPr>
+        <p:spPr>
+          <a:xfrm>
+            <a:off x="548640" y="4846320"/>
+            <a:ext cx="5449824" cy="548640"/>
+          </a:xfrm>
+          <a:prstGeom prst="roundRect">
+            <a:avLst>
+              <a:gd name="adj" fmla="val 10000"/>
+            </a:avLst>
+          </a:prstGeom>
+          <a:solidFill>
+            <a:srgbClr val="1A2040"/>
+          </a:solidFill>
+          <a:ln w="12700">
+            <a:solidFill>
+              <a:srgbClr val="2A3157"/>
+            </a:solidFill>
+          </a:ln>
+          <a:effectLst/>
+        </p:spPr>
+        <p:style>
+          <a:lnRef idx="1">
+            <a:schemeClr val="accent1"/>
+          </a:lnRef>
+          <a:fillRef idx="3">
+            <a:schemeClr val="accent1"/>
+          </a:fillRef>
+          <a:effectRef idx="2">
+            <a:schemeClr val="accent1"/>
+          </a:effectRef>
+          <a:fontRef idx="minor">
+            <a:schemeClr val="lt1"/>
+          </a:fontRef>
+        </p:style>
+        <p:txBody>
+          <a:bodyPr rtlCol="0" anchor="ctr"/>
+          <a:lstStyle/>
+          <a:p>
+            <a:pPr algn="ctr"/>
+          </a:p>
+        </p:txBody>
+      </p:sp>
+      <p:sp>
+        <p:nvSpPr>
+          <p:cNvPr id="10" name="TextBox 9"/>
+          <p:cNvSpPr txBox="1"/>
+          <p:nvPr/>
+        </p:nvSpPr>
+        <p:spPr>
+          <a:xfrm>
+            <a:off x="777240" y="4956048"/>
+            <a:ext cx="5029200" cy="411480"/>
+          </a:xfrm>
+          <a:prstGeom prst="rect">
+            <a:avLst/>
+          </a:prstGeom>
+          <a:noFill/>
+        </p:spPr>
+        <p:txBody>
+          <a:bodyPr wrap="square" anchor="t" lIns="0" rIns="0" tIns="0" bIns="0">
+            <a:spAutoFit/>
+          </a:bodyPr>
+          <a:lstStyle/>
+          <a:p>
+            <a:pPr algn="l">
+              <a:lnSpc>
+                <a:spcPct val="112000"/>
+              </a:lnSpc>
+            </a:pPr>
+            <a:r>
+              <a:rPr sz="1150" b="0" i="0">
+                <a:solidFill>
+                  <a:srgbClr val="E8EAF6"/>
+                </a:solidFill>
+                <a:latin typeface="Microsoft YaHei"/>
+                <a:ea typeface="Microsoft YaHei"/>
+              </a:rPr>
+              <a:t>端到端测试：Mock LLM 模拟服务商：12 项断言全部通过（视觉→决策→工具→记忆）</a:t>
+            </a:r>
+          </a:p>
+        </p:txBody>
+      </p:sp>
+      <p:sp>
+        <p:nvSpPr>
+          <p:cNvPr id="11" name="Rounded Rectangle 10"/>
+          <p:cNvSpPr/>
+          <p:nvPr/>
+        </p:nvSpPr>
+        <p:spPr>
+          <a:xfrm>
+            <a:off x="6181344" y="4846320"/>
+            <a:ext cx="5449824" cy="548640"/>
+          </a:xfrm>
+          <a:prstGeom prst="roundRect">
+            <a:avLst>
+              <a:gd name="adj" fmla="val 10000"/>
+            </a:avLst>
+          </a:prstGeom>
+          <a:solidFill>
+            <a:srgbClr val="1A2040"/>
+          </a:solidFill>
+          <a:ln w="12700">
+            <a:solidFill>
+              <a:srgbClr val="2A3157"/>
+            </a:solidFill>
+          </a:ln>
+          <a:effectLst/>
+        </p:spPr>
+        <p:style>
+          <a:lnRef idx="1">
+            <a:schemeClr val="accent1"/>
+          </a:lnRef>
+          <a:fillRef idx="3">
+            <a:schemeClr val="accent1"/>
+          </a:fillRef>
+          <a:effectRef idx="2">
+            <a:schemeClr val="accent1"/>
+          </a:effectRef>
+          <a:fontRef idx="minor">
+            <a:schemeClr val="lt1"/>
+          </a:fontRef>
+        </p:style>
+        <p:txBody>
+          <a:bodyPr rtlCol="0" anchor="ctr"/>
+          <a:lstStyle/>
+          <a:p>
+            <a:pPr algn="ctr"/>
+          </a:p>
+        </p:txBody>
+      </p:sp>
+      <p:sp>
+        <p:nvSpPr>
+          <p:cNvPr id="12" name="TextBox 11"/>
+          <p:cNvSpPr txBox="1"/>
+          <p:nvPr/>
+        </p:nvSpPr>
+        <p:spPr>
+          <a:xfrm>
+            <a:off x="6409944" y="4956048"/>
+            <a:ext cx="5029200" cy="411480"/>
+          </a:xfrm>
+          <a:prstGeom prst="rect">
+            <a:avLst/>
+          </a:prstGeom>
+          <a:noFill/>
+        </p:spPr>
+        <p:txBody>
+          <a:bodyPr wrap="square" anchor="t" lIns="0" rIns="0" tIns="0" bIns="0">
+            <a:spAutoFit/>
+          </a:bodyPr>
+          <a:lstStyle/>
+          <a:p>
+            <a:pPr algn="l">
+              <a:lnSpc>
+                <a:spcPct val="112000"/>
+              </a:lnSpc>
+            </a:pPr>
+            <a:r>
+              <a:rPr sz="1150" b="0" i="0">
+                <a:solidFill>
+                  <a:srgbClr val="E8EAF6"/>
+                </a:solidFill>
+                <a:latin typeface="Microsoft YaHei"/>
+                <a:ea typeface="Microsoft YaHei"/>
+              </a:rPr>
+              <a:t>HTTP 冒烟测试：前端页面、JS 类型、健康检查、无 Key 兜底提示均正常</a:t>
+            </a:r>
+          </a:p>
+        </p:txBody>
+      </p:sp>
+      <p:sp>
+        <p:nvSpPr>
+          <p:cNvPr id="13" name="Rounded Rectangle 12"/>
+          <p:cNvSpPr/>
+          <p:nvPr/>
+        </p:nvSpPr>
+        <p:spPr>
+          <a:xfrm>
+            <a:off x="548640" y="5504688"/>
+            <a:ext cx="5449824" cy="548640"/>
+          </a:xfrm>
+          <a:prstGeom prst="roundRect">
+            <a:avLst>
+              <a:gd name="adj" fmla="val 10000"/>
+            </a:avLst>
+          </a:prstGeom>
+          <a:solidFill>
+            <a:srgbClr val="1A2040"/>
+          </a:solidFill>
+          <a:ln w="12700">
+            <a:solidFill>
+              <a:srgbClr val="2A3157"/>
+            </a:solidFill>
+          </a:ln>
+          <a:effectLst/>
+        </p:spPr>
+        <p:style>
+          <a:lnRef idx="1">
+            <a:schemeClr val="accent1"/>
+          </a:lnRef>
+          <a:fillRef idx="3">
+            <a:schemeClr val="accent1"/>
+          </a:fillRef>
+          <a:effectRef idx="2">
+            <a:schemeClr val="accent1"/>
+          </a:effectRef>
+          <a:fontRef idx="minor">
+            <a:schemeClr val="lt1"/>
+          </a:fontRef>
+        </p:style>
+        <p:txBody>
+          <a:bodyPr rtlCol="0" anchor="ctr"/>
+          <a:lstStyle/>
+          <a:p>
+            <a:pPr algn="ctr"/>
+          </a:p>
+        </p:txBody>
+      </p:sp>
+      <p:sp>
+        <p:nvSpPr>
+          <p:cNvPr id="14" name="TextBox 13"/>
+          <p:cNvSpPr txBox="1"/>
+          <p:nvPr/>
+        </p:nvSpPr>
+        <p:spPr>
+          <a:xfrm>
+            <a:off x="777240" y="5614416"/>
+            <a:ext cx="5029200" cy="411480"/>
+          </a:xfrm>
+          <a:prstGeom prst="rect">
+            <a:avLst/>
+          </a:prstGeom>
+          <a:noFill/>
+        </p:spPr>
+        <p:txBody>
+          <a:bodyPr wrap="square" anchor="t" lIns="0" rIns="0" tIns="0" bIns="0">
+            <a:spAutoFit/>
+          </a:bodyPr>
+          <a:lstStyle/>
+          <a:p>
+            <a:pPr algn="l">
+              <a:lnSpc>
+                <a:spcPct val="112000"/>
+              </a:lnSpc>
+            </a:pPr>
+            <a:r>
+              <a:rPr sz="1150" b="0" i="0">
+                <a:solidFill>
+                  <a:srgbClr val="E8EAF6"/>
+                </a:solidFill>
+                <a:latin typeface="Microsoft YaHei"/>
+                <a:ea typeface="Microsoft YaHei"/>
+              </a:rPr>
+              <a:t>无 Key 兜底：未配置 Key 时给出明确引导，不崩溃</a:t>
+            </a:r>
+          </a:p>
+        </p:txBody>
+      </p:sp>
+      <p:sp>
+        <p:nvSpPr>
+          <p:cNvPr id="15" name="Rounded Rectangle 14"/>
+          <p:cNvSpPr/>
+          <p:nvPr/>
+        </p:nvSpPr>
+        <p:spPr>
+          <a:xfrm>
+            <a:off x="6181344" y="5504688"/>
+            <a:ext cx="5449824" cy="548640"/>
+          </a:xfrm>
+          <a:prstGeom prst="roundRect">
+            <a:avLst>
+              <a:gd name="adj" fmla="val 10000"/>
+            </a:avLst>
+          </a:prstGeom>
+          <a:solidFill>
+            <a:srgbClr val="1A2040"/>
+          </a:solidFill>
+          <a:ln w="12700">
+            <a:solidFill>
+              <a:srgbClr val="2A3157"/>
+            </a:solidFill>
+          </a:ln>
+          <a:effectLst/>
+        </p:spPr>
+        <p:style>
+          <a:lnRef idx="1">
+            <a:schemeClr val="accent1"/>
+          </a:lnRef>
+          <a:fillRef idx="3">
+            <a:schemeClr val="accent1"/>
+          </a:fillRef>
+          <a:effectRef idx="2">
+            <a:schemeClr val="accent1"/>
+          </a:effectRef>
+          <a:fontRef idx="minor">
+            <a:schemeClr val="lt1"/>
+          </a:fontRef>
+        </p:style>
+        <p:txBody>
+          <a:bodyPr rtlCol="0" anchor="ctr"/>
+          <a:lstStyle/>
+          <a:p>
+            <a:pPr algn="ctr"/>
+          </a:p>
+        </p:txBody>
+      </p:sp>
+      <p:sp>
+        <p:nvSpPr>
+          <p:cNvPr id="16" name="TextBox 15"/>
+          <p:cNvSpPr txBox="1"/>
+          <p:nvPr/>
+        </p:nvSpPr>
+        <p:spPr>
+          <a:xfrm>
+            <a:off x="6409944" y="5614416"/>
+            <a:ext cx="5029200" cy="411480"/>
+          </a:xfrm>
+          <a:prstGeom prst="rect">
+            <a:avLst/>
+          </a:prstGeom>
+          <a:noFill/>
+        </p:spPr>
+        <p:txBody>
+          <a:bodyPr wrap="square" anchor="t" lIns="0" rIns="0" tIns="0" bIns="0">
+            <a:spAutoFit/>
+          </a:bodyPr>
+          <a:lstStyle/>
+          <a:p>
+            <a:pPr algn="l">
+              <a:lnSpc>
+                <a:spcPct val="112000"/>
+              </a:lnSpc>
+            </a:pPr>
+            <a:r>
+              <a:rPr sz="1150" b="0" i="0">
+                <a:solidFill>
+                  <a:srgbClr val="E8EAF6"/>
+                </a:solidFill>
+                <a:latin typeface="Microsoft YaHei"/>
+                <a:ea typeface="Microsoft YaHei"/>
+              </a:rPr>
+              <a:t>概念演示版：web/（浏览器版）与 demo/（Python 版）无需 Key，可作视频兜底材料</a:t>
+            </a:r>
+          </a:p>
+        </p:txBody>
+      </p:sp>
+      <p:sp>
+        <p:nvSpPr>
+          <p:cNvPr id="17" name="TextBox 16"/>
+          <p:cNvSpPr txBox="1"/>
+          <p:nvPr/>
+        </p:nvSpPr>
+        <p:spPr>
+          <a:xfrm>
+            <a:off x="9418320" y="6510528"/>
+            <a:ext cx="2377440" cy="274320"/>
+          </a:xfrm>
+          <a:prstGeom prst="rect">
+            <a:avLst/>
+          </a:prstGeom>
+          <a:noFill/>
+        </p:spPr>
+        <p:txBody>
+          <a:bodyPr wrap="square" anchor="t" lIns="0" rIns="0" tIns="0" bIns="0">
+            <a:spAutoFit/>
+          </a:bodyPr>
+          <a:lstStyle/>
+          <a:p>
+            <a:pPr algn="r">
+              <a:lnSpc>
+                <a:spcPct val="112000"/>
+              </a:lnSpc>
+            </a:pPr>
+            <a:r>
+              <a:rPr sz="950" b="0" i="0">
+                <a:solidFill>
+                  <a:srgbClr val="8B93B8"/>
+                </a:solidFill>
+                <a:latin typeface="Microsoft YaHei"/>
+                <a:ea typeface="Microsoft YaHei"/>
+              </a:rPr>
+              <a:t>暖眸 · 居家养老 AI 眼镜智能体  20</a:t>
+            </a:r>
+          </a:p>
+        </p:txBody>
+      </p:sp>
+    </p:spTree>
+  </p:cSld>
+  <p:clrMapOvr>
+    <a:masterClrMapping/>
+  </p:clrMapOvr>
+</p:sld>
+</file>
+
+<file path=ppt/slides/slide21.xml><?xml version="1.0" encoding="utf-8"?>
+<p:sld xmlns:a="http://schemas.openxmlformats.org/drawingml/2006/main" xmlns:p="http://schemas.openxmlformats.org/presentationml/2006/main" xmlns:r="http://schemas.openxmlformats.org/officeDocument/2006/relationships">
+  <p:cSld>
+    <p:bg>
+      <p:bgPr>
+        <a:solidFill>
+          <a:srgbClr val="0D1020"/>
+        </a:solidFill>
+        <a:effectLst/>
+      </p:bgPr>
+    </p:bg>
+    <p:spTree>
+      <p:nvGrpSpPr>
+        <p:cNvPr id="1" name=""/>
+        <p:cNvGrpSpPr/>
+        <p:nvPr/>
+      </p:nvGrpSpPr>
+      <p:grpSpPr/>
+      <p:sp>
+        <p:nvSpPr>
+          <p:cNvPr id="2" name="TextBox 1"/>
+          <p:cNvSpPr txBox="1"/>
+          <p:nvPr/>
+        </p:nvSpPr>
+        <p:spPr>
+          <a:xfrm>
+            <a:off x="548640" y="256032"/>
+            <a:ext cx="822960" cy="502920"/>
+          </a:xfrm>
+          <a:prstGeom prst="rect">
+            <a:avLst/>
+          </a:prstGeom>
+          <a:noFill/>
+        </p:spPr>
+        <p:txBody>
+          <a:bodyPr wrap="square" anchor="t" lIns="0" rIns="0" tIns="0" bIns="0">
+            <a:spAutoFit/>
+          </a:bodyPr>
+          <a:lstStyle/>
+          <a:p>
+            <a:pPr algn="l">
+              <a:lnSpc>
+                <a:spcPct val="112000"/>
+              </a:lnSpc>
+            </a:pPr>
+            <a:r>
+              <a:rPr sz="2300" b="1" i="0">
+                <a:solidFill>
+                  <a:srgbClr val="6D8DFF"/>
+                </a:solidFill>
+                <a:latin typeface="Microsoft YaHei"/>
+                <a:ea typeface="Microsoft YaHei"/>
+              </a:rPr>
+              <a:t>21</a:t>
+            </a:r>
+          </a:p>
+        </p:txBody>
+      </p:sp>
+      <p:sp>
+        <p:nvSpPr>
+          <p:cNvPr id="3" name="TextBox 2"/>
+          <p:cNvSpPr txBox="1"/>
+          <p:nvPr/>
+        </p:nvSpPr>
+        <p:spPr>
+          <a:xfrm>
+            <a:off x="1143000" y="219456"/>
+            <a:ext cx="10424160" cy="320040"/>
+          </a:xfrm>
+          <a:prstGeom prst="rect">
+            <a:avLst/>
+          </a:prstGeom>
+          <a:noFill/>
+        </p:spPr>
+        <p:txBody>
+          <a:bodyPr wrap="square" anchor="t" lIns="0" rIns="0" tIns="0" bIns="0">
+            <a:spAutoFit/>
+          </a:bodyPr>
+          <a:lstStyle/>
+          <a:p>
+            <a:pPr algn="l">
+              <a:lnSpc>
+                <a:spcPct val="112000"/>
+              </a:lnSpc>
+            </a:pPr>
+            <a:r>
+              <a:rPr sz="1150" b="1" i="0">
+                <a:solidFill>
+                  <a:srgbClr val="FFB454"/>
+                </a:solidFill>
+                <a:latin typeface="Microsoft YaHei"/>
+                <a:ea typeface="Microsoft YaHei"/>
+              </a:rPr>
+              <a:t>10 迭代计划</a:t>
+            </a:r>
+          </a:p>
+        </p:txBody>
+      </p:sp>
+      <p:sp>
+        <p:nvSpPr>
+          <p:cNvPr id="4" name="TextBox 3"/>
+          <p:cNvSpPr txBox="1"/>
+          <p:nvPr/>
+        </p:nvSpPr>
+        <p:spPr>
+          <a:xfrm>
+            <a:off x="1143000" y="512064"/>
+            <a:ext cx="10424160" cy="548640"/>
+          </a:xfrm>
+          <a:prstGeom prst="rect">
+            <a:avLst/>
+          </a:prstGeom>
+          <a:noFill/>
+        </p:spPr>
+        <p:txBody>
+          <a:bodyPr wrap="square" anchor="t" lIns="0" rIns="0" tIns="0" bIns="0">
+            <a:spAutoFit/>
+          </a:bodyPr>
+          <a:lstStyle/>
+          <a:p>
+            <a:pPr algn="l">
+              <a:lnSpc>
+                <a:spcPct val="112000"/>
+              </a:lnSpc>
+            </a:pPr>
+            <a:r>
+              <a:rPr sz="2400" b="1" i="0">
+                <a:solidFill>
+                  <a:srgbClr val="E8EAF6"/>
+                </a:solidFill>
+                <a:latin typeface="Microsoft YaHei"/>
+                <a:ea typeface="Microsoft YaHei"/>
+              </a:rPr>
+              <a:t>从初赛可运行版本到长期陪伴生态</a:t>
+            </a:r>
+          </a:p>
+        </p:txBody>
+      </p:sp>
+      <p:sp>
+        <p:nvSpPr>
+          <p:cNvPr id="5" name="Rectangle 4"/>
+          <p:cNvSpPr/>
+          <p:nvPr/>
+        </p:nvSpPr>
+        <p:spPr>
+          <a:xfrm>
+            <a:off x="548640" y="6492240"/>
+            <a:ext cx="11091672" cy="25400"/>
+          </a:xfrm>
+          <a:prstGeom prst="rect">
+            <a:avLst/>
+          </a:prstGeom>
+          <a:solidFill>
+            <a:srgbClr val="2A3157"/>
+          </a:solidFill>
+          <a:ln>
+            <a:noFill/>
+          </a:ln>
+          <a:effectLst/>
+        </p:spPr>
+        <p:style>
+          <a:lnRef idx="1">
+            <a:schemeClr val="accent1"/>
+          </a:lnRef>
+          <a:fillRef idx="3">
+            <a:schemeClr val="accent1"/>
+          </a:fillRef>
+          <a:effectRef idx="2">
+            <a:schemeClr val="accent1"/>
+          </a:effectRef>
+          <a:fontRef idx="minor">
+            <a:schemeClr val="lt1"/>
+          </a:fontRef>
+        </p:style>
+        <p:txBody>
+          <a:bodyPr rtlCol="0" anchor="ctr"/>
+          <a:lstStyle/>
+          <a:p>
+            <a:pPr algn="ctr"/>
+          </a:p>
+        </p:txBody>
+      </p:sp>
+      <p:sp>
+        <p:nvSpPr>
+          <p:cNvPr id="6" name="TextBox 5"/>
+          <p:cNvSpPr txBox="1"/>
+          <p:nvPr/>
+        </p:nvSpPr>
+        <p:spPr>
+          <a:xfrm>
+            <a:off x="9418320" y="6510528"/>
+            <a:ext cx="2377440" cy="274320"/>
+          </a:xfrm>
+          <a:prstGeom prst="rect">
+            <a:avLst/>
+          </a:prstGeom>
+          <a:noFill/>
+        </p:spPr>
+        <p:txBody>
+          <a:bodyPr wrap="square" anchor="t" lIns="0" rIns="0" tIns="0" bIns="0">
+            <a:spAutoFit/>
+          </a:bodyPr>
+          <a:lstStyle/>
+          <a:p>
+            <a:pPr algn="r">
+              <a:lnSpc>
+                <a:spcPct val="112000"/>
+              </a:lnSpc>
+            </a:pPr>
+            <a:r>
+              <a:rPr sz="950" b="0" i="0">
+                <a:solidFill>
+                  <a:srgbClr val="8B93B8"/>
+                </a:solidFill>
+                <a:latin typeface="Microsoft YaHei"/>
+                <a:ea typeface="Microsoft YaHei"/>
+              </a:rPr>
+              <a:t>暖眸 · 居家养老 AI 眼镜智能体  21</a:t>
+            </a:r>
+          </a:p>
+        </p:txBody>
+      </p:sp>
+      <p:sp>
+        <p:nvSpPr>
+          <p:cNvPr id="7" name="Rounded Rectangle 6"/>
+          <p:cNvSpPr/>
+          <p:nvPr/>
+        </p:nvSpPr>
+        <p:spPr>
+          <a:xfrm>
+            <a:off x="548640" y="1554480"/>
+            <a:ext cx="2567178" cy="2468880"/>
+          </a:xfrm>
+          <a:prstGeom prst="roundRect">
+            <a:avLst>
+              <a:gd name="adj" fmla="val 12000"/>
+            </a:avLst>
+          </a:prstGeom>
+          <a:solidFill>
+            <a:srgbClr val="1A2040"/>
+          </a:solidFill>
+          <a:ln w="12700">
+            <a:solidFill>
+              <a:srgbClr val="6D8DFF"/>
+            </a:solidFill>
+          </a:ln>
+          <a:effectLst/>
+        </p:spPr>
+        <p:style>
+          <a:lnRef idx="1">
+            <a:schemeClr val="accent1"/>
+          </a:lnRef>
+          <a:fillRef idx="3">
+            <a:schemeClr val="accent1"/>
+          </a:fillRef>
+          <a:effectRef idx="2">
+            <a:schemeClr val="accent1"/>
+          </a:effectRef>
+          <a:fontRef idx="minor">
+            <a:schemeClr val="lt1"/>
+          </a:fontRef>
+        </p:style>
+        <p:txBody>
+          <a:bodyPr rtlCol="0" anchor="ctr" wrap="square" lIns="73152" rIns="73152" tIns="27432" bIns="27432"/>
+          <a:lstStyle/>
+          <a:p>
+            <a:pPr algn="ctr">
+              <a:lnSpc>
+                <a:spcPct val="110000"/>
+              </a:lnSpc>
+            </a:pPr>
+            <a:r>
+              <a:rPr sz="1350" b="0" i="0">
+                <a:solidFill>
+                  <a:srgbClr val="E8EAF6"/>
+                </a:solidFill>
+                <a:latin typeface="Microsoft YaHei"/>
+                <a:ea typeface="Microsoft YaHei"/>
+              </a:rPr>
+              <a:t>V1 · 初赛交付</a:t>
+            </a:r>
+          </a:p>
+          <a:p>
+            <a:pPr algn="ctr">
+              <a:lnSpc>
+                <a:spcPct val="110000"/>
+              </a:lnSpc>
+            </a:pPr>
+            <a:r>
+              <a:rPr sz="1350" b="0" i="0">
+                <a:solidFill>
+                  <a:srgbClr val="E8EAF6"/>
+                </a:solidFill>
+                <a:latin typeface="Microsoft YaHei"/>
+                <a:ea typeface="Microsoft YaHei"/>
+              </a:rPr>
+              <a:t/>
+            </a:r>
+          </a:p>
+          <a:p>
+            <a:pPr algn="ctr">
+              <a:lnSpc>
+                <a:spcPct val="110000"/>
+              </a:lnSpc>
+            </a:pPr>
+            <a:r>
+              <a:rPr sz="1350" b="0" i="0">
+                <a:solidFill>
+                  <a:srgbClr val="E8EAF6"/>
+                </a:solidFill>
+                <a:latin typeface="Microsoft YaHei"/>
+                <a:ea typeface="Microsoft YaHei"/>
+              </a:rPr>
+              <a:t>真实 Agent 版（app/）</a:t>
+            </a:r>
+          </a:p>
+          <a:p>
+            <a:pPr algn="ctr">
+              <a:lnSpc>
+                <a:spcPct val="110000"/>
+              </a:lnSpc>
+            </a:pPr>
+            <a:r>
+              <a:rPr sz="1350" b="0" i="0">
+                <a:solidFill>
+                  <a:srgbClr val="E8EAF6"/>
+                </a:solidFill>
+                <a:latin typeface="Microsoft YaHei"/>
+                <a:ea typeface="Microsoft YaHei"/>
+              </a:rPr>
+              <a:t>找物/用药/出门三闭环</a:t>
+            </a:r>
+          </a:p>
+          <a:p>
+            <a:pPr algn="ctr">
+              <a:lnSpc>
+                <a:spcPct val="110000"/>
+              </a:lnSpc>
+            </a:pPr>
+            <a:r>
+              <a:rPr sz="1350" b="0" i="0">
+                <a:solidFill>
+                  <a:srgbClr val="E8EAF6"/>
+                </a:solidFill>
+                <a:latin typeface="Microsoft YaHei"/>
+                <a:ea typeface="Microsoft YaHei"/>
+              </a:rPr>
+              <a:t>Web 概念演示 + 材料</a:t>
+            </a:r>
+          </a:p>
+        </p:txBody>
+      </p:sp>
+      <p:sp>
+        <p:nvSpPr>
+          <p:cNvPr id="8" name="Right Arrow 7"/>
+          <p:cNvSpPr/>
+          <p:nvPr/>
+        </p:nvSpPr>
+        <p:spPr>
+          <a:xfrm>
+            <a:off x="3152394" y="2606040"/>
+            <a:ext cx="219456" cy="274320"/>
+          </a:xfrm>
+          <a:prstGeom prst="rightArrow">
+            <a:avLst/>
+          </a:prstGeom>
+          <a:solidFill>
+            <a:srgbClr val="8B93B8"/>
+          </a:solidFill>
+          <a:ln>
+            <a:noFill/>
+          </a:ln>
+          <a:effectLst/>
+        </p:spPr>
+        <p:style>
+          <a:lnRef idx="1">
+            <a:schemeClr val="accent1"/>
+          </a:lnRef>
+          <a:fillRef idx="3">
+            <a:schemeClr val="accent1"/>
+          </a:fillRef>
+          <a:effectRef idx="2">
+            <a:schemeClr val="accent1"/>
+          </a:effectRef>
+          <a:fontRef idx="minor">
+            <a:schemeClr val="lt1"/>
+          </a:fontRef>
+        </p:style>
+        <p:txBody>
+          <a:bodyPr rtlCol="0" anchor="ctr"/>
+          <a:lstStyle/>
+          <a:p>
+            <a:pPr algn="ctr"/>
+          </a:p>
+        </p:txBody>
+      </p:sp>
+      <p:sp>
+        <p:nvSpPr>
+          <p:cNvPr id="9" name="Rounded Rectangle 8"/>
+          <p:cNvSpPr/>
+          <p:nvPr/>
+        </p:nvSpPr>
+        <p:spPr>
+          <a:xfrm>
+            <a:off x="3390138" y="1554480"/>
+            <a:ext cx="2567178" cy="2468880"/>
+          </a:xfrm>
+          <a:prstGeom prst="roundRect">
+            <a:avLst>
+              <a:gd name="adj" fmla="val 12000"/>
+            </a:avLst>
+          </a:prstGeom>
+          <a:solidFill>
+            <a:srgbClr val="1A2040"/>
+          </a:solidFill>
+          <a:ln w="12700">
+            <a:solidFill>
+              <a:srgbClr val="57D9A3"/>
+            </a:solidFill>
+          </a:ln>
+          <a:effectLst/>
+        </p:spPr>
+        <p:style>
+          <a:lnRef idx="1">
+            <a:schemeClr val="accent1"/>
+          </a:lnRef>
+          <a:fillRef idx="3">
+            <a:schemeClr val="accent1"/>
+          </a:fillRef>
+          <a:effectRef idx="2">
+            <a:schemeClr val="accent1"/>
+          </a:effectRef>
+          <a:fontRef idx="minor">
+            <a:schemeClr val="lt1"/>
+          </a:fontRef>
+        </p:style>
+        <p:txBody>
+          <a:bodyPr rtlCol="0" anchor="ctr" wrap="square" lIns="73152" rIns="73152" tIns="27432" bIns="27432"/>
+          <a:lstStyle/>
+          <a:p>
+            <a:pPr algn="ctr">
+              <a:lnSpc>
+                <a:spcPct val="110000"/>
+              </a:lnSpc>
+            </a:pPr>
+            <a:r>
+              <a:rPr sz="1350" b="0" i="0">
+                <a:solidFill>
+                  <a:srgbClr val="E8EAF6"/>
+                </a:solidFill>
+                <a:latin typeface="Microsoft YaHei"/>
+                <a:ea typeface="Microsoft YaHei"/>
+              </a:rPr>
+              <a:t>V2 · 安全守护</a:t>
+            </a:r>
+          </a:p>
+          <a:p>
+            <a:pPr algn="ctr">
+              <a:lnSpc>
+                <a:spcPct val="110000"/>
+              </a:lnSpc>
+            </a:pPr>
+            <a:r>
+              <a:rPr sz="1350" b="0" i="0">
+                <a:solidFill>
+                  <a:srgbClr val="E8EAF6"/>
+                </a:solidFill>
+                <a:latin typeface="Microsoft YaHei"/>
+                <a:ea typeface="Microsoft YaHei"/>
+              </a:rPr>
+              <a:t/>
+            </a:r>
+          </a:p>
+          <a:p>
+            <a:pPr algn="ctr">
+              <a:lnSpc>
+                <a:spcPct val="110000"/>
+              </a:lnSpc>
+            </a:pPr>
+            <a:r>
+              <a:rPr sz="1350" b="0" i="0">
+                <a:solidFill>
+                  <a:srgbClr val="E8EAF6"/>
+                </a:solidFill>
+                <a:latin typeface="Microsoft YaHei"/>
+                <a:ea typeface="Microsoft YaHei"/>
+              </a:rPr>
+              <a:t>跌倒检测求助</a:t>
+            </a:r>
+          </a:p>
+          <a:p>
+            <a:pPr algn="ctr">
+              <a:lnSpc>
+                <a:spcPct val="110000"/>
+              </a:lnSpc>
+            </a:pPr>
+            <a:r>
+              <a:rPr sz="1350" b="0" i="0">
+                <a:solidFill>
+                  <a:srgbClr val="E8EAF6"/>
+                </a:solidFill>
+                <a:latin typeface="Microsoft YaHei"/>
+                <a:ea typeface="Microsoft YaHei"/>
+              </a:rPr>
+              <a:t>家人健康日报</a:t>
+            </a:r>
+          </a:p>
+          <a:p>
+            <a:pPr algn="ctr">
+              <a:lnSpc>
+                <a:spcPct val="110000"/>
+              </a:lnSpc>
+            </a:pPr>
+            <a:r>
+              <a:rPr sz="1350" b="0" i="0">
+                <a:solidFill>
+                  <a:srgbClr val="E8EAF6"/>
+                </a:solidFill>
+                <a:latin typeface="Microsoft YaHei"/>
+                <a:ea typeface="Microsoft YaHei"/>
+              </a:rPr>
+              <a:t>心率/血氧体征</a:t>
+            </a:r>
+          </a:p>
+        </p:txBody>
+      </p:sp>
+      <p:sp>
+        <p:nvSpPr>
+          <p:cNvPr id="10" name="Right Arrow 9"/>
+          <p:cNvSpPr/>
+          <p:nvPr/>
+        </p:nvSpPr>
+        <p:spPr>
+          <a:xfrm>
+            <a:off x="5993892" y="2606040"/>
+            <a:ext cx="219456" cy="274320"/>
+          </a:xfrm>
+          <a:prstGeom prst="rightArrow">
+            <a:avLst/>
+          </a:prstGeom>
+          <a:solidFill>
+            <a:srgbClr val="8B93B8"/>
+          </a:solidFill>
+          <a:ln>
+            <a:noFill/>
+          </a:ln>
+          <a:effectLst/>
+        </p:spPr>
+        <p:style>
+          <a:lnRef idx="1">
+            <a:schemeClr val="accent1"/>
+          </a:lnRef>
+          <a:fillRef idx="3">
+            <a:schemeClr val="accent1"/>
+          </a:fillRef>
+          <a:effectRef idx="2">
+            <a:schemeClr val="accent1"/>
+          </a:effectRef>
+          <a:fontRef idx="minor">
+            <a:schemeClr val="lt1"/>
+          </a:fontRef>
+        </p:style>
+        <p:txBody>
+          <a:bodyPr rtlCol="0" anchor="ctr"/>
+          <a:lstStyle/>
+          <a:p>
+            <a:pPr algn="ctr"/>
+          </a:p>
+        </p:txBody>
+      </p:sp>
+      <p:sp>
+        <p:nvSpPr>
+          <p:cNvPr id="11" name="Rounded Rectangle 10"/>
+          <p:cNvSpPr/>
+          <p:nvPr/>
+        </p:nvSpPr>
+        <p:spPr>
+          <a:xfrm>
+            <a:off x="6231636" y="1554480"/>
+            <a:ext cx="2567178" cy="2468880"/>
+          </a:xfrm>
+          <a:prstGeom prst="roundRect">
+            <a:avLst>
+              <a:gd name="adj" fmla="val 12000"/>
+            </a:avLst>
+          </a:prstGeom>
+          <a:solidFill>
+            <a:srgbClr val="1A2040"/>
+          </a:solidFill>
+          <a:ln w="12700">
+            <a:solidFill>
+              <a:srgbClr val="FFB454"/>
+            </a:solidFill>
+          </a:ln>
+          <a:effectLst/>
+        </p:spPr>
+        <p:style>
+          <a:lnRef idx="1">
+            <a:schemeClr val="accent1"/>
+          </a:lnRef>
+          <a:fillRef idx="3">
+            <a:schemeClr val="accent1"/>
+          </a:fillRef>
+          <a:effectRef idx="2">
+            <a:schemeClr val="accent1"/>
+          </a:effectRef>
+          <a:fontRef idx="minor">
+            <a:schemeClr val="lt1"/>
+          </a:fontRef>
+        </p:style>
+        <p:txBody>
+          <a:bodyPr rtlCol="0" anchor="ctr" wrap="square" lIns="73152" rIns="73152" tIns="27432" bIns="27432"/>
+          <a:lstStyle/>
+          <a:p>
+            <a:pPr algn="ctr">
+              <a:lnSpc>
+                <a:spcPct val="110000"/>
+              </a:lnSpc>
+            </a:pPr>
+            <a:r>
+              <a:rPr sz="1350" b="0" i="0">
+                <a:solidFill>
+                  <a:srgbClr val="E8EAF6"/>
+                </a:solidFill>
+                <a:latin typeface="Microsoft YaHei"/>
+                <a:ea typeface="Microsoft YaHei"/>
+              </a:rPr>
+              <a:t>V3 · 规模服务</a:t>
+            </a:r>
+          </a:p>
+          <a:p>
+            <a:pPr algn="ctr">
+              <a:lnSpc>
+                <a:spcPct val="110000"/>
+              </a:lnSpc>
+            </a:pPr>
+            <a:r>
+              <a:rPr sz="1350" b="0" i="0">
+                <a:solidFill>
+                  <a:srgbClr val="E8EAF6"/>
+                </a:solidFill>
+                <a:latin typeface="Microsoft YaHei"/>
+                <a:ea typeface="Microsoft YaHei"/>
+              </a:rPr>
+              <a:t/>
+            </a:r>
+          </a:p>
+          <a:p>
+            <a:pPr algn="ctr">
+              <a:lnSpc>
+                <a:spcPct val="110000"/>
+              </a:lnSpc>
+            </a:pPr>
+            <a:r>
+              <a:rPr sz="1350" b="0" i="0">
+                <a:solidFill>
+                  <a:srgbClr val="E8EAF6"/>
+                </a:solidFill>
+                <a:latin typeface="Microsoft YaHei"/>
+                <a:ea typeface="Microsoft YaHei"/>
+              </a:rPr>
+              <a:t>方言扩展</a:t>
+            </a:r>
+          </a:p>
+          <a:p>
+            <a:pPr algn="ctr">
+              <a:lnSpc>
+                <a:spcPct val="110000"/>
+              </a:lnSpc>
+            </a:pPr>
+            <a:r>
+              <a:rPr sz="1350" b="0" i="0">
+                <a:solidFill>
+                  <a:srgbClr val="E8EAF6"/>
+                </a:solidFill>
+                <a:latin typeface="Microsoft YaHei"/>
+                <a:ea typeface="Microsoft YaHei"/>
+              </a:rPr>
+              <a:t>社区护工多对多</a:t>
+            </a:r>
+          </a:p>
+          <a:p>
+            <a:pPr algn="ctr">
+              <a:lnSpc>
+                <a:spcPct val="110000"/>
+              </a:lnSpc>
+            </a:pPr>
+            <a:r>
+              <a:rPr sz="1350" b="0" i="0">
+                <a:solidFill>
+                  <a:srgbClr val="E8EAF6"/>
+                </a:solidFill>
+                <a:latin typeface="Microsoft YaHei"/>
+                <a:ea typeface="Microsoft YaHei"/>
+              </a:rPr>
+              <a:t>端侧模型离线化</a:t>
+            </a:r>
+          </a:p>
+        </p:txBody>
+      </p:sp>
+      <p:sp>
+        <p:nvSpPr>
+          <p:cNvPr id="12" name="Right Arrow 11"/>
+          <p:cNvSpPr/>
+          <p:nvPr/>
+        </p:nvSpPr>
+        <p:spPr>
+          <a:xfrm>
+            <a:off x="8835390" y="2606040"/>
+            <a:ext cx="219456" cy="274320"/>
+          </a:xfrm>
+          <a:prstGeom prst="rightArrow">
+            <a:avLst/>
+          </a:prstGeom>
+          <a:solidFill>
+            <a:srgbClr val="8B93B8"/>
+          </a:solidFill>
+          <a:ln>
+            <a:noFill/>
+          </a:ln>
+          <a:effectLst/>
+        </p:spPr>
+        <p:style>
+          <a:lnRef idx="1">
+            <a:schemeClr val="accent1"/>
+          </a:lnRef>
+          <a:fillRef idx="3">
+            <a:schemeClr val="accent1"/>
+          </a:fillRef>
+          <a:effectRef idx="2">
+            <a:schemeClr val="accent1"/>
+          </a:effectRef>
+          <a:fontRef idx="minor">
+            <a:schemeClr val="lt1"/>
+          </a:fontRef>
+        </p:style>
+        <p:txBody>
+          <a:bodyPr rtlCol="0" anchor="ctr"/>
+          <a:lstStyle/>
+          <a:p>
+            <a:pPr algn="ctr"/>
+          </a:p>
+        </p:txBody>
+      </p:sp>
+      <p:sp>
+        <p:nvSpPr>
+          <p:cNvPr id="13" name="Rounded Rectangle 12"/>
+          <p:cNvSpPr/>
+          <p:nvPr/>
+        </p:nvSpPr>
+        <p:spPr>
+          <a:xfrm>
+            <a:off x="9073134" y="1554480"/>
+            <a:ext cx="2567178" cy="2468880"/>
+          </a:xfrm>
+          <a:prstGeom prst="roundRect">
+            <a:avLst>
+              <a:gd name="adj" fmla="val 12000"/>
+            </a:avLst>
+          </a:prstGeom>
+          <a:solidFill>
+            <a:srgbClr val="1A2040"/>
+          </a:solidFill>
+          <a:ln w="12700">
+            <a:solidFill>
+              <a:srgbClr val="FF6B81"/>
+            </a:solidFill>
+          </a:ln>
+          <a:effectLst/>
+        </p:spPr>
+        <p:style>
+          <a:lnRef idx="1">
+            <a:schemeClr val="accent1"/>
+          </a:lnRef>
+          <a:fillRef idx="3">
+            <a:schemeClr val="accent1"/>
+          </a:fillRef>
+          <a:effectRef idx="2">
+            <a:schemeClr val="accent1"/>
+          </a:effectRef>
+          <a:fontRef idx="minor">
+            <a:schemeClr val="lt1"/>
+          </a:fontRef>
+        </p:style>
+        <p:txBody>
+          <a:bodyPr rtlCol="0" anchor="ctr" wrap="square" lIns="73152" rIns="73152" tIns="27432" bIns="27432"/>
+          <a:lstStyle/>
+          <a:p>
+            <a:pPr algn="ctr">
+              <a:lnSpc>
+                <a:spcPct val="110000"/>
+              </a:lnSpc>
+            </a:pPr>
+            <a:r>
+              <a:rPr sz="1350" b="0" i="0">
+                <a:solidFill>
+                  <a:srgbClr val="E8EAF6"/>
+                </a:solidFill>
+                <a:latin typeface="Microsoft YaHei"/>
+                <a:ea typeface="Microsoft YaHei"/>
+              </a:rPr>
+              <a:t>长期 · 生态</a:t>
+            </a:r>
+          </a:p>
+          <a:p>
+            <a:pPr algn="ctr">
+              <a:lnSpc>
+                <a:spcPct val="110000"/>
+              </a:lnSpc>
+            </a:pPr>
+            <a:r>
+              <a:rPr sz="1350" b="0" i="0">
+                <a:solidFill>
+                  <a:srgbClr val="E8EAF6"/>
+                </a:solidFill>
+                <a:latin typeface="Microsoft YaHei"/>
+                <a:ea typeface="Microsoft YaHei"/>
+              </a:rPr>
+              <a:t/>
+            </a:r>
+          </a:p>
+          <a:p>
+            <a:pPr algn="ctr">
+              <a:lnSpc>
+                <a:spcPct val="110000"/>
+              </a:lnSpc>
+            </a:pPr>
+            <a:r>
+              <a:rPr sz="1350" b="0" i="0">
+                <a:solidFill>
+                  <a:srgbClr val="E8EAF6"/>
+                </a:solidFill>
+                <a:latin typeface="Microsoft YaHei"/>
+                <a:ea typeface="Microsoft YaHei"/>
+              </a:rPr>
+              <a:t>可复用模板</a:t>
+            </a:r>
+          </a:p>
+          <a:p>
+            <a:pPr algn="ctr">
+              <a:lnSpc>
+                <a:spcPct val="110000"/>
+              </a:lnSpc>
+            </a:pPr>
+            <a:r>
+              <a:rPr sz="1350" b="0" i="0">
+                <a:solidFill>
+                  <a:srgbClr val="E8EAF6"/>
+                </a:solidFill>
+                <a:latin typeface="Microsoft YaHei"/>
+                <a:ea typeface="Microsoft YaHei"/>
+              </a:rPr>
+              <a:t>智能体商店</a:t>
+            </a:r>
+          </a:p>
+          <a:p>
+            <a:pPr algn="ctr">
+              <a:lnSpc>
+                <a:spcPct val="110000"/>
+              </a:lnSpc>
+            </a:pPr>
+            <a:r>
+              <a:rPr sz="1350" b="0" i="0">
+                <a:solidFill>
+                  <a:srgbClr val="E8EAF6"/>
+                </a:solidFill>
+                <a:latin typeface="Microsoft YaHei"/>
+                <a:ea typeface="Microsoft YaHei"/>
+              </a:rPr>
+              <a:t>开放工具组件</a:t>
+            </a:r>
+          </a:p>
+        </p:txBody>
+      </p:sp>
+      <p:sp>
+        <p:nvSpPr>
+          <p:cNvPr id="14" name="TextBox 13"/>
+          <p:cNvSpPr txBox="1"/>
+          <p:nvPr/>
+        </p:nvSpPr>
+        <p:spPr>
+          <a:xfrm>
+            <a:off x="548640" y="4526280"/>
+            <a:ext cx="11064240" cy="457200"/>
+          </a:xfrm>
+          <a:prstGeom prst="rect">
+            <a:avLst/>
+          </a:prstGeom>
+          <a:noFill/>
+        </p:spPr>
+        <p:txBody>
+          <a:bodyPr wrap="square" anchor="t" lIns="0" rIns="0" tIns="0" bIns="0">
+            <a:spAutoFit/>
+          </a:bodyPr>
+          <a:lstStyle/>
+          <a:p>
+            <a:pPr algn="l">
+              <a:lnSpc>
+                <a:spcPct val="112000"/>
+              </a:lnSpc>
+            </a:pPr>
+            <a:r>
+              <a:rPr sz="1500" b="1" i="0">
+                <a:solidFill>
+                  <a:srgbClr val="FFB454"/>
+                </a:solidFill>
+                <a:latin typeface="Microsoft YaHei"/>
+                <a:ea typeface="Microsoft YaHei"/>
+              </a:rPr>
+              <a:t>设计原则：先做深一个场景，再做宽多个场景；每一步都保留可演示、可验证的任务闭环。</a:t>
+            </a:r>
+          </a:p>
+        </p:txBody>
+      </p:sp>
+      <p:sp>
+        <p:nvSpPr>
+          <p:cNvPr id="15" name="TextBox 14"/>
+          <p:cNvSpPr txBox="1"/>
+          <p:nvPr/>
+        </p:nvSpPr>
+        <p:spPr>
+          <a:xfrm>
+            <a:off x="9418320" y="6510528"/>
+            <a:ext cx="2377440" cy="274320"/>
+          </a:xfrm>
+          <a:prstGeom prst="rect">
+            <a:avLst/>
+          </a:prstGeom>
+          <a:noFill/>
+        </p:spPr>
+        <p:txBody>
+          <a:bodyPr wrap="square" anchor="t" lIns="0" rIns="0" tIns="0" bIns="0">
+            <a:spAutoFit/>
+          </a:bodyPr>
+          <a:lstStyle/>
+          <a:p>
+            <a:pPr algn="r">
+              <a:lnSpc>
+                <a:spcPct val="112000"/>
+              </a:lnSpc>
+            </a:pPr>
+            <a:r>
+              <a:rPr sz="950" b="0" i="0">
+                <a:solidFill>
+                  <a:srgbClr val="8B93B8"/>
+                </a:solidFill>
+                <a:latin typeface="Microsoft YaHei"/>
+                <a:ea typeface="Microsoft YaHei"/>
+              </a:rPr>
+              <a:t>暖眸 · 居家养老 AI 眼镜智能体  21</a:t>
+            </a:r>
+          </a:p>
+        </p:txBody>
+      </p:sp>
+    </p:spTree>
+  </p:cSld>
+  <p:clrMapOvr>
+    <a:masterClrMapping/>
+  </p:clrMapOvr>
+</p:sld>
+</file>
+
+<file path=ppt/slides/slide22.xml><?xml version="1.0" encoding="utf-8"?>
+<p:sld xmlns:a="http://schemas.openxmlformats.org/drawingml/2006/main" xmlns:p="http://schemas.openxmlformats.org/presentationml/2006/main" xmlns:r="http://schemas.openxmlformats.org/officeDocument/2006/relationships">
+  <p:cSld>
+    <p:bg>
+      <p:bgPr>
+        <a:solidFill>
+          <a:srgbClr val="0D1020"/>
+        </a:solidFill>
+        <a:effectLst/>
+      </p:bgPr>
+    </p:bg>
+    <p:spTree>
+      <p:nvGrpSpPr>
+        <p:cNvPr id="1" name=""/>
+        <p:cNvGrpSpPr/>
+        <p:nvPr/>
+      </p:nvGrpSpPr>
+      <p:grpSpPr/>
+      <p:sp>
+        <p:nvSpPr>
+          <p:cNvPr id="2" name="TextBox 1"/>
+          <p:cNvSpPr txBox="1"/>
+          <p:nvPr/>
+        </p:nvSpPr>
+        <p:spPr>
+          <a:xfrm>
+            <a:off x="548640" y="256032"/>
+            <a:ext cx="822960" cy="502920"/>
+          </a:xfrm>
+          <a:prstGeom prst="rect">
+            <a:avLst/>
+          </a:prstGeom>
+          <a:noFill/>
+        </p:spPr>
+        <p:txBody>
+          <a:bodyPr wrap="square" anchor="t" lIns="0" rIns="0" tIns="0" bIns="0">
+            <a:spAutoFit/>
+          </a:bodyPr>
+          <a:lstStyle/>
+          <a:p>
+            <a:pPr algn="l">
+              <a:lnSpc>
+                <a:spcPct val="112000"/>
+              </a:lnSpc>
+            </a:pPr>
+            <a:r>
+              <a:rPr sz="2300" b="1" i="0">
+                <a:solidFill>
+                  <a:srgbClr val="6D8DFF"/>
+                </a:solidFill>
+                <a:latin typeface="Microsoft YaHei"/>
+                <a:ea typeface="Microsoft YaHei"/>
+              </a:rPr>
+              <a:t>22</a:t>
+            </a:r>
+          </a:p>
+        </p:txBody>
+      </p:sp>
+      <p:sp>
+        <p:nvSpPr>
+          <p:cNvPr id="3" name="TextBox 2"/>
+          <p:cNvSpPr txBox="1"/>
+          <p:nvPr/>
+        </p:nvSpPr>
+        <p:spPr>
+          <a:xfrm>
+            <a:off x="1143000" y="219456"/>
+            <a:ext cx="10424160" cy="320040"/>
+          </a:xfrm>
+          <a:prstGeom prst="rect">
+            <a:avLst/>
+          </a:prstGeom>
+          <a:noFill/>
+        </p:spPr>
+        <p:txBody>
+          <a:bodyPr wrap="square" anchor="t" lIns="0" rIns="0" tIns="0" bIns="0">
+            <a:spAutoFit/>
+          </a:bodyPr>
+          <a:lstStyle/>
+          <a:p>
+            <a:pPr algn="l">
+              <a:lnSpc>
+                <a:spcPct val="112000"/>
+              </a:lnSpc>
+            </a:pPr>
+            <a:r>
+              <a:rPr sz="1150" b="1" i="0">
+                <a:solidFill>
+                  <a:srgbClr val="FFB454"/>
+                </a:solidFill>
+                <a:latin typeface="Microsoft YaHei"/>
+                <a:ea typeface="Microsoft YaHei"/>
+              </a:rPr>
+              <a:t>10 迭代计划 · 交付物清单</a:t>
+            </a:r>
+          </a:p>
+        </p:txBody>
+      </p:sp>
+      <p:sp>
+        <p:nvSpPr>
+          <p:cNvPr id="4" name="TextBox 3"/>
+          <p:cNvSpPr txBox="1"/>
+          <p:nvPr/>
+        </p:nvSpPr>
+        <p:spPr>
+          <a:xfrm>
+            <a:off x="1143000" y="512064"/>
+            <a:ext cx="10424160" cy="548640"/>
+          </a:xfrm>
+          <a:prstGeom prst="rect">
+            <a:avLst/>
+          </a:prstGeom>
+          <a:noFill/>
+        </p:spPr>
+        <p:txBody>
+          <a:bodyPr wrap="square" anchor="t" lIns="0" rIns="0" tIns="0" bIns="0">
+            <a:spAutoFit/>
+          </a:bodyPr>
+          <a:lstStyle/>
+          <a:p>
+            <a:pPr algn="l">
+              <a:lnSpc>
+                <a:spcPct val="112000"/>
+              </a:lnSpc>
+            </a:pPr>
+            <a:r>
+              <a:rPr sz="2400" b="1" i="0">
+                <a:solidFill>
+                  <a:srgbClr val="E8EAF6"/>
+                </a:solidFill>
+                <a:latin typeface="Microsoft YaHei"/>
+                <a:ea typeface="Microsoft YaHei"/>
+              </a:rPr>
+              <a:t>参赛提交材料</a:t>
+            </a:r>
+          </a:p>
+        </p:txBody>
+      </p:sp>
+      <p:sp>
+        <p:nvSpPr>
+          <p:cNvPr id="5" name="Rectangle 4"/>
+          <p:cNvSpPr/>
+          <p:nvPr/>
+        </p:nvSpPr>
+        <p:spPr>
+          <a:xfrm>
+            <a:off x="548640" y="6492240"/>
+            <a:ext cx="11091672" cy="25400"/>
+          </a:xfrm>
+          <a:prstGeom prst="rect">
+            <a:avLst/>
+          </a:prstGeom>
+          <a:solidFill>
+            <a:srgbClr val="2A3157"/>
+          </a:solidFill>
+          <a:ln>
+            <a:noFill/>
+          </a:ln>
+          <a:effectLst/>
+        </p:spPr>
+        <p:style>
+          <a:lnRef idx="1">
+            <a:schemeClr val="accent1"/>
+          </a:lnRef>
+          <a:fillRef idx="3">
+            <a:schemeClr val="accent1"/>
+          </a:fillRef>
+          <a:effectRef idx="2">
+            <a:schemeClr val="accent1"/>
+          </a:effectRef>
+          <a:fontRef idx="minor">
+            <a:schemeClr val="lt1"/>
+          </a:fontRef>
+        </p:style>
+        <p:txBody>
+          <a:bodyPr rtlCol="0" anchor="ctr"/>
+          <a:lstStyle/>
+          <a:p>
+            <a:pPr algn="ctr"/>
+          </a:p>
+        </p:txBody>
+      </p:sp>
+      <p:sp>
+        <p:nvSpPr>
+          <p:cNvPr id="6" name="TextBox 5"/>
+          <p:cNvSpPr txBox="1"/>
+          <p:nvPr/>
+        </p:nvSpPr>
+        <p:spPr>
+          <a:xfrm>
+            <a:off x="9418320" y="6510528"/>
+            <a:ext cx="2377440" cy="274320"/>
+          </a:xfrm>
+          <a:prstGeom prst="rect">
+            <a:avLst/>
+          </a:prstGeom>
+          <a:noFill/>
+        </p:spPr>
+        <p:txBody>
+          <a:bodyPr wrap="square" anchor="t" lIns="0" rIns="0" tIns="0" bIns="0">
+            <a:spAutoFit/>
+          </a:bodyPr>
+          <a:lstStyle/>
+          <a:p>
+            <a:pPr algn="r">
+              <a:lnSpc>
+                <a:spcPct val="112000"/>
+              </a:lnSpc>
+            </a:pPr>
+            <a:r>
+              <a:rPr sz="950" b="0" i="0">
+                <a:solidFill>
+                  <a:srgbClr val="8B93B8"/>
+                </a:solidFill>
+                <a:latin typeface="Microsoft YaHei"/>
+                <a:ea typeface="Microsoft YaHei"/>
+              </a:rPr>
+              <a:t>暖眸 · 居家养老 AI 眼镜智能体  22</a:t>
             </a:r>
           </a:p>
         </p:txBody>
@@ -18833,7 +21967,7 @@
                 <a:latin typeface="Microsoft YaHei"/>
                 <a:ea typeface="Microsoft YaHei"/>
               </a:rPr>
-              <a:t>暖眸 · 居家养老 AI 眼镜智能体  20</a:t>
+              <a:t>暖眸 · 居家养老 AI 眼镜智能体  22</a:t>
             </a:r>
           </a:p>
         </p:txBody>

--- a/ppt/暖眸-居家养老AI眼镜智能体-项目说明.pptx
+++ b/ppt/暖眸-居家养老AI眼镜智能体-项目说明.pptx
@@ -5290,7 +5290,7 @@
                 <a:latin typeface="Microsoft YaHei"/>
                 <a:ea typeface="Microsoft YaHei"/>
               </a:rPr>
-              <a:t>＋ Web 概念演示（无需 Key）＋ 演示视频脚本 ＋ 设计文档</a:t>
+              <a:t>＋ Web 概念演示（无需 Key）＋ 功能闭环演示 ＋ 设计文档</a:t>
             </a:r>
           </a:p>
         </p:txBody>
@@ -21423,7 +21423,7 @@
                 <a:latin typeface="Microsoft YaHei"/>
                 <a:ea typeface="Microsoft YaHei"/>
               </a:rPr>
-              <a:t>docs/：产品设计方案、演示分镜脚本</a:t>
+              <a:t>docs/：产品简介、产品设计方案、功能闭环演示</a:t>
             </a:r>
           </a:p>
         </p:txBody>
@@ -21807,7 +21807,7 @@
                 <a:latin typeface="Microsoft YaHei"/>
                 <a:ea typeface="Microsoft YaHei"/>
               </a:rPr>
-              <a:t>端到端测试 + 演示视频脚本</a:t>
+              <a:t>端到端测试 + 功能闭环演示（场景化）</a:t>
             </a:r>
           </a:p>
         </p:txBody>
